--- a/S1-CL3-Cloud-Infrastructure-Improvement/delivery/topic_02/Topic_02_Slides.pptx
+++ b/S1-CL3-Cloud-Infrastructure-Improvement/delivery/topic_02/Topic_02_Slides.pptx
@@ -3472,7 +3472,7 @@
                 </a:solidFill>
                 <a:latin typeface="Roboto"/>
               </a:rPr>
-              <a:t>For the practice vehicle, design the reliability improvements to the Topic-1 goals: app-tier Multi-AZ, DB backup/restore, cross-Region DR.</a:t>
+              <a:t>For the practice vehicle (the website), design the reliability improvements to the Topic-1 goals across the app, data and DR tiers — you decide what each tier needs, to the goals and no further.</a:t>
             </a:r>
           </a:p>
           <a:p>
@@ -3503,7 +3503,7 @@
                 </a:solidFill>
                 <a:latin typeface="Roboto"/>
               </a:rPr>
-              <a:t>Argue ONE cost-benefit trade-off explicitly (the Multi-AZ-database rejection is the model) and show how each change meets a named goal.</a:t>
+              <a:t>Argue ONE cost-benefit trade-off explicitly and show how each change meets a named goal. NB the website runs MySQL with no legacy single-instance constraint, so the data-tier call (e.g. whether to go Multi-AZ) is yours to justify — potentially the OPPOSITE call to Ledgerline's, reached by the same cost-benefit reasoning.</a:t>
             </a:r>
           </a:p>
         </p:txBody>

--- a/S1-CL3-Cloud-Infrastructure-Improvement/delivery/topic_02/Topic_02_Slides.pptx
+++ b/S1-CL3-Cloud-Infrastructure-Improvement/delivery/topic_02/Topic_02_Slides.pptx
@@ -4123,7 +4123,7 @@
           <a:noFill/>
         </p:spPr>
         <p:txBody>
-          <a:bodyPr wrap="square" anchor="t" lIns="0" rIns="0" tIns="0" bIns="0">
+          <a:bodyPr wrap="square" anchor="ctr" lIns="0" rIns="0" tIns="0" bIns="0">
             <a:spAutoFit/>
           </a:bodyPr>
           <a:lstStyle/>
@@ -4140,7 +4140,7 @@
               </a:spcAft>
             </a:pPr>
             <a:r>
-              <a:rPr sz="1800" b="1" i="0">
+              <a:rPr sz="2400" b="1" i="0">
                 <a:solidFill>
                   <a:srgbClr val="EDAB0C"/>
                 </a:solidFill>
@@ -4149,7 +4149,7 @@
               <a:t>■  </a:t>
             </a:r>
             <a:r>
-              <a:rPr sz="1800" b="0" i="0">
+              <a:rPr sz="2400" b="0" i="0">
                 <a:solidFill>
                   <a:srgbClr val="2A2929"/>
                 </a:solidFill>
@@ -4171,7 +4171,7 @@
               </a:spcAft>
             </a:pPr>
             <a:r>
-              <a:rPr sz="1800" b="1" i="0">
+              <a:rPr sz="2400" b="1" i="0">
                 <a:solidFill>
                   <a:srgbClr val="EDAB0C"/>
                 </a:solidFill>
@@ -4180,7 +4180,7 @@
               <a:t>■  </a:t>
             </a:r>
             <a:r>
-              <a:rPr sz="1800" b="0" i="0">
+              <a:rPr sz="2400" b="0" i="0">
                 <a:solidFill>
                   <a:srgbClr val="2A2929"/>
                 </a:solidFill>
@@ -4202,7 +4202,7 @@
               </a:spcAft>
             </a:pPr>
             <a:r>
-              <a:rPr sz="1800" b="1" i="0">
+              <a:rPr sz="2400" b="1" i="0">
                 <a:solidFill>
                   <a:srgbClr val="EDAB0C"/>
                 </a:solidFill>
@@ -4211,7 +4211,7 @@
               <a:t>■  </a:t>
             </a:r>
             <a:r>
-              <a:rPr sz="1800" b="0" i="0">
+              <a:rPr sz="2400" b="0" i="0">
                 <a:solidFill>
                   <a:srgbClr val="2A2929"/>
                 </a:solidFill>
@@ -4465,7 +4465,7 @@
           <a:noFill/>
         </p:spPr>
         <p:txBody>
-          <a:bodyPr wrap="square" anchor="t" lIns="0" rIns="0" tIns="0" bIns="0">
+          <a:bodyPr wrap="square" anchor="ctr" lIns="0" rIns="0" tIns="0" bIns="0">
             <a:spAutoFit/>
           </a:bodyPr>
           <a:lstStyle/>
@@ -4482,7 +4482,7 @@
               </a:spcAft>
             </a:pPr>
             <a:r>
-              <a:rPr sz="1800" b="1" i="0">
+              <a:rPr sz="2400" b="1" i="0">
                 <a:solidFill>
                   <a:srgbClr val="EDAB0C"/>
                 </a:solidFill>
@@ -4491,7 +4491,7 @@
               <a:t>■  </a:t>
             </a:r>
             <a:r>
-              <a:rPr sz="1800" b="0" i="0">
+              <a:rPr sz="2400" b="0" i="0">
                 <a:solidFill>
                   <a:srgbClr val="2A2929"/>
                 </a:solidFill>
@@ -4513,7 +4513,7 @@
               </a:spcAft>
             </a:pPr>
             <a:r>
-              <a:rPr sz="1800" b="1" i="0">
+              <a:rPr sz="2400" b="1" i="0">
                 <a:solidFill>
                   <a:srgbClr val="EDAB0C"/>
                 </a:solidFill>
@@ -4522,7 +4522,7 @@
               <a:t>■  </a:t>
             </a:r>
             <a:r>
-              <a:rPr sz="1800" b="0" i="0">
+              <a:rPr sz="2400" b="0" i="0">
                 <a:solidFill>
                   <a:srgbClr val="2A2929"/>
                 </a:solidFill>
@@ -4544,7 +4544,7 @@
               </a:spcAft>
             </a:pPr>
             <a:r>
-              <a:rPr sz="1800" b="1" i="0">
+              <a:rPr sz="2400" b="1" i="0">
                 <a:solidFill>
                   <a:srgbClr val="EDAB0C"/>
                 </a:solidFill>
@@ -4553,7 +4553,7 @@
               <a:t>■  </a:t>
             </a:r>
             <a:r>
-              <a:rPr sz="1800" b="0" i="0">
+              <a:rPr sz="2400" b="0" i="0">
                 <a:solidFill>
                   <a:srgbClr val="2A2929"/>
                 </a:solidFill>
@@ -5512,7 +5512,7 @@
           <a:noFill/>
         </p:spPr>
         <p:txBody>
-          <a:bodyPr wrap="square" anchor="t" lIns="0" rIns="0" tIns="0" bIns="0">
+          <a:bodyPr wrap="square" anchor="ctr" lIns="0" rIns="0" tIns="0" bIns="0">
             <a:spAutoFit/>
           </a:bodyPr>
           <a:lstStyle/>
@@ -5529,7 +5529,7 @@
               </a:spcAft>
             </a:pPr>
             <a:r>
-              <a:rPr sz="1800" b="1" i="0">
+              <a:rPr sz="2400" b="1" i="0">
                 <a:solidFill>
                   <a:srgbClr val="EDAB0C"/>
                 </a:solidFill>
@@ -5538,7 +5538,7 @@
               <a:t>■  </a:t>
             </a:r>
             <a:r>
-              <a:rPr sz="1800" b="0" i="0">
+              <a:rPr sz="2400" b="0" i="0">
                 <a:solidFill>
                   <a:srgbClr val="2A2929"/>
                 </a:solidFill>
@@ -5560,7 +5560,7 @@
               </a:spcAft>
             </a:pPr>
             <a:r>
-              <a:rPr sz="1800" b="1" i="0">
+              <a:rPr sz="2400" b="1" i="0">
                 <a:solidFill>
                   <a:srgbClr val="EDAB0C"/>
                 </a:solidFill>
@@ -5569,7 +5569,7 @@
               <a:t>■  </a:t>
             </a:r>
             <a:r>
-              <a:rPr sz="1800" b="0" i="0">
+              <a:rPr sz="2400" b="0" i="0">
                 <a:solidFill>
                   <a:srgbClr val="2A2929"/>
                 </a:solidFill>
@@ -5591,7 +5591,7 @@
               </a:spcAft>
             </a:pPr>
             <a:r>
-              <a:rPr sz="1800" b="1" i="0">
+              <a:rPr sz="2400" b="1" i="0">
                 <a:solidFill>
                   <a:srgbClr val="EDAB0C"/>
                 </a:solidFill>
@@ -5600,7 +5600,7 @@
               <a:t>■  </a:t>
             </a:r>
             <a:r>
-              <a:rPr sz="1800" b="0" i="0">
+              <a:rPr sz="2400" b="0" i="0">
                 <a:solidFill>
                   <a:srgbClr val="2A2929"/>
                 </a:solidFill>
@@ -6865,7 +6865,7 @@
           <a:noFill/>
         </p:spPr>
         <p:txBody>
-          <a:bodyPr wrap="square" anchor="t" lIns="0" rIns="0" tIns="0" bIns="0">
+          <a:bodyPr wrap="square" anchor="ctr" lIns="0" rIns="0" tIns="0" bIns="0">
             <a:spAutoFit/>
           </a:bodyPr>
           <a:lstStyle/>
@@ -6882,7 +6882,7 @@
               </a:spcAft>
             </a:pPr>
             <a:r>
-              <a:rPr sz="1800" b="1" i="0">
+              <a:rPr sz="2400" b="1" i="0">
                 <a:solidFill>
                   <a:srgbClr val="EDAB0C"/>
                 </a:solidFill>
@@ -6891,7 +6891,7 @@
               <a:t>■  </a:t>
             </a:r>
             <a:r>
-              <a:rPr sz="1800" b="0" i="0">
+              <a:rPr sz="2400" b="0" i="0">
                 <a:solidFill>
                   <a:srgbClr val="2A2929"/>
                 </a:solidFill>
@@ -6913,7 +6913,7 @@
               </a:spcAft>
             </a:pPr>
             <a:r>
-              <a:rPr sz="1800" b="1" i="0">
+              <a:rPr sz="2400" b="1" i="0">
                 <a:solidFill>
                   <a:srgbClr val="EDAB0C"/>
                 </a:solidFill>
@@ -6922,7 +6922,7 @@
               <a:t>■  </a:t>
             </a:r>
             <a:r>
-              <a:rPr sz="1800" b="0" i="0">
+              <a:rPr sz="2400" b="0" i="0">
                 <a:solidFill>
                   <a:srgbClr val="2A2929"/>
                 </a:solidFill>
@@ -6944,7 +6944,7 @@
               </a:spcAft>
             </a:pPr>
             <a:r>
-              <a:rPr sz="1800" b="1" i="0">
+              <a:rPr sz="2400" b="1" i="0">
                 <a:solidFill>
                   <a:srgbClr val="EDAB0C"/>
                 </a:solidFill>
@@ -6953,7 +6953,7 @@
               <a:t>■  </a:t>
             </a:r>
             <a:r>
-              <a:rPr sz="1800" b="0" i="0">
+              <a:rPr sz="2400" b="0" i="0">
                 <a:solidFill>
                   <a:srgbClr val="2A2929"/>
                 </a:solidFill>
@@ -7573,7 +7573,7 @@
           <a:noFill/>
         </p:spPr>
         <p:txBody>
-          <a:bodyPr wrap="square" anchor="t" lIns="0" rIns="0" tIns="0" bIns="0">
+          <a:bodyPr wrap="square" anchor="ctr" lIns="0" rIns="0" tIns="0" bIns="0">
             <a:spAutoFit/>
           </a:bodyPr>
           <a:lstStyle/>
@@ -7590,7 +7590,7 @@
               </a:spcAft>
             </a:pPr>
             <a:r>
-              <a:rPr sz="1800" b="1" i="0">
+              <a:rPr sz="2200" b="1" i="0">
                 <a:solidFill>
                   <a:srgbClr val="EDAB0C"/>
                 </a:solidFill>
@@ -7599,7 +7599,7 @@
               <a:t>■  </a:t>
             </a:r>
             <a:r>
-              <a:rPr sz="1800" b="0" i="0">
+              <a:rPr sz="2200" b="0" i="0">
                 <a:solidFill>
                   <a:srgbClr val="2A2929"/>
                 </a:solidFill>
@@ -7621,7 +7621,7 @@
               </a:spcAft>
             </a:pPr>
             <a:r>
-              <a:rPr sz="1800" b="1" i="0">
+              <a:rPr sz="2200" b="1" i="0">
                 <a:solidFill>
                   <a:srgbClr val="EDAB0C"/>
                 </a:solidFill>
@@ -7630,7 +7630,7 @@
               <a:t>■  </a:t>
             </a:r>
             <a:r>
-              <a:rPr sz="1800" b="0" i="0">
+              <a:rPr sz="2200" b="0" i="0">
                 <a:solidFill>
                   <a:srgbClr val="2A2929"/>
                 </a:solidFill>
@@ -7652,7 +7652,7 @@
               </a:spcAft>
             </a:pPr>
             <a:r>
-              <a:rPr sz="1800" b="1" i="0">
+              <a:rPr sz="2200" b="1" i="0">
                 <a:solidFill>
                   <a:srgbClr val="EDAB0C"/>
                 </a:solidFill>
@@ -7661,7 +7661,7 @@
               <a:t>■  </a:t>
             </a:r>
             <a:r>
-              <a:rPr sz="1800" b="0" i="0">
+              <a:rPr sz="2200" b="0" i="0">
                 <a:solidFill>
                   <a:srgbClr val="2A2929"/>
                 </a:solidFill>
@@ -7683,7 +7683,7 @@
               </a:spcAft>
             </a:pPr>
             <a:r>
-              <a:rPr sz="1800" b="1" i="0">
+              <a:rPr sz="2200" b="1" i="0">
                 <a:solidFill>
                   <a:srgbClr val="EDAB0C"/>
                 </a:solidFill>
@@ -7692,7 +7692,7 @@
               <a:t>■  </a:t>
             </a:r>
             <a:r>
-              <a:rPr sz="1800" b="0" i="0">
+              <a:rPr sz="2200" b="0" i="0">
                 <a:solidFill>
                   <a:srgbClr val="2A2929"/>
                 </a:solidFill>
@@ -8594,7 +8594,7 @@
           <a:noFill/>
         </p:spPr>
         <p:txBody>
-          <a:bodyPr wrap="square" anchor="t" lIns="0" rIns="0" tIns="0" bIns="0">
+          <a:bodyPr wrap="square" anchor="ctr" lIns="0" rIns="0" tIns="0" bIns="0">
             <a:spAutoFit/>
           </a:bodyPr>
           <a:lstStyle/>
@@ -8611,7 +8611,7 @@
               </a:spcAft>
             </a:pPr>
             <a:r>
-              <a:rPr sz="1800" b="1" i="0">
+              <a:rPr sz="2400" b="1" i="0">
                 <a:solidFill>
                   <a:srgbClr val="EDAB0C"/>
                 </a:solidFill>
@@ -8620,7 +8620,7 @@
               <a:t>■  </a:t>
             </a:r>
             <a:r>
-              <a:rPr sz="1800" b="0" i="0">
+              <a:rPr sz="2400" b="0" i="0">
                 <a:solidFill>
                   <a:srgbClr val="2A2929"/>
                 </a:solidFill>
@@ -8642,7 +8642,7 @@
               </a:spcAft>
             </a:pPr>
             <a:r>
-              <a:rPr sz="1800" b="1" i="0">
+              <a:rPr sz="2400" b="1" i="0">
                 <a:solidFill>
                   <a:srgbClr val="EDAB0C"/>
                 </a:solidFill>
@@ -8651,7 +8651,7 @@
               <a:t>■  </a:t>
             </a:r>
             <a:r>
-              <a:rPr sz="1800" b="0" i="0">
+              <a:rPr sz="2400" b="0" i="0">
                 <a:solidFill>
                   <a:srgbClr val="2A2929"/>
                 </a:solidFill>
@@ -8673,7 +8673,7 @@
               </a:spcAft>
             </a:pPr>
             <a:r>
-              <a:rPr sz="1800" b="1" i="0">
+              <a:rPr sz="2400" b="1" i="0">
                 <a:solidFill>
                   <a:srgbClr val="EDAB0C"/>
                 </a:solidFill>
@@ -8682,7 +8682,7 @@
               <a:t>■  </a:t>
             </a:r>
             <a:r>
-              <a:rPr sz="1800" b="0" i="0">
+              <a:rPr sz="2400" b="0" i="0">
                 <a:solidFill>
                   <a:srgbClr val="2A2929"/>
                 </a:solidFill>
@@ -8936,7 +8936,7 @@
           <a:noFill/>
         </p:spPr>
         <p:txBody>
-          <a:bodyPr wrap="square" anchor="t" lIns="0" rIns="0" tIns="0" bIns="0">
+          <a:bodyPr wrap="square" anchor="ctr" lIns="0" rIns="0" tIns="0" bIns="0">
             <a:spAutoFit/>
           </a:bodyPr>
           <a:lstStyle/>
@@ -8953,7 +8953,7 @@
               </a:spcAft>
             </a:pPr>
             <a:r>
-              <a:rPr sz="1800" b="1" i="0">
+              <a:rPr sz="2400" b="1" i="0">
                 <a:solidFill>
                   <a:srgbClr val="EDAB0C"/>
                 </a:solidFill>
@@ -8962,7 +8962,7 @@
               <a:t>■  </a:t>
             </a:r>
             <a:r>
-              <a:rPr sz="1800" b="0" i="0">
+              <a:rPr sz="2400" b="0" i="0">
                 <a:solidFill>
                   <a:srgbClr val="2A2929"/>
                 </a:solidFill>
@@ -8984,7 +8984,7 @@
               </a:spcAft>
             </a:pPr>
             <a:r>
-              <a:rPr sz="1800" b="1" i="0">
+              <a:rPr sz="2400" b="1" i="0">
                 <a:solidFill>
                   <a:srgbClr val="EDAB0C"/>
                 </a:solidFill>
@@ -8993,7 +8993,7 @@
               <a:t>■  </a:t>
             </a:r>
             <a:r>
-              <a:rPr sz="1800" b="0" i="0">
+              <a:rPr sz="2400" b="0" i="0">
                 <a:solidFill>
                   <a:srgbClr val="2A2929"/>
                 </a:solidFill>
@@ -9015,7 +9015,7 @@
               </a:spcAft>
             </a:pPr>
             <a:r>
-              <a:rPr sz="1800" b="1" i="0">
+              <a:rPr sz="2400" b="1" i="0">
                 <a:solidFill>
                   <a:srgbClr val="EDAB0C"/>
                 </a:solidFill>
@@ -9024,7 +9024,7 @@
               <a:t>■  </a:t>
             </a:r>
             <a:r>
-              <a:rPr sz="1800" b="0" i="0">
+              <a:rPr sz="2400" b="0" i="0">
                 <a:solidFill>
                   <a:srgbClr val="2A2929"/>
                 </a:solidFill>

--- a/S1-CL3-Cloud-Infrastructure-Improvement/delivery/topic_02/Topic_02_Slides.pptx
+++ b/S1-CL3-Cloud-Infrastructure-Improvement/delivery/topic_02/Topic_02_Slides.pptx
@@ -7,22 +7,22 @@
   <p:sldIdLst>
     <p:sldId id="256" r:id="rId7"/>
     <p:sldId id="257" r:id="rId8"/>
-    <p:sldId id="258" r:id="rId9"/>
-    <p:sldId id="259" r:id="rId10"/>
-    <p:sldId id="260" r:id="rId11"/>
-    <p:sldId id="261" r:id="rId12"/>
-    <p:sldId id="262" r:id="rId13"/>
-    <p:sldId id="263" r:id="rId14"/>
-    <p:sldId id="264" r:id="rId15"/>
-    <p:sldId id="265" r:id="rId16"/>
-    <p:sldId id="266" r:id="rId17"/>
-    <p:sldId id="267" r:id="rId18"/>
-    <p:sldId id="268" r:id="rId19"/>
-    <p:sldId id="269" r:id="rId20"/>
-    <p:sldId id="270" r:id="rId21"/>
-    <p:sldId id="271" r:id="rId22"/>
-    <p:sldId id="272" r:id="rId23"/>
-    <p:sldId id="273" r:id="rId24"/>
+    <p:sldId id="258" r:id="rId10"/>
+    <p:sldId id="259" r:id="rId11"/>
+    <p:sldId id="260" r:id="rId12"/>
+    <p:sldId id="261" r:id="rId13"/>
+    <p:sldId id="262" r:id="rId14"/>
+    <p:sldId id="263" r:id="rId15"/>
+    <p:sldId id="264" r:id="rId16"/>
+    <p:sldId id="265" r:id="rId17"/>
+    <p:sldId id="266" r:id="rId18"/>
+    <p:sldId id="267" r:id="rId19"/>
+    <p:sldId id="268" r:id="rId20"/>
+    <p:sldId id="269" r:id="rId21"/>
+    <p:sldId id="270" r:id="rId22"/>
+    <p:sldId id="271" r:id="rId23"/>
+    <p:sldId id="272" r:id="rId24"/>
+    <p:sldId id="273" r:id="rId25"/>
   </p:sldIdLst>
   <p:sldSz cx="12191695" cy="6858000" type="screen4x3"/>
   <p:notesSz cx="6858000" cy="9144000"/>
@@ -122,6 +122,1926 @@
     </a:lvl9pPr>
   </p:defaultTextStyle>
 </p:presentation>
+</file>
+
+<file path=ppt/notesMasters/notesMaster1.xml><?xml version="1.0" encoding="utf-8"?>
+<p:notesMaster xmlns:a="http://schemas.openxmlformats.org/drawingml/2006/main" xmlns:p="http://schemas.openxmlformats.org/presentationml/2006/main" xmlns:r="http://schemas.openxmlformats.org/officeDocument/2006/relationships">
+  <p:cSld>
+    <p:bg>
+      <p:bgRef idx="1001">
+        <a:schemeClr val="bg1"/>
+      </p:bgRef>
+    </p:bg>
+    <p:spTree>
+      <p:nvGrpSpPr>
+        <p:cNvPr id="1" name=""/>
+        <p:cNvGrpSpPr/>
+        <p:nvPr/>
+      </p:nvGrpSpPr>
+      <p:grpSpPr>
+        <a:xfrm>
+          <a:off x="0" y="0"/>
+          <a:ext cx="0" cy="0"/>
+          <a:chOff x="0" y="0"/>
+          <a:chExt cx="0" cy="0"/>
+        </a:xfrm>
+      </p:grpSpPr>
+      <p:sp>
+        <p:nvSpPr>
+          <p:cNvPr id="2" name="Header Placeholder 1"/>
+          <p:cNvSpPr>
+            <a:spLocks noGrp="1"/>
+          </p:cNvSpPr>
+          <p:nvPr>
+            <p:ph type="hdr" sz="quarter"/>
+          </p:nvPr>
+        </p:nvSpPr>
+        <p:spPr>
+          <a:xfrm>
+            <a:off x="0" y="0"/>
+            <a:ext cx="2971800" cy="457200"/>
+          </a:xfrm>
+          <a:prstGeom prst="rect">
+            <a:avLst/>
+          </a:prstGeom>
+        </p:spPr>
+        <p:txBody>
+          <a:bodyPr vert="horz" lIns="91440" tIns="45720" rIns="91440" bIns="45720" rtlCol="0"/>
+          <a:lstStyle>
+            <a:lvl1pPr algn="l">
+              <a:defRPr sz="1200"/>
+            </a:lvl1pPr>
+          </a:lstStyle>
+          <a:p>
+            <a:endParaRPr lang="en-US"/>
+          </a:p>
+        </p:txBody>
+      </p:sp>
+      <p:sp>
+        <p:nvSpPr>
+          <p:cNvPr id="3" name="Date Placeholder 2"/>
+          <p:cNvSpPr>
+            <a:spLocks noGrp="1"/>
+          </p:cNvSpPr>
+          <p:nvPr>
+            <p:ph type="dt" idx="1"/>
+          </p:nvPr>
+        </p:nvSpPr>
+        <p:spPr>
+          <a:xfrm>
+            <a:off x="3884613" y="0"/>
+            <a:ext cx="2971800" cy="457200"/>
+          </a:xfrm>
+          <a:prstGeom prst="rect">
+            <a:avLst/>
+          </a:prstGeom>
+        </p:spPr>
+        <p:txBody>
+          <a:bodyPr vert="horz" lIns="91440" tIns="45720" rIns="91440" bIns="45720" rtlCol="0"/>
+          <a:lstStyle>
+            <a:lvl1pPr algn="r">
+              <a:defRPr sz="1200"/>
+            </a:lvl1pPr>
+          </a:lstStyle>
+          <a:p>
+            <a:fld id="{0F89C1C7-3DCD-1040-A9CF-14679D8B5DDD}" type="datetimeFigureOut">
+              <a:rPr lang="en-US" smtClean="0"/>
+              <a:t>10/17/16</a:t>
+            </a:fld>
+            <a:endParaRPr lang="en-US"/>
+          </a:p>
+        </p:txBody>
+      </p:sp>
+      <p:sp>
+        <p:nvSpPr>
+          <p:cNvPr id="4" name="Slide Image Placeholder 3"/>
+          <p:cNvSpPr>
+            <a:spLocks noGrp="1" noRot="1" noChangeAspect="1"/>
+          </p:cNvSpPr>
+          <p:nvPr>
+            <p:ph type="sldImg" idx="2"/>
+          </p:nvPr>
+        </p:nvSpPr>
+        <p:spPr>
+          <a:xfrm>
+            <a:off x="1143000" y="685800"/>
+            <a:ext cx="4572000" cy="3429000"/>
+          </a:xfrm>
+          <a:prstGeom prst="rect">
+            <a:avLst/>
+          </a:prstGeom>
+          <a:noFill/>
+          <a:ln w="12700">
+            <a:solidFill>
+              <a:prstClr val="black"/>
+            </a:solidFill>
+          </a:ln>
+        </p:spPr>
+        <p:txBody>
+          <a:bodyPr vert="horz" lIns="91440" tIns="45720" rIns="91440" bIns="45720" rtlCol="0" anchor="ctr"/>
+          <a:lstStyle/>
+          <a:p>
+            <a:endParaRPr lang="en-US"/>
+          </a:p>
+        </p:txBody>
+      </p:sp>
+      <p:sp>
+        <p:nvSpPr>
+          <p:cNvPr id="5" name="Notes Placeholder 4"/>
+          <p:cNvSpPr>
+            <a:spLocks noGrp="1"/>
+          </p:cNvSpPr>
+          <p:nvPr>
+            <p:ph type="body" sz="quarter" idx="3"/>
+          </p:nvPr>
+        </p:nvSpPr>
+        <p:spPr>
+          <a:xfrm>
+            <a:off x="685800" y="4343400"/>
+            <a:ext cx="5486400" cy="4114800"/>
+          </a:xfrm>
+          <a:prstGeom prst="rect">
+            <a:avLst/>
+          </a:prstGeom>
+        </p:spPr>
+        <p:txBody>
+          <a:bodyPr vert="horz" lIns="91440" tIns="45720" rIns="91440" bIns="45720" rtlCol="0"/>
+          <a:lstStyle/>
+          <a:p>
+            <a:pPr lvl="0"/>
+            <a:r>
+              <a:rPr lang="en-US" smtClean="0"/>
+              <a:t>Click to edit Master text styles</a:t>
+            </a:r>
+          </a:p>
+          <a:p>
+            <a:pPr lvl="1"/>
+            <a:r>
+              <a:rPr lang="en-US" smtClean="0"/>
+              <a:t>Second level</a:t>
+            </a:r>
+          </a:p>
+          <a:p>
+            <a:pPr lvl="2"/>
+            <a:r>
+              <a:rPr lang="en-US" smtClean="0"/>
+              <a:t>Third level</a:t>
+            </a:r>
+          </a:p>
+          <a:p>
+            <a:pPr lvl="3"/>
+            <a:r>
+              <a:rPr lang="en-US" smtClean="0"/>
+              <a:t>Fourth level</a:t>
+            </a:r>
+          </a:p>
+          <a:p>
+            <a:pPr lvl="4"/>
+            <a:r>
+              <a:rPr lang="en-US" smtClean="0"/>
+              <a:t>Fifth level</a:t>
+            </a:r>
+            <a:endParaRPr lang="en-US"/>
+          </a:p>
+        </p:txBody>
+      </p:sp>
+      <p:sp>
+        <p:nvSpPr>
+          <p:cNvPr id="6" name="Footer Placeholder 5"/>
+          <p:cNvSpPr>
+            <a:spLocks noGrp="1"/>
+          </p:cNvSpPr>
+          <p:nvPr>
+            <p:ph type="ftr" sz="quarter" idx="4"/>
+          </p:nvPr>
+        </p:nvSpPr>
+        <p:spPr>
+          <a:xfrm>
+            <a:off x="0" y="8685213"/>
+            <a:ext cx="2971800" cy="457200"/>
+          </a:xfrm>
+          <a:prstGeom prst="rect">
+            <a:avLst/>
+          </a:prstGeom>
+        </p:spPr>
+        <p:txBody>
+          <a:bodyPr vert="horz" lIns="91440" tIns="45720" rIns="91440" bIns="45720" rtlCol="0" anchor="b"/>
+          <a:lstStyle>
+            <a:lvl1pPr algn="l">
+              <a:defRPr sz="1200"/>
+            </a:lvl1pPr>
+          </a:lstStyle>
+          <a:p>
+            <a:endParaRPr lang="en-US"/>
+          </a:p>
+        </p:txBody>
+      </p:sp>
+      <p:sp>
+        <p:nvSpPr>
+          <p:cNvPr id="7" name="Slide Number Placeholder 6"/>
+          <p:cNvSpPr>
+            <a:spLocks noGrp="1"/>
+          </p:cNvSpPr>
+          <p:nvPr>
+            <p:ph type="sldNum" sz="quarter" idx="5"/>
+          </p:nvPr>
+        </p:nvSpPr>
+        <p:spPr>
+          <a:xfrm>
+            <a:off x="3884613" y="8685213"/>
+            <a:ext cx="2971800" cy="457200"/>
+          </a:xfrm>
+          <a:prstGeom prst="rect">
+            <a:avLst/>
+          </a:prstGeom>
+        </p:spPr>
+        <p:txBody>
+          <a:bodyPr vert="horz" lIns="91440" tIns="45720" rIns="91440" bIns="45720" rtlCol="0" anchor="b"/>
+          <a:lstStyle>
+            <a:lvl1pPr algn="r">
+              <a:defRPr sz="1200"/>
+            </a:lvl1pPr>
+          </a:lstStyle>
+          <a:p>
+            <a:fld id="{BB5E49A5-4136-284D-997B-48E1D791AD67}" type="slidenum">
+              <a:rPr lang="en-US" smtClean="0"/>
+              <a:t>‹#›</a:t>
+            </a:fld>
+            <a:endParaRPr lang="en-US"/>
+          </a:p>
+        </p:txBody>
+      </p:sp>
+    </p:spTree>
+    <p:extLst>
+      <p:ext uri="{BB962C8B-B14F-4D97-AF65-F5344CB8AC3E}">
+        <p14:creationId xmlns:p14="http://schemas.microsoft.com/office/powerpoint/2010/main" val="2623252185"/>
+      </p:ext>
+    </p:extLst>
+  </p:cSld>
+  <p:clrMap bg1="lt1" tx1="dk1" bg2="lt2" tx2="dk2" accent1="accent1" accent2="accent2" accent3="accent3" accent4="accent4" accent5="accent5" accent6="accent6" hlink="hlink" folHlink="folHlink"/>
+  <p:notesStyle>
+    <a:lvl1pPr marL="0" algn="l" defTabSz="457200" rtl="0" eaLnBrk="1" latinLnBrk="0" hangingPunct="1">
+      <a:defRPr sz="1200" kern="1200">
+        <a:solidFill>
+          <a:schemeClr val="tx1"/>
+        </a:solidFill>
+        <a:latin typeface="+mn-lt"/>
+        <a:ea typeface="+mn-ea"/>
+        <a:cs typeface="+mn-cs"/>
+      </a:defRPr>
+    </a:lvl1pPr>
+    <a:lvl2pPr marL="457200" algn="l" defTabSz="457200" rtl="0" eaLnBrk="1" latinLnBrk="0" hangingPunct="1">
+      <a:defRPr sz="1200" kern="1200">
+        <a:solidFill>
+          <a:schemeClr val="tx1"/>
+        </a:solidFill>
+        <a:latin typeface="+mn-lt"/>
+        <a:ea typeface="+mn-ea"/>
+        <a:cs typeface="+mn-cs"/>
+      </a:defRPr>
+    </a:lvl2pPr>
+    <a:lvl3pPr marL="914400" algn="l" defTabSz="457200" rtl="0" eaLnBrk="1" latinLnBrk="0" hangingPunct="1">
+      <a:defRPr sz="1200" kern="1200">
+        <a:solidFill>
+          <a:schemeClr val="tx1"/>
+        </a:solidFill>
+        <a:latin typeface="+mn-lt"/>
+        <a:ea typeface="+mn-ea"/>
+        <a:cs typeface="+mn-cs"/>
+      </a:defRPr>
+    </a:lvl3pPr>
+    <a:lvl4pPr marL="1371600" algn="l" defTabSz="457200" rtl="0" eaLnBrk="1" latinLnBrk="0" hangingPunct="1">
+      <a:defRPr sz="1200" kern="1200">
+        <a:solidFill>
+          <a:schemeClr val="tx1"/>
+        </a:solidFill>
+        <a:latin typeface="+mn-lt"/>
+        <a:ea typeface="+mn-ea"/>
+        <a:cs typeface="+mn-cs"/>
+      </a:defRPr>
+    </a:lvl4pPr>
+    <a:lvl5pPr marL="1828800" algn="l" defTabSz="457200" rtl="0" eaLnBrk="1" latinLnBrk="0" hangingPunct="1">
+      <a:defRPr sz="1200" kern="1200">
+        <a:solidFill>
+          <a:schemeClr val="tx1"/>
+        </a:solidFill>
+        <a:latin typeface="+mn-lt"/>
+        <a:ea typeface="+mn-ea"/>
+        <a:cs typeface="+mn-cs"/>
+      </a:defRPr>
+    </a:lvl5pPr>
+    <a:lvl6pPr marL="2286000" algn="l" defTabSz="457200" rtl="0" eaLnBrk="1" latinLnBrk="0" hangingPunct="1">
+      <a:defRPr sz="1200" kern="1200">
+        <a:solidFill>
+          <a:schemeClr val="tx1"/>
+        </a:solidFill>
+        <a:latin typeface="+mn-lt"/>
+        <a:ea typeface="+mn-ea"/>
+        <a:cs typeface="+mn-cs"/>
+      </a:defRPr>
+    </a:lvl6pPr>
+    <a:lvl7pPr marL="2743200" algn="l" defTabSz="457200" rtl="0" eaLnBrk="1" latinLnBrk="0" hangingPunct="1">
+      <a:defRPr sz="1200" kern="1200">
+        <a:solidFill>
+          <a:schemeClr val="tx1"/>
+        </a:solidFill>
+        <a:latin typeface="+mn-lt"/>
+        <a:ea typeface="+mn-ea"/>
+        <a:cs typeface="+mn-cs"/>
+      </a:defRPr>
+    </a:lvl7pPr>
+    <a:lvl8pPr marL="3200400" algn="l" defTabSz="457200" rtl="0" eaLnBrk="1" latinLnBrk="0" hangingPunct="1">
+      <a:defRPr sz="1200" kern="1200">
+        <a:solidFill>
+          <a:schemeClr val="tx1"/>
+        </a:solidFill>
+        <a:latin typeface="+mn-lt"/>
+        <a:ea typeface="+mn-ea"/>
+        <a:cs typeface="+mn-cs"/>
+      </a:defRPr>
+    </a:lvl8pPr>
+    <a:lvl9pPr marL="3657600" algn="l" defTabSz="457200" rtl="0" eaLnBrk="1" latinLnBrk="0" hangingPunct="1">
+      <a:defRPr sz="1200" kern="1200">
+        <a:solidFill>
+          <a:schemeClr val="tx1"/>
+        </a:solidFill>
+        <a:latin typeface="+mn-lt"/>
+        <a:ea typeface="+mn-ea"/>
+        <a:cs typeface="+mn-cs"/>
+      </a:defRPr>
+    </a:lvl9pPr>
+  </p:notesStyle>
+</p:notesMaster>
+</file>
+
+<file path=ppt/notesSlides/notesSlide1.xml><?xml version="1.0" encoding="utf-8"?>
+<p:notes xmlns:a="http://schemas.openxmlformats.org/drawingml/2006/main" xmlns:p="http://schemas.openxmlformats.org/presentationml/2006/main" xmlns:r="http://schemas.openxmlformats.org/officeDocument/2006/relationships">
+  <p:cSld>
+    <p:spTree>
+      <p:nvGrpSpPr>
+        <p:cNvPr id="1" name=""/>
+        <p:cNvGrpSpPr/>
+        <p:nvPr/>
+      </p:nvGrpSpPr>
+      <p:grpSpPr>
+        <a:xfrm>
+          <a:off x="0" y="0"/>
+          <a:ext cx="0" cy="0"/>
+          <a:chOff x="0" y="0"/>
+          <a:chExt cx="0" cy="0"/>
+        </a:xfrm>
+      </p:grpSpPr>
+      <p:sp>
+        <p:nvSpPr>
+          <p:cNvPr id="2" name="Slide Image Placeholder 1"/>
+          <p:cNvSpPr>
+            <a:spLocks noGrp="1"/>
+          </p:cNvSpPr>
+          <p:nvPr>
+            <p:ph type="sldImg" idx="2"/>
+          </p:nvPr>
+        </p:nvSpPr>
+        <p:spPr/>
+      </p:sp>
+      <p:sp>
+        <p:nvSpPr>
+          <p:cNvPr id="3" name="Notes Placeholder 2"/>
+          <p:cNvSpPr>
+            <a:spLocks noGrp="1"/>
+          </p:cNvSpPr>
+          <p:nvPr>
+            <p:ph type="body" idx="3" sz="quarter"/>
+          </p:nvPr>
+        </p:nvSpPr>
+        <p:spPr/>
+        <p:txBody>
+          <a:bodyPr/>
+          <a:lstStyle/>
+          <a:p>
+            <a:r>
+              <a:t>Frame the pivot from analysis to DESIGN — with Topic 1's goals set, they now design the reliability</a:t>
+            </a:r>
+          </a:p>
+          <a:p>
+            <a:r>
+              <a:t>changes. Set the depth ceiling: design on paper, to the goals, not beyond; the build is AT3.</a:t>
+            </a:r>
+          </a:p>
+          <a:p>
+            <a:r>
+              <a:t>• First two bullets: Topic 2 continues AT1 — design the changes that make Ledgerline reliable,</a:t>
+            </a:r>
+          </a:p>
+          <a:p>
+            <a:r>
+              <a:t>reliability optimised JOINTLY with security, scalability and cost. Improve without over-building.</a:t>
+            </a:r>
+          </a:p>
+          <a:p>
+            <a:r>
+              <a:t>• Third bullet: name the target — application-tier Multi-AZ + database backup/restore + cross-Region</a:t>
+            </a:r>
+          </a:p>
+          <a:p>
+            <a:r>
+              <a:t>DR to Melbourne (data stays in Australia). Say "Melbourne — onshore" out loud.</a:t>
+            </a:r>
+          </a:p>
+          <a:p>
+            <a:r>
+              <a:t>• Fourth bullet (the discipline): design only, to the goals — the build is AT3. Resist drawing console</a:t>
+            </a:r>
+          </a:p>
+          <a:p>
+            <a:r>
+              <a:t>steps.</a:t>
+            </a:r>
+          </a:p>
+          <a:p>
+            <a:r>
+              <a:t>Misconception to pre-empt: "reliable = make everything Multi-AZ." No — this Topic's centrepiece is</a:t>
+            </a:r>
+          </a:p>
+          <a:p>
+            <a:r>
+              <a:t>REJECTING a Multi-AZ database on a cost-benefit call. Reliability is targeted, not maximised.</a:t>
+            </a:r>
+          </a:p>
+          <a:p>
+            <a:r>
+              <a:t>Question to pose: "Topic 1 set the reliability goal — what does 'design to the goal, not beyond it' rule</a:t>
+            </a:r>
+          </a:p>
+          <a:p>
+            <a:r>
+              <a:t>out?" (gold-plating; any redundancy the goal doesn't justify).</a:t>
+            </a:r>
+          </a:p>
+          <a:p>
+            <a:r>
+              <a:t>UoC/AT1 tie: this Topic develops ICTCLD504 PC 2.3, PE 1 and KE 4/5/8/9; the output is the reliability</a:t>
+            </a:r>
+          </a:p>
+          <a:p>
+            <a:r>
+              <a:t>sections + KE appendix of the AT1 Solution Design.</a:t>
+            </a:r>
+          </a:p>
+        </p:txBody>
+      </p:sp>
+      <p:sp>
+        <p:nvSpPr>
+          <p:cNvPr id="4" name="Slide Number Placeholder 3"/>
+          <p:cNvSpPr>
+            <a:spLocks noGrp="1"/>
+          </p:cNvSpPr>
+          <p:nvPr>
+            <p:ph type="sldNum" idx="5" sz="quarter"/>
+          </p:nvPr>
+        </p:nvSpPr>
+        <p:spPr/>
+      </p:sp>
+    </p:spTree>
+  </p:cSld>
+  <p:clrMapOvr>
+    <a:masterClrMapping/>
+  </p:clrMapOvr>
+</p:notes>
+</file>
+
+<file path=ppt/notesSlides/notesSlide10.xml><?xml version="1.0" encoding="utf-8"?>
+<p:notes xmlns:a="http://schemas.openxmlformats.org/drawingml/2006/main" xmlns:p="http://schemas.openxmlformats.org/presentationml/2006/main" xmlns:r="http://schemas.openxmlformats.org/officeDocument/2006/relationships">
+  <p:cSld>
+    <p:spTree>
+      <p:nvGrpSpPr>
+        <p:cNvPr id="1" name=""/>
+        <p:cNvGrpSpPr/>
+        <p:nvPr/>
+      </p:nvGrpSpPr>
+      <p:grpSpPr>
+        <a:xfrm>
+          <a:off x="0" y="0"/>
+          <a:ext cx="0" cy="0"/>
+          <a:chOff x="0" y="0"/>
+          <a:chExt cx="0" cy="0"/>
+        </a:xfrm>
+      </p:grpSpPr>
+      <p:sp>
+        <p:nvSpPr>
+          <p:cNvPr id="2" name="Slide Image Placeholder 1"/>
+          <p:cNvSpPr>
+            <a:spLocks noGrp="1"/>
+          </p:cNvSpPr>
+          <p:nvPr>
+            <p:ph type="sldImg" idx="2"/>
+          </p:nvPr>
+        </p:nvSpPr>
+        <p:spPr/>
+      </p:sp>
+      <p:sp>
+        <p:nvSpPr>
+          <p:cNvPr id="3" name="Notes Placeholder 2"/>
+          <p:cNvSpPr>
+            <a:spLocks noGrp="1"/>
+          </p:cNvSpPr>
+          <p:nvPr>
+            <p:ph type="body" idx="3" sz="quarter"/>
+          </p:nvPr>
+        </p:nvSpPr>
+        <p:spPr/>
+        <p:txBody>
+          <a:bodyPr/>
+          <a:lstStyle/>
+          <a:p>
+            <a:r>
+              <a:t>Facilitation — the Section 2 practice; students write the KE-appendix justification for their practice</a:t>
+            </a:r>
+          </a:p>
+          <a:p>
+            <a:r>
+              <a:t>reliability design — naming the principle behind each choice.</a:t>
+            </a:r>
+          </a:p>
+          <a:p>
+            <a:r>
+              <a:t>Tell students: "For your practice design, write the KE-appendix justification: for each reliability</a:t>
+            </a:r>
+          </a:p>
+          <a:p>
+            <a:r>
+              <a:t>choice, name the cloud design principle behind it, and describe the migration approach that reaches the</a:t>
+            </a:r>
+          </a:p>
+          <a:p>
+            <a:r>
+              <a:t>improved architecture."</a:t>
+            </a:r>
+          </a:p>
+          <a:p>
+            <a:r>
+              <a:t>Steps (put on the board):</a:t>
+            </a:r>
+          </a:p>
+          <a:p>
+            <a:r>
+              <a:t>1. List each reliability choice from your Section-1 practice design.</a:t>
+            </a:r>
+          </a:p>
+          <a:p>
+            <a:r>
+              <a:t>2. Against each, name the design principle that justifies it (design for failure, loose coupling,</a:t>
+            </a:r>
+          </a:p>
+          <a:p>
+            <a:r>
+              <a:t>right-sizing, automation…).</a:t>
+            </a:r>
+          </a:p>
+          <a:p>
+            <a:r>
+              <a:t>3. Describe the migration approach — incremental, keep-serving, roll-back — that reaches the target.</a:t>
+            </a:r>
+          </a:p>
+          <a:p>
+            <a:r>
+              <a:t>Must produce: a short KE-appendix passage linking each choice to a principle plus a migration approach.</a:t>
+            </a:r>
+          </a:p>
+          <a:p>
+            <a:r>
+              <a:t>Timing: ~20 min then discuss. Where they get stuck: they restate the choice instead of naming the</a:t>
+            </a:r>
+          </a:p>
+          <a:p>
+            <a:r>
+              <a:t>PRINCIPLE behind it — circulate and ask "which principle makes that the right move?"</a:t>
+            </a:r>
+          </a:p>
+          <a:p>
+            <a:r>
+              <a:t>Share-back prompt: take one choice and ask the room which principle best justifies it.</a:t>
+            </a:r>
+          </a:p>
+          <a:p>
+            <a:r>
+              <a:t>No-leakage note: the website is the practice vehicle; the AT1 KE appendix is written for Ledgerline —</a:t>
+            </a:r>
+          </a:p>
+          <a:p>
+            <a:r>
+              <a:t>comparable, not identical.</a:t>
+            </a:r>
+          </a:p>
+        </p:txBody>
+      </p:sp>
+      <p:sp>
+        <p:nvSpPr>
+          <p:cNvPr id="4" name="Slide Number Placeholder 3"/>
+          <p:cNvSpPr>
+            <a:spLocks noGrp="1"/>
+          </p:cNvSpPr>
+          <p:nvPr>
+            <p:ph type="sldNum" idx="5" sz="quarter"/>
+          </p:nvPr>
+        </p:nvSpPr>
+        <p:spPr/>
+      </p:sp>
+    </p:spTree>
+  </p:cSld>
+  <p:clrMapOvr>
+    <a:masterClrMapping/>
+  </p:clrMapOvr>
+</p:notes>
+</file>
+
+<file path=ppt/notesSlides/notesSlide11.xml><?xml version="1.0" encoding="utf-8"?>
+<p:notes xmlns:a="http://schemas.openxmlformats.org/drawingml/2006/main" xmlns:p="http://schemas.openxmlformats.org/presentationml/2006/main" xmlns:r="http://schemas.openxmlformats.org/officeDocument/2006/relationships">
+  <p:cSld>
+    <p:spTree>
+      <p:nvGrpSpPr>
+        <p:cNvPr id="1" name=""/>
+        <p:cNvGrpSpPr/>
+        <p:nvPr/>
+      </p:nvGrpSpPr>
+      <p:grpSpPr>
+        <a:xfrm>
+          <a:off x="0" y="0"/>
+          <a:ext cx="0" cy="0"/>
+          <a:chOff x="0" y="0"/>
+          <a:chExt cx="0" cy="0"/>
+        </a:xfrm>
+      </p:grpSpPr>
+      <p:sp>
+        <p:nvSpPr>
+          <p:cNvPr id="2" name="Slide Image Placeholder 1"/>
+          <p:cNvSpPr>
+            <a:spLocks noGrp="1"/>
+          </p:cNvSpPr>
+          <p:nvPr>
+            <p:ph type="sldImg" idx="2"/>
+          </p:nvPr>
+        </p:nvSpPr>
+        <p:spPr/>
+      </p:sp>
+      <p:sp>
+        <p:nvSpPr>
+          <p:cNvPr id="3" name="Notes Placeholder 2"/>
+          <p:cNvSpPr>
+            <a:spLocks noGrp="1"/>
+          </p:cNvSpPr>
+          <p:nvPr>
+            <p:ph type="body" idx="3" sz="quarter"/>
+          </p:nvPr>
+        </p:nvSpPr>
+        <p:spPr/>
+        <p:txBody>
+          <a:bodyPr/>
+          <a:lstStyle/>
+          <a:p>
+            <a:r>
+              <a:t>Section 3 — the security layers that keep the improved design secure. Short section; the message is that</a:t>
+            </a:r>
+          </a:p>
+          <a:p>
+            <a:r>
+              <a:t>reliability changes must INHERIT security, never bypass it.</a:t>
+            </a:r>
+          </a:p>
+          <a:p>
+            <a:r>
+              <a:t>• First bullet: the tools/uses of security layers (KE 8) — network isolation, security groups, IAM</a:t>
+            </a:r>
+          </a:p>
+          <a:p>
+            <a:r>
+              <a:t>least-privilege, and encryption as the baseline. Name the layers.</a:t>
+            </a:r>
+          </a:p>
+          <a:p>
+            <a:r>
+              <a:t>• Second bullet: encryption is assumed ON by default — at rest and in transit — INCLUDING the</a:t>
+            </a:r>
+          </a:p>
+          <a:p>
+            <a:r>
+              <a:t>cross-Region DR copy and the residency data. Nothing regulated travels or rests unencrypted.</a:t>
+            </a:r>
+          </a:p>
+          <a:p>
+            <a:r>
+              <a:t>• Third bullet: reliability changes must not weaken security — each new tier (Multi-AZ app, DR copy)</a:t>
+            </a:r>
+          </a:p>
+          <a:p>
+            <a:r>
+              <a:t>inherits the security layers, not bypasses them.</a:t>
+            </a:r>
+          </a:p>
+          <a:p>
+            <a:r>
+              <a:t>Misconception to pre-empt: "the DR copy is just a backup, so it's lower-security." No — a DR copy of</a:t>
+            </a:r>
+          </a:p>
+          <a:p>
+            <a:r>
+              <a:t>regulated financial data carries the SAME encryption and access controls as the primary; a weaker copy</a:t>
+            </a:r>
+          </a:p>
+          <a:p>
+            <a:r>
+              <a:t>is the breach.</a:t>
+            </a:r>
+          </a:p>
+          <a:p>
+            <a:r>
+              <a:t>Question to pose: "You add a cross-Region DR copy — what security must travel with it?" (encryption in</a:t>
+            </a:r>
+          </a:p>
+          <a:p>
+            <a:r>
+              <a:t>transit + at rest, IAM controls — the DR copy inherits the primary's security layers).</a:t>
+            </a:r>
+          </a:p>
+          <a:p>
+            <a:r>
+              <a:t>UoC/AT1 tie: ICTCLD504 KE 8 (tools &amp; uses of security layers in cloud services) → AT1 Solution Design KE</a:t>
+            </a:r>
+          </a:p>
+          <a:p>
+            <a:r>
+              <a:t>appendix; security is optimised jointly with reliability (PC 2.3).</a:t>
+            </a:r>
+          </a:p>
+        </p:txBody>
+      </p:sp>
+      <p:sp>
+        <p:nvSpPr>
+          <p:cNvPr id="4" name="Slide Number Placeholder 3"/>
+          <p:cNvSpPr>
+            <a:spLocks noGrp="1"/>
+          </p:cNvSpPr>
+          <p:nvPr>
+            <p:ph type="sldNum" idx="5" sz="quarter"/>
+          </p:nvPr>
+        </p:nvSpPr>
+        <p:spPr/>
+      </p:sp>
+    </p:spTree>
+  </p:cSld>
+  <p:clrMapOvr>
+    <a:masterClrMapping/>
+  </p:clrMapOvr>
+</p:notes>
+</file>
+
+<file path=ppt/notesSlides/notesSlide2.xml><?xml version="1.0" encoding="utf-8"?>
+<p:notes xmlns:a="http://schemas.openxmlformats.org/drawingml/2006/main" xmlns:p="http://schemas.openxmlformats.org/presentationml/2006/main" xmlns:r="http://schemas.openxmlformats.org/officeDocument/2006/relationships">
+  <p:cSld>
+    <p:spTree>
+      <p:nvGrpSpPr>
+        <p:cNvPr id="1" name=""/>
+        <p:cNvGrpSpPr/>
+        <p:nvPr/>
+      </p:nvGrpSpPr>
+      <p:grpSpPr>
+        <a:xfrm>
+          <a:off x="0" y="0"/>
+          <a:ext cx="0" cy="0"/>
+          <a:chOff x="0" y="0"/>
+          <a:chExt cx="0" cy="0"/>
+        </a:xfrm>
+      </p:grpSpPr>
+      <p:sp>
+        <p:nvSpPr>
+          <p:cNvPr id="2" name="Slide Image Placeholder 1"/>
+          <p:cNvSpPr>
+            <a:spLocks noGrp="1"/>
+          </p:cNvSpPr>
+          <p:nvPr>
+            <p:ph type="sldImg" idx="2"/>
+          </p:nvPr>
+        </p:nvSpPr>
+        <p:spPr/>
+      </p:sp>
+      <p:sp>
+        <p:nvSpPr>
+          <p:cNvPr id="3" name="Notes Placeholder 2"/>
+          <p:cNvSpPr>
+            <a:spLocks noGrp="1"/>
+          </p:cNvSpPr>
+          <p:nvPr>
+            <p:ph type="body" idx="3" sz="quarter"/>
+          </p:nvPr>
+        </p:nvSpPr>
+        <p:spPr/>
+        <p:txBody>
+          <a:bodyPr/>
+          <a:lstStyle/>
+          <a:p>
+            <a:r>
+              <a:t>Open Section 1 with the vendor-neutral definition of reliability and its building blocks — the frame</a:t>
+            </a:r>
+          </a:p>
+          <a:p>
+            <a:r>
+              <a:t>before the Ledgerline-specific design.</a:t>
+            </a:r>
+          </a:p>
+          <a:p>
+            <a:r>
+              <a:t>• First bullet: reliability = the system keeps serving through component and zone failures, AND recovers</a:t>
+            </a:r>
+          </a:p>
+          <a:p>
+            <a:r>
+              <a:t>from loss. Two halves — continuity and recovery.</a:t>
+            </a:r>
+          </a:p>
+          <a:p>
+            <a:r>
+              <a:t>• Second bullet: the three building blocks — redundancy across AZs (Multi-AZ), backup/restore, and</a:t>
+            </a:r>
+          </a:p>
+          <a:p>
+            <a:r>
+              <a:t>cross-Region DR. Map each to which half it serves.</a:t>
+            </a:r>
+          </a:p>
+          <a:p>
+            <a:r>
+              <a:t>• Third bullet: reliability is designed JOINTLY with security, scalability and cost — each choice is a</a:t>
+            </a:r>
+          </a:p>
+          <a:p>
+            <a:r>
+              <a:t>trade-off, not a maximum. This is the anti-gold-plating rule again.</a:t>
+            </a:r>
+          </a:p>
+          <a:p>
+            <a:r>
+              <a:t>Misconception to pre-empt: "backup and DR are the same thing." No — backup/restore recovers data in</a:t>
+            </a:r>
+          </a:p>
+          <a:p>
+            <a:r>
+              <a:t>place; cross-Region DR survives losing a whole Region. Different failures, different tools.</a:t>
+            </a:r>
+          </a:p>
+          <a:p>
+            <a:r>
+              <a:t>Question to pose: "Which building block protects against an AZ failure, and which against losing the</a:t>
+            </a:r>
+          </a:p>
+          <a:p>
+            <a:r>
+              <a:t>whole Region?" (Multi-AZ vs cross-Region DR — separates the two).</a:t>
+            </a:r>
+          </a:p>
+          <a:p>
+            <a:r>
+              <a:t>UoC/AT1 tie: ICTCLD504 KE 9 (features/techniques to improve reliability) → AT1 Solution Design</a:t>
+            </a:r>
+          </a:p>
+          <a:p>
+            <a:r>
+              <a:t>reliability design + KE appendix.</a:t>
+            </a:r>
+          </a:p>
+        </p:txBody>
+      </p:sp>
+      <p:sp>
+        <p:nvSpPr>
+          <p:cNvPr id="4" name="Slide Number Placeholder 3"/>
+          <p:cNvSpPr>
+            <a:spLocks noGrp="1"/>
+          </p:cNvSpPr>
+          <p:nvPr>
+            <p:ph type="sldNum" idx="5" sz="quarter"/>
+          </p:nvPr>
+        </p:nvSpPr>
+        <p:spPr/>
+      </p:sp>
+    </p:spTree>
+  </p:cSld>
+  <p:clrMapOvr>
+    <a:masterClrMapping/>
+  </p:clrMapOvr>
+</p:notes>
+</file>
+
+<file path=ppt/notesSlides/notesSlide3.xml><?xml version="1.0" encoding="utf-8"?>
+<p:notes xmlns:a="http://schemas.openxmlformats.org/drawingml/2006/main" xmlns:p="http://schemas.openxmlformats.org/presentationml/2006/main" xmlns:r="http://schemas.openxmlformats.org/officeDocument/2006/relationships">
+  <p:cSld>
+    <p:spTree>
+      <p:nvGrpSpPr>
+        <p:cNvPr id="1" name=""/>
+        <p:cNvGrpSpPr/>
+        <p:nvPr/>
+      </p:nvGrpSpPr>
+      <p:grpSpPr>
+        <a:xfrm>
+          <a:off x="0" y="0"/>
+          <a:ext cx="0" cy="0"/>
+          <a:chOff x="0" y="0"/>
+          <a:chExt cx="0" cy="0"/>
+        </a:xfrm>
+      </p:grpSpPr>
+      <p:sp>
+        <p:nvSpPr>
+          <p:cNvPr id="2" name="Slide Image Placeholder 1"/>
+          <p:cNvSpPr>
+            <a:spLocks noGrp="1"/>
+          </p:cNvSpPr>
+          <p:nvPr>
+            <p:ph type="sldImg" idx="2"/>
+          </p:nvPr>
+        </p:nvSpPr>
+        <p:spPr/>
+      </p:sp>
+      <p:sp>
+        <p:nvSpPr>
+          <p:cNvPr id="3" name="Notes Placeholder 2"/>
+          <p:cNvSpPr>
+            <a:spLocks noGrp="1"/>
+          </p:cNvSpPr>
+          <p:nvPr>
+            <p:ph type="body" idx="3" sz="quarter"/>
+          </p:nvPr>
+        </p:nvSpPr>
+        <p:spPr/>
+        <p:txBody>
+          <a:bodyPr/>
+          <a:lstStyle/>
+          <a:p>
+            <a:r>
+              <a:t>Set the concrete reliability TARGET off the diagram — where the design adds redundancy, and the one</a:t>
+            </a:r>
+          </a:p>
+          <a:p>
+            <a:r>
+              <a:t>place it deliberately does NOT. This tees up the centrepiece on the next slide.</a:t>
+            </a:r>
+          </a:p>
+          <a:p>
+            <a:r>
+              <a:t>• First bullet: review the single-AZ baseline against the reliability goals; name where a single</a:t>
+            </a:r>
+          </a:p>
+          <a:p>
+            <a:r>
+              <a:t>failure takes the system down (from Topic 1's analysis).</a:t>
+            </a:r>
+          </a:p>
+          <a:p>
+            <a:r>
+              <a:t>• Second bullet: the target — app tier goes Multi-AZ behind a load balancer; the database gets automated</a:t>
+            </a:r>
+          </a:p>
+          <a:p>
+            <a:r>
+              <a:t>backup/restore; a cross-Region DR copy goes to Melbourne (Australian data stays onshore). Point to each</a:t>
+            </a:r>
+          </a:p>
+          <a:p>
+            <a:r>
+              <a:t>on the diagram.</a:t>
+            </a:r>
+          </a:p>
+          <a:p>
+            <a:r>
+              <a:t>• Third bullet: flag it now — the database is deliberately NOT Multi-AZ; the next slide argues why.</a:t>
+            </a:r>
+          </a:p>
+          <a:p>
+            <a:r>
+              <a:t>Leave the tension unresolved for one slide on purpose.</a:t>
+            </a:r>
+          </a:p>
+          <a:p>
+            <a:r>
+              <a:t>Misconception to pre-empt: "the whole system goes Multi-AZ." No — only the APP tier does; the DB is</a:t>
+            </a:r>
+          </a:p>
+          <a:p>
+            <a:r>
+              <a:t>handled by backup/restore + DR. Redundancy is applied tier by tier, to the goal.</a:t>
+            </a:r>
+          </a:p>
+          <a:p>
+            <a:r>
+              <a:t>Question to pose: "The app tier goes Multi-AZ but the database doesn't — what could possibly justify</a:t>
+            </a:r>
+          </a:p>
+          <a:p>
+            <a:r>
+              <a:t>treating them differently?" (sets up the cost-benefit centrepiece).</a:t>
+            </a:r>
+          </a:p>
+          <a:p>
+            <a:r>
+              <a:t>UoC/AT1 tie: ICTCLD504 PC 2.3 (review &amp; improve architecture for reliability) + PE 1 → AT1 Solution</a:t>
+            </a:r>
+          </a:p>
+          <a:p>
+            <a:r>
+              <a:t>Design reliability design.</a:t>
+            </a:r>
+          </a:p>
+        </p:txBody>
+      </p:sp>
+      <p:sp>
+        <p:nvSpPr>
+          <p:cNvPr id="4" name="Slide Number Placeholder 3"/>
+          <p:cNvSpPr>
+            <a:spLocks noGrp="1"/>
+          </p:cNvSpPr>
+          <p:nvPr>
+            <p:ph type="sldNum" idx="5" sz="quarter"/>
+          </p:nvPr>
+        </p:nvSpPr>
+        <p:spPr/>
+      </p:sp>
+    </p:spTree>
+  </p:cSld>
+  <p:clrMapOvr>
+    <a:masterClrMapping/>
+  </p:clrMapOvr>
+</p:notes>
+</file>
+
+<file path=ppt/notesSlides/notesSlide4.xml><?xml version="1.0" encoding="utf-8"?>
+<p:notes xmlns:a="http://schemas.openxmlformats.org/drawingml/2006/main" xmlns:p="http://schemas.openxmlformats.org/presentationml/2006/main" xmlns:r="http://schemas.openxmlformats.org/officeDocument/2006/relationships">
+  <p:cSld>
+    <p:spTree>
+      <p:nvGrpSpPr>
+        <p:cNvPr id="1" name=""/>
+        <p:cNvGrpSpPr/>
+        <p:nvPr/>
+      </p:nvGrpSpPr>
+      <p:grpSpPr>
+        <a:xfrm>
+          <a:off x="0" y="0"/>
+          <a:ext cx="0" cy="0"/>
+          <a:chOff x="0" y="0"/>
+          <a:chExt cx="0" cy="0"/>
+        </a:xfrm>
+      </p:grpSpPr>
+      <p:sp>
+        <p:nvSpPr>
+          <p:cNvPr id="2" name="Slide Image Placeholder 1"/>
+          <p:cNvSpPr>
+            <a:spLocks noGrp="1"/>
+          </p:cNvSpPr>
+          <p:nvPr>
+            <p:ph type="sldImg" idx="2"/>
+          </p:nvPr>
+        </p:nvSpPr>
+        <p:spPr/>
+      </p:sp>
+      <p:sp>
+        <p:nvSpPr>
+          <p:cNvPr id="3" name="Notes Placeholder 2"/>
+          <p:cNvSpPr>
+            <a:spLocks noGrp="1"/>
+          </p:cNvSpPr>
+          <p:nvPr>
+            <p:ph type="body" idx="3" sz="quarter"/>
+          </p:nvPr>
+        </p:nvSpPr>
+        <p:spPr/>
+        <p:txBody>
+          <a:bodyPr/>
+          <a:lstStyle/>
+          <a:p>
+            <a:r>
+              <a:t>THE centrepiece of the whole cluster — teach the cost-benefit REJECTION of a Multi-AZ database. Slow</a:t>
+            </a:r>
+          </a:p>
+          <a:p>
+            <a:r>
+              <a:t>down here; this is the single most assessed piece of reasoning in AT1.</a:t>
+            </a:r>
+          </a:p>
+          <a:p>
+            <a:r>
+              <a:t>• First bullet: Ledgerline is a legacy accounting app, vendor-certified single-instance only — a</a:t>
+            </a:r>
+          </a:p>
+          <a:p>
+            <a:r>
+              <a:t>Multi-AZ (failover) database is simply not available for it.</a:t>
+            </a:r>
+          </a:p>
+          <a:p>
+            <a:r>
+              <a:t>• Second bullet: the only route to DB failover is to REPLACE the accounting product — new licence, data</a:t>
+            </a:r>
+          </a:p>
+          <a:p>
+            <a:r>
+              <a:t>migration, change management, migration risk. Spell out the true cost.</a:t>
+            </a:r>
+          </a:p>
+          <a:p>
+            <a:r>
+              <a:t>• Third bullet (the call): that cost is disproportionate to the reliability gained, so the design REJECTS</a:t>
+            </a:r>
+          </a:p>
+          <a:p>
+            <a:r>
+              <a:t>a Multi-AZ database and leaves the DB single-AZ with backup/restore + cross-Region DR. This is the heart</a:t>
+            </a:r>
+          </a:p>
+          <a:p>
+            <a:r>
+              <a:t>of the Topic.</a:t>
+            </a:r>
+          </a:p>
+          <a:p>
+            <a:r>
+              <a:t>• Fourth bullet: warn against the reflex — "reliable database = Multi-AZ database" is wrong HERE; justify</a:t>
+            </a:r>
+          </a:p>
+          <a:p>
+            <a:r>
+              <a:t>against the goal and the cost, not a checklist.</a:t>
+            </a:r>
+          </a:p>
+          <a:p>
+            <a:r>
+              <a:t>Misconception to pre-empt: exactly that reflex — students pattern-match "reliability → Multi-AZ" and lose</a:t>
+            </a:r>
+          </a:p>
+          <a:p>
+            <a:r>
+              <a:t>the marks. The assessed skill is arguing the trade-off, not naming the feature.</a:t>
+            </a:r>
+          </a:p>
+          <a:p>
+            <a:r>
+              <a:t>Question to pose: "You could get DB failover by replacing the product — why is that the WRONG call here?"</a:t>
+            </a:r>
+          </a:p>
+          <a:p>
+            <a:r>
+              <a:t>(cost + risk disproportionate to the reliability the goal actually needs).</a:t>
+            </a:r>
+          </a:p>
+          <a:p>
+            <a:r>
+              <a:t>UoC/AT1 tie: ICTCLD504 PC 2.3 + PE 1; this is the AT1 cost-benefit centrepiece — the Solution Design</a:t>
+            </a:r>
+          </a:p>
+          <a:p>
+            <a:r>
+              <a:t>must ARGUE it, not just state it.</a:t>
+            </a:r>
+          </a:p>
+        </p:txBody>
+      </p:sp>
+      <p:sp>
+        <p:nvSpPr>
+          <p:cNvPr id="4" name="Slide Number Placeholder 3"/>
+          <p:cNvSpPr>
+            <a:spLocks noGrp="1"/>
+          </p:cNvSpPr>
+          <p:nvPr>
+            <p:ph type="sldNum" idx="5" sz="quarter"/>
+          </p:nvPr>
+        </p:nvSpPr>
+        <p:spPr/>
+      </p:sp>
+    </p:spTree>
+  </p:cSld>
+  <p:clrMapOvr>
+    <a:masterClrMapping/>
+  </p:clrMapOvr>
+</p:notes>
+</file>
+
+<file path=ppt/notesSlides/notesSlide5.xml><?xml version="1.0" encoding="utf-8"?>
+<p:notes xmlns:a="http://schemas.openxmlformats.org/drawingml/2006/main" xmlns:p="http://schemas.openxmlformats.org/presentationml/2006/main" xmlns:r="http://schemas.openxmlformats.org/officeDocument/2006/relationships">
+  <p:cSld>
+    <p:spTree>
+      <p:nvGrpSpPr>
+        <p:cNvPr id="1" name=""/>
+        <p:cNvGrpSpPr/>
+        <p:nvPr/>
+      </p:nvGrpSpPr>
+      <p:grpSpPr>
+        <a:xfrm>
+          <a:off x="0" y="0"/>
+          <a:ext cx="0" cy="0"/>
+          <a:chOff x="0" y="0"/>
+          <a:chExt cx="0" cy="0"/>
+        </a:xfrm>
+      </p:grpSpPr>
+      <p:sp>
+        <p:nvSpPr>
+          <p:cNvPr id="2" name="Slide Image Placeholder 1"/>
+          <p:cNvSpPr>
+            <a:spLocks noGrp="1"/>
+          </p:cNvSpPr>
+          <p:nvPr>
+            <p:ph type="sldImg" idx="2"/>
+          </p:nvPr>
+        </p:nvSpPr>
+        <p:spPr/>
+      </p:sp>
+      <p:sp>
+        <p:nvSpPr>
+          <p:cNvPr id="3" name="Notes Placeholder 2"/>
+          <p:cNvSpPr>
+            <a:spLocks noGrp="1"/>
+          </p:cNvSpPr>
+          <p:nvPr>
+            <p:ph type="body" idx="3" sz="quarter"/>
+          </p:nvPr>
+        </p:nvSpPr>
+        <p:spPr/>
+        <p:txBody>
+          <a:bodyPr/>
+          <a:lstStyle/>
+          <a:p>
+            <a:r>
+              <a:t>The techniques slide — name the concrete cloud-service features the reliability design leans on, and</a:t>
+            </a:r>
+          </a:p>
+          <a:p>
+            <a:r>
+              <a:t>introduce the parameterised template that carries the design to AT3.</a:t>
+            </a:r>
+          </a:p>
+          <a:p>
+            <a:r>
+              <a:t>• First bullet: the techniques (KE 9) — Multi-AZ deployment, load-balancer health checks, automated</a:t>
+            </a:r>
+          </a:p>
+          <a:p>
+            <a:r>
+              <a:t>database backups/snapshots, and cross-Region snapshot/DR copy. Tie each to the target from two slides</a:t>
+            </a:r>
+          </a:p>
+          <a:p>
+            <a:r>
+              <a:t>back.</a:t>
+            </a:r>
+          </a:p>
+          <a:p>
+            <a:r>
+              <a:t>• Second bullet: express the design as a PARAMETERISED CloudFormation template — Region and environment</a:t>
+            </a:r>
+          </a:p>
+          <a:p>
+            <a:r>
+              <a:t>as parameters — so the same design deploys repeatably, and to Melbourne for DR. One template, many</a:t>
+            </a:r>
+          </a:p>
+          <a:p>
+            <a:r>
+              <a:t>deploys.</a:t>
+            </a:r>
+          </a:p>
+          <a:p>
+            <a:r>
+              <a:t>• Third bullet: choose the feature that meets the goal at LEAST cost; each choice cites the goal it</a:t>
+            </a:r>
+          </a:p>
+          <a:p>
+            <a:r>
+              <a:t>serves. Traceability from feature back to goal.</a:t>
+            </a:r>
+          </a:p>
+          <a:p>
+            <a:r>
+              <a:t>Misconception to pre-empt: "parameterised = more complex." No — parameters are what stop you writing the</a:t>
+            </a:r>
+          </a:p>
+          <a:p>
+            <a:r>
+              <a:t>design twice for two Regions; the DR copy IS the same template with a different Region parameter.</a:t>
+            </a:r>
+          </a:p>
+          <a:p>
+            <a:r>
+              <a:t>Question to pose: "Why parameterise Region instead of hard-coding Sydney?" (the Melbourne DR copy is the</a:t>
+            </a:r>
+          </a:p>
+          <a:p>
+            <a:r>
+              <a:t>same template, Region-swapped — repeatable, not rewritten).</a:t>
+            </a:r>
+          </a:p>
+          <a:p>
+            <a:r>
+              <a:t>UoC/AT1 tie: ICTCLD504 KE 9 (features/techniques to improve reliability) → AT1 Solution Design + KE</a:t>
+            </a:r>
+          </a:p>
+          <a:p>
+            <a:r>
+              <a:t>appendix; the parameterised template is the seam to the AT3 build.</a:t>
+            </a:r>
+          </a:p>
+        </p:txBody>
+      </p:sp>
+      <p:sp>
+        <p:nvSpPr>
+          <p:cNvPr id="4" name="Slide Number Placeholder 3"/>
+          <p:cNvSpPr>
+            <a:spLocks noGrp="1"/>
+          </p:cNvSpPr>
+          <p:nvPr>
+            <p:ph type="sldNum" idx="5" sz="quarter"/>
+          </p:nvPr>
+        </p:nvSpPr>
+        <p:spPr/>
+      </p:sp>
+    </p:spTree>
+  </p:cSld>
+  <p:clrMapOvr>
+    <a:masterClrMapping/>
+  </p:clrMapOvr>
+</p:notes>
+</file>
+
+<file path=ppt/notesSlides/notesSlide6.xml><?xml version="1.0" encoding="utf-8"?>
+<p:notes xmlns:a="http://schemas.openxmlformats.org/drawingml/2006/main" xmlns:p="http://schemas.openxmlformats.org/presentationml/2006/main" xmlns:r="http://schemas.openxmlformats.org/officeDocument/2006/relationships">
+  <p:cSld>
+    <p:spTree>
+      <p:nvGrpSpPr>
+        <p:cNvPr id="1" name=""/>
+        <p:cNvGrpSpPr/>
+        <p:nvPr/>
+      </p:nvGrpSpPr>
+      <p:grpSpPr>
+        <a:xfrm>
+          <a:off x="0" y="0"/>
+          <a:ext cx="0" cy="0"/>
+          <a:chOff x="0" y="0"/>
+          <a:chExt cx="0" cy="0"/>
+        </a:xfrm>
+      </p:grpSpPr>
+      <p:sp>
+        <p:nvSpPr>
+          <p:cNvPr id="2" name="Slide Image Placeholder 1"/>
+          <p:cNvSpPr>
+            <a:spLocks noGrp="1"/>
+          </p:cNvSpPr>
+          <p:nvPr>
+            <p:ph type="sldImg" idx="2"/>
+          </p:nvPr>
+        </p:nvSpPr>
+        <p:spPr/>
+      </p:sp>
+      <p:sp>
+        <p:nvSpPr>
+          <p:cNvPr id="3" name="Notes Placeholder 2"/>
+          <p:cNvSpPr>
+            <a:spLocks noGrp="1"/>
+          </p:cNvSpPr>
+          <p:nvPr>
+            <p:ph type="body" idx="3" sz="quarter"/>
+          </p:nvPr>
+        </p:nvSpPr>
+        <p:spPr/>
+        <p:txBody>
+          <a:bodyPr/>
+          <a:lstStyle/>
+          <a:p>
+            <a:r>
+              <a:t>Teach residency as an INPUT CONSTRAINT on the reliability/DR design — a scoped slice, not a second</a:t>
+            </a:r>
+          </a:p>
+          <a:p>
+            <a:r>
+              <a:t>architecture. Keep it light; it's one constraint, not a whole new system.</a:t>
+            </a:r>
+          </a:p>
+          <a:p>
+            <a:r>
+              <a:t>• First bullet: the constraint — CERT-In-mandated logs and Companies-Act books-of-account must reside in</a:t>
+            </a:r>
+          </a:p>
+          <a:p>
+            <a:r>
+              <a:t>Mumbai (ap-south-1); the main system stays in Sydney.</a:t>
+            </a:r>
+          </a:p>
+          <a:p>
+            <a:r>
+              <a:t>• Second bullet: the design keeps the regulated data IN-Region — residency is an input constraint the</a:t>
+            </a:r>
+          </a:p>
+          <a:p>
+            <a:r>
+              <a:t>design is shaped around, not a bolt-on added at the end.</a:t>
+            </a:r>
+          </a:p>
+          <a:p>
+            <a:r>
+              <a:t>• Third bullet: frame it as a scoped slice of the reliability/DR design (where the regulated data lives,</a:t>
+            </a:r>
+          </a:p>
+          <a:p>
+            <a:r>
+              <a:t>and its DR), not a second architecture to design in full.</a:t>
+            </a:r>
+          </a:p>
+          <a:p>
+            <a:r>
+              <a:t>Misconception to pre-empt: "residency means build a whole separate Indian system." No — it constrains</a:t>
+            </a:r>
+          </a:p>
+          <a:p>
+            <a:r>
+              <a:t>WHERE specific regulated data (logs, books-of-account) sits; the rest of the design is unchanged.</a:t>
+            </a:r>
+          </a:p>
+          <a:p>
+            <a:r>
+              <a:t>Question to pose: "Which data must stay in Mumbai, and which stays in Sydney — and how does that change</a:t>
+            </a:r>
+          </a:p>
+          <a:p>
+            <a:r>
+              <a:t>the DR design?" (only the regulated slice is pinned to ap-south-1).</a:t>
+            </a:r>
+          </a:p>
+          <a:p>
+            <a:r>
+              <a:t>UoC/AT1 tie: reinforces ICTCLD504 PC 2.3 (improve architecture jointly for security/reliability) — the</a:t>
+            </a:r>
+          </a:p>
+          <a:p>
+            <a:r>
+              <a:t>residency constraint is part of the reliability/DR design in the AT1 Solution Design.</a:t>
+            </a:r>
+          </a:p>
+        </p:txBody>
+      </p:sp>
+      <p:sp>
+        <p:nvSpPr>
+          <p:cNvPr id="4" name="Slide Number Placeholder 3"/>
+          <p:cNvSpPr>
+            <a:spLocks noGrp="1"/>
+          </p:cNvSpPr>
+          <p:nvPr>
+            <p:ph type="sldNum" idx="5" sz="quarter"/>
+          </p:nvPr>
+        </p:nvSpPr>
+        <p:spPr/>
+      </p:sp>
+    </p:spTree>
+  </p:cSld>
+  <p:clrMapOvr>
+    <a:masterClrMapping/>
+  </p:clrMapOvr>
+</p:notes>
+</file>
+
+<file path=ppt/notesSlides/notesSlide7.xml><?xml version="1.0" encoding="utf-8"?>
+<p:notes xmlns:a="http://schemas.openxmlformats.org/drawingml/2006/main" xmlns:p="http://schemas.openxmlformats.org/presentationml/2006/main" xmlns:r="http://schemas.openxmlformats.org/officeDocument/2006/relationships">
+  <p:cSld>
+    <p:spTree>
+      <p:nvGrpSpPr>
+        <p:cNvPr id="1" name=""/>
+        <p:cNvGrpSpPr/>
+        <p:nvPr/>
+      </p:nvGrpSpPr>
+      <p:grpSpPr>
+        <a:xfrm>
+          <a:off x="0" y="0"/>
+          <a:ext cx="0" cy="0"/>
+          <a:chOff x="0" y="0"/>
+          <a:chExt cx="0" cy="0"/>
+        </a:xfrm>
+      </p:grpSpPr>
+      <p:sp>
+        <p:nvSpPr>
+          <p:cNvPr id="2" name="Slide Image Placeholder 1"/>
+          <p:cNvSpPr>
+            <a:spLocks noGrp="1"/>
+          </p:cNvSpPr>
+          <p:nvPr>
+            <p:ph type="sldImg" idx="2"/>
+          </p:nvPr>
+        </p:nvSpPr>
+        <p:spPr/>
+      </p:sp>
+      <p:sp>
+        <p:nvSpPr>
+          <p:cNvPr id="3" name="Notes Placeholder 2"/>
+          <p:cNvSpPr>
+            <a:spLocks noGrp="1"/>
+          </p:cNvSpPr>
+          <p:nvPr>
+            <p:ph type="body" idx="3" sz="quarter"/>
+          </p:nvPr>
+        </p:nvSpPr>
+        <p:spPr/>
+        <p:txBody>
+          <a:bodyPr/>
+          <a:lstStyle/>
+          <a:p>
+            <a:r>
+              <a:t>Facilitation — the Section 1 practice; students design the reliability improvements for the practice</a:t>
+            </a:r>
+          </a:p>
+          <a:p>
+            <a:r>
+              <a:t>vehicle, arguing one cost-benefit trade-off explicitly. The key teaching move: same REASONING, possibly</a:t>
+            </a:r>
+          </a:p>
+          <a:p>
+            <a:r>
+              <a:t>the OPPOSITE call to Ledgerline.</a:t>
+            </a:r>
+          </a:p>
+          <a:p>
+            <a:r>
+              <a:t>Tell students: "For the practice vehicle — the website — design the reliability improvements to your</a:t>
+            </a:r>
+          </a:p>
+          <a:p>
+            <a:r>
+              <a:t>Topic-1 goals across the app, data and DR tiers. You decide what each tier needs — to the goals and no</a:t>
+            </a:r>
+          </a:p>
+          <a:p>
+            <a:r>
+              <a:t>further — and you argue at least one cost-benefit trade-off out loud."</a:t>
+            </a:r>
+          </a:p>
+          <a:p>
+            <a:r>
+              <a:t>Steps (put on the board):</a:t>
+            </a:r>
+          </a:p>
+          <a:p>
+            <a:r>
+              <a:t>1. Design the app tier, the data tier and DR to your Topic-1 reliability goals.</a:t>
+            </a:r>
+          </a:p>
+          <a:p>
+            <a:r>
+              <a:t>2. Pick ONE trade-off and argue it explicitly — cost vs the reliability it buys.</a:t>
+            </a:r>
+          </a:p>
+          <a:p>
+            <a:r>
+              <a:t>3. Show how each change meets a NAMED goal.</a:t>
+            </a:r>
+          </a:p>
+          <a:p>
+            <a:r>
+              <a:t>Must produce: a reliability design across the three tiers with one written cost-benefit argument, each</a:t>
+            </a:r>
+          </a:p>
+          <a:p>
+            <a:r>
+              <a:t>change tied to a goal.</a:t>
+            </a:r>
+          </a:p>
+          <a:p>
+            <a:r>
+              <a:t>Timing: ~30 min then discuss. Key point to surface: the website runs MySQL with NO legacy</a:t>
+            </a:r>
+          </a:p>
+          <a:p>
+            <a:r>
+              <a:t>single-instance constraint, so the data-tier call (e.g. whether to go Multi-AZ) is theirs to justify —</a:t>
+            </a:r>
+          </a:p>
+          <a:p>
+            <a:r>
+              <a:t>potentially the OPPOSITE decision to Ledgerline's, reached by the SAME cost-benefit reasoning. That's</a:t>
+            </a:r>
+          </a:p>
+          <a:p>
+            <a:r>
+              <a:t>the learning, not a mistake.</a:t>
+            </a:r>
+          </a:p>
+          <a:p>
+            <a:r>
+              <a:t>Where they get stuck: they copy Ledgerline's "reject Multi-AZ DB" verdict — remind them the constraint</a:t>
+            </a:r>
+          </a:p>
+          <a:p>
+            <a:r>
+              <a:t>is different here, so re-run the reasoning, don't copy the answer.</a:t>
+            </a:r>
+          </a:p>
+          <a:p>
+            <a:r>
+              <a:t>Share-back prompt: ask two students their data-tier call and WHY — expect different verdicts, same</a:t>
+            </a:r>
+          </a:p>
+          <a:p>
+            <a:r>
+              <a:t>reasoning shape.</a:t>
+            </a:r>
+          </a:p>
+          <a:p>
+            <a:r>
+              <a:t>No-leakage note: the website is the practice vehicle; AT1 assesses the reliability design on Ledgerline</a:t>
+            </a:r>
+          </a:p>
+          <a:p>
+            <a:r>
+              <a:t>— comparable, not identical, and the DB constraint differs by design.</a:t>
+            </a:r>
+          </a:p>
+        </p:txBody>
+      </p:sp>
+      <p:sp>
+        <p:nvSpPr>
+          <p:cNvPr id="4" name="Slide Number Placeholder 3"/>
+          <p:cNvSpPr>
+            <a:spLocks noGrp="1"/>
+          </p:cNvSpPr>
+          <p:nvPr>
+            <p:ph type="sldNum" idx="5" sz="quarter"/>
+          </p:nvPr>
+        </p:nvSpPr>
+        <p:spPr/>
+      </p:sp>
+    </p:spTree>
+  </p:cSld>
+  <p:clrMapOvr>
+    <a:masterClrMapping/>
+  </p:clrMapOvr>
+</p:notes>
+</file>
+
+<file path=ppt/notesSlides/notesSlide8.xml><?xml version="1.0" encoding="utf-8"?>
+<p:notes xmlns:a="http://schemas.openxmlformats.org/drawingml/2006/main" xmlns:p="http://schemas.openxmlformats.org/presentationml/2006/main" xmlns:r="http://schemas.openxmlformats.org/officeDocument/2006/relationships">
+  <p:cSld>
+    <p:spTree>
+      <p:nvGrpSpPr>
+        <p:cNvPr id="1" name=""/>
+        <p:cNvGrpSpPr/>
+        <p:nvPr/>
+      </p:nvGrpSpPr>
+      <p:grpSpPr>
+        <a:xfrm>
+          <a:off x="0" y="0"/>
+          <a:ext cx="0" cy="0"/>
+          <a:chOff x="0" y="0"/>
+          <a:chExt cx="0" cy="0"/>
+        </a:xfrm>
+      </p:grpSpPr>
+      <p:sp>
+        <p:nvSpPr>
+          <p:cNvPr id="2" name="Slide Image Placeholder 1"/>
+          <p:cNvSpPr>
+            <a:spLocks noGrp="1"/>
+          </p:cNvSpPr>
+          <p:nvPr>
+            <p:ph type="sldImg" idx="2"/>
+          </p:nvPr>
+        </p:nvSpPr>
+        <p:spPr/>
+      </p:sp>
+      <p:sp>
+        <p:nvSpPr>
+          <p:cNvPr id="3" name="Notes Placeholder 2"/>
+          <p:cNvSpPr>
+            <a:spLocks noGrp="1"/>
+          </p:cNvSpPr>
+          <p:nvPr>
+            <p:ph type="body" idx="3" sz="quarter"/>
+          </p:nvPr>
+        </p:nvSpPr>
+        <p:spPr/>
+        <p:txBody>
+          <a:bodyPr/>
+          <a:lstStyle/>
+          <a:p>
+            <a:r>
+              <a:t>Open Section 2 — the design PRINCIPLES that justify the reliability choices already made. Teach them as</a:t>
+            </a:r>
+          </a:p>
+          <a:p>
+            <a:r>
+              <a:t>the "why" behind Multi-AZ and health checks, not as new features.</a:t>
+            </a:r>
+          </a:p>
+          <a:p>
+            <a:r>
+              <a:t>• First bullet: the principles (KE 4) — design for failure, loose coupling, statelessness, right-sizing,</a:t>
+            </a:r>
+          </a:p>
+          <a:p>
+            <a:r>
+              <a:t>and automation over manual steps. Give a one-line example of each.</a:t>
+            </a:r>
+          </a:p>
+          <a:p>
+            <a:r>
+              <a:t>• Second bullet: improve the architecture TO these principles — they are why Multi-AZ and health checks</a:t>
+            </a:r>
+          </a:p>
+          <a:p>
+            <a:r>
+              <a:t>belong in the design. Principles explain the choices.</a:t>
+            </a:r>
+          </a:p>
+          <a:p>
+            <a:r>
+              <a:t>• Third bullet: the simplest design that meets the goal wins; principles justify choices, they don't</a:t>
+            </a:r>
+          </a:p>
+          <a:p>
+            <a:r>
+              <a:t>mandate maximums. Same anti-gold-plating rule.</a:t>
+            </a:r>
+          </a:p>
+          <a:p>
+            <a:r>
+              <a:t>Misconception to pre-empt: "'design for failure' means add every redundancy." No — it means assume</a:t>
+            </a:r>
+          </a:p>
+          <a:p>
+            <a:r>
+              <a:t>components WILL fail and design so the system copes at the level the goal needs; it's a mindset, not a</a:t>
+            </a:r>
+          </a:p>
+          <a:p>
+            <a:r>
+              <a:t>maximum.</a:t>
+            </a:r>
+          </a:p>
+          <a:p>
+            <a:r>
+              <a:t>Question to pose: "'Design for failure' — how does it justify the Multi-AZ app tier but NOT a Multi-AZ</a:t>
+            </a:r>
+          </a:p>
+          <a:p>
+            <a:r>
+              <a:t>database here?" (cope with AZ failure at the app tier; the DB copes via backup/restore + DR at</a:t>
+            </a:r>
+          </a:p>
+          <a:p>
+            <a:r>
+              <a:t>acceptable cost).</a:t>
+            </a:r>
+          </a:p>
+          <a:p>
+            <a:r>
+              <a:t>UoC/AT1 tie: ICTCLD504 KE 4 (design principles for cloud applications) → AT1 Solution Design KE appendix.</a:t>
+            </a:r>
+          </a:p>
+        </p:txBody>
+      </p:sp>
+      <p:sp>
+        <p:nvSpPr>
+          <p:cNvPr id="4" name="Slide Number Placeholder 3"/>
+          <p:cNvSpPr>
+            <a:spLocks noGrp="1"/>
+          </p:cNvSpPr>
+          <p:nvPr>
+            <p:ph type="sldNum" idx="5" sz="quarter"/>
+          </p:nvPr>
+        </p:nvSpPr>
+        <p:spPr/>
+      </p:sp>
+    </p:spTree>
+  </p:cSld>
+  <p:clrMapOvr>
+    <a:masterClrMapping/>
+  </p:clrMapOvr>
+</p:notes>
+</file>
+
+<file path=ppt/notesSlides/notesSlide9.xml><?xml version="1.0" encoding="utf-8"?>
+<p:notes xmlns:a="http://schemas.openxmlformats.org/drawingml/2006/main" xmlns:p="http://schemas.openxmlformats.org/presentationml/2006/main" xmlns:r="http://schemas.openxmlformats.org/officeDocument/2006/relationships">
+  <p:cSld>
+    <p:spTree>
+      <p:nvGrpSpPr>
+        <p:cNvPr id="1" name=""/>
+        <p:cNvGrpSpPr/>
+        <p:nvPr/>
+      </p:nvGrpSpPr>
+      <p:grpSpPr>
+        <a:xfrm>
+          <a:off x="0" y="0"/>
+          <a:ext cx="0" cy="0"/>
+          <a:chOff x="0" y="0"/>
+          <a:chExt cx="0" cy="0"/>
+        </a:xfrm>
+      </p:grpSpPr>
+      <p:sp>
+        <p:nvSpPr>
+          <p:cNvPr id="2" name="Slide Image Placeholder 1"/>
+          <p:cNvSpPr>
+            <a:spLocks noGrp="1"/>
+          </p:cNvSpPr>
+          <p:nvPr>
+            <p:ph type="sldImg" idx="2"/>
+          </p:nvPr>
+        </p:nvSpPr>
+        <p:spPr/>
+      </p:sp>
+      <p:sp>
+        <p:nvSpPr>
+          <p:cNvPr id="3" name="Notes Placeholder 2"/>
+          <p:cNvSpPr>
+            <a:spLocks noGrp="1"/>
+          </p:cNvSpPr>
+          <p:nvPr>
+            <p:ph type="body" idx="3" sz="quarter"/>
+          </p:nvPr>
+        </p:nvSpPr>
+        <p:spPr/>
+        <p:txBody>
+          <a:bodyPr/>
+          <a:lstStyle/>
+          <a:p>
+            <a:r>
+              <a:t>Teach the MIGRATION principles — how you move the single-AZ baseline to the improved target without a</a:t>
+            </a:r>
+          </a:p>
+          <a:p>
+            <a:r>
+              <a:t>big-bang cutover. Design-level here; the actual migration is AT3.</a:t>
+            </a:r>
+          </a:p>
+          <a:p>
+            <a:r>
+              <a:t>• First bullet: the migration principles (KE 5) — move incrementally, keep the system serving, evidence</a:t>
+            </a:r>
+          </a:p>
+          <a:p>
+            <a:r>
+              <a:t>each step, and be able to ROLL BACK. Say each as a rule.</a:t>
+            </a:r>
+          </a:p>
+          <a:p>
+            <a:r>
+              <a:t>• Second bullet: sequence the improvement so single-AZ becomes Multi-AZ + DR without a big-bang cutover.</a:t>
+            </a:r>
+          </a:p>
+          <a:p>
+            <a:r>
+              <a:t>It's a path, not a switch.</a:t>
+            </a:r>
+          </a:p>
+          <a:p>
+            <a:r>
+              <a:t>• Third bullet: this is design-level HERE — the actual migration/build is AT3. Hold the depth ceiling.</a:t>
+            </a:r>
+          </a:p>
+          <a:p>
+            <a:r>
+              <a:t>Misconception to pre-empt: "migration = turn off the old, turn on the new." No — you move incrementally</a:t>
+            </a:r>
+          </a:p>
+          <a:p>
+            <a:r>
+              <a:t>and keep serving; the ability to roll back is a design requirement, not an afterthought.</a:t>
+            </a:r>
+          </a:p>
+          <a:p>
+            <a:r>
+              <a:t>Question to pose: "Why sequence the migration instead of cutting over in one weekend?" (keep serving,</a:t>
+            </a:r>
+          </a:p>
+          <a:p>
+            <a:r>
+              <a:t>evidence each step, roll back if a step fails — lower risk to a live accounting system).</a:t>
+            </a:r>
+          </a:p>
+          <a:p>
+            <a:r>
+              <a:t>UoC/AT1 tie: ICTCLD504 KE 5 (migrating principles for cloud applications) → AT1 Solution Design KE</a:t>
+            </a:r>
+          </a:p>
+          <a:p>
+            <a:r>
+              <a:t>appendix.</a:t>
+            </a:r>
+          </a:p>
+        </p:txBody>
+      </p:sp>
+      <p:sp>
+        <p:nvSpPr>
+          <p:cNvPr id="4" name="Slide Number Placeholder 3"/>
+          <p:cNvSpPr>
+            <a:spLocks noGrp="1"/>
+          </p:cNvSpPr>
+          <p:nvPr>
+            <p:ph type="sldNum" idx="5" sz="quarter"/>
+          </p:nvPr>
+        </p:nvSpPr>
+        <p:spPr/>
+      </p:sp>
+    </p:spTree>
+  </p:cSld>
+  <p:clrMapOvr>
+    <a:masterClrMapping/>
+  </p:clrMapOvr>
+</p:notes>
 </file>
 
 <file path=ppt/slideLayouts/slideLayout1.xml><?xml version="1.0" encoding="utf-8"?>
@@ -9483,4 +11403,324 @@
   </a:objectDefaults>
   <a:extraClrSchemeLst/>
 </a:theme>
+</file>
+
+<file path=ppt/theme/theme2.xml><?xml version="1.0" encoding="utf-8"?>
+<a:theme xmlns:a="http://schemas.openxmlformats.org/drawingml/2006/main" name="Office Theme">
+  <a:themeElements>
+    <a:clrScheme name="Office">
+      <a:dk1>
+        <a:sysClr val="windowText" lastClr="000000"/>
+      </a:dk1>
+      <a:lt1>
+        <a:sysClr val="window" lastClr="FFFFFF"/>
+      </a:lt1>
+      <a:dk2>
+        <a:srgbClr val="1F497D"/>
+      </a:dk2>
+      <a:lt2>
+        <a:srgbClr val="EEECE1"/>
+      </a:lt2>
+      <a:accent1>
+        <a:srgbClr val="4F81BD"/>
+      </a:accent1>
+      <a:accent2>
+        <a:srgbClr val="C0504D"/>
+      </a:accent2>
+      <a:accent3>
+        <a:srgbClr val="9BBB59"/>
+      </a:accent3>
+      <a:accent4>
+        <a:srgbClr val="8064A2"/>
+      </a:accent4>
+      <a:accent5>
+        <a:srgbClr val="4BACC6"/>
+      </a:accent5>
+      <a:accent6>
+        <a:srgbClr val="F79646"/>
+      </a:accent6>
+      <a:hlink>
+        <a:srgbClr val="0000FF"/>
+      </a:hlink>
+      <a:folHlink>
+        <a:srgbClr val="800080"/>
+      </a:folHlink>
+    </a:clrScheme>
+    <a:fontScheme name="Office">
+      <a:majorFont>
+        <a:latin typeface="Calibri"/>
+        <a:ea typeface=""/>
+        <a:cs typeface=""/>
+        <a:font script="Jpan" typeface="ＭＳ Ｐゴシック"/>
+        <a:font script="Hang" typeface="맑은 고딕"/>
+        <a:font script="Hans" typeface="宋体"/>
+        <a:font script="Hant" typeface="新細明體"/>
+        <a:font script="Arab" typeface="Times New Roman"/>
+        <a:font script="Hebr" typeface="Times New Roman"/>
+        <a:font script="Thai" typeface="Angsana New"/>
+        <a:font script="Ethi" typeface="Nyala"/>
+        <a:font script="Beng" typeface="Vrinda"/>
+        <a:font script="Gujr" typeface="Shruti"/>
+        <a:font script="Khmr" typeface="MoolBoran"/>
+        <a:font script="Knda" typeface="Tunga"/>
+        <a:font script="Guru" typeface="Raavi"/>
+        <a:font script="Cans" typeface="Euphemia"/>
+        <a:font script="Cher" typeface="Plantagenet Cherokee"/>
+        <a:font script="Yiii" typeface="Microsoft Yi Baiti"/>
+        <a:font script="Tibt" typeface="Microsoft Himalaya"/>
+        <a:font script="Thaa" typeface="MV Boli"/>
+        <a:font script="Deva" typeface="Mangal"/>
+        <a:font script="Telu" typeface="Gautami"/>
+        <a:font script="Taml" typeface="Latha"/>
+        <a:font script="Syrc" typeface="Estrangelo Edessa"/>
+        <a:font script="Orya" typeface="Kalinga"/>
+        <a:font script="Mlym" typeface="Kartika"/>
+        <a:font script="Laoo" typeface="DokChampa"/>
+        <a:font script="Sinh" typeface="Iskoola Pota"/>
+        <a:font script="Mong" typeface="Mongolian Baiti"/>
+        <a:font script="Viet" typeface="Times New Roman"/>
+        <a:font script="Uigh" typeface="Microsoft Uighur"/>
+        <a:font script="Geor" typeface="Sylfaen"/>
+      </a:majorFont>
+      <a:minorFont>
+        <a:latin typeface="Calibri"/>
+        <a:ea typeface=""/>
+        <a:cs typeface=""/>
+        <a:font script="Jpan" typeface="ＭＳ Ｐゴシック"/>
+        <a:font script="Hang" typeface="맑은 고딕"/>
+        <a:font script="Hans" typeface="宋体"/>
+        <a:font script="Hant" typeface="新細明體"/>
+        <a:font script="Arab" typeface="Arial"/>
+        <a:font script="Hebr" typeface="Arial"/>
+        <a:font script="Thai" typeface="Cordia New"/>
+        <a:font script="Ethi" typeface="Nyala"/>
+        <a:font script="Beng" typeface="Vrinda"/>
+        <a:font script="Gujr" typeface="Shruti"/>
+        <a:font script="Khmr" typeface="DaunPenh"/>
+        <a:font script="Knda" typeface="Tunga"/>
+        <a:font script="Guru" typeface="Raavi"/>
+        <a:font script="Cans" typeface="Euphemia"/>
+        <a:font script="Cher" typeface="Plantagenet Cherokee"/>
+        <a:font script="Yiii" typeface="Microsoft Yi Baiti"/>
+        <a:font script="Tibt" typeface="Microsoft Himalaya"/>
+        <a:font script="Thaa" typeface="MV Boli"/>
+        <a:font script="Deva" typeface="Mangal"/>
+        <a:font script="Telu" typeface="Gautami"/>
+        <a:font script="Taml" typeface="Latha"/>
+        <a:font script="Syrc" typeface="Estrangelo Edessa"/>
+        <a:font script="Orya" typeface="Kalinga"/>
+        <a:font script="Mlym" typeface="Kartika"/>
+        <a:font script="Laoo" typeface="DokChampa"/>
+        <a:font script="Sinh" typeface="Iskoola Pota"/>
+        <a:font script="Mong" typeface="Mongolian Baiti"/>
+        <a:font script="Viet" typeface="Arial"/>
+        <a:font script="Uigh" typeface="Microsoft Uighur"/>
+        <a:font script="Geor" typeface="Sylfaen"/>
+      </a:minorFont>
+    </a:fontScheme>
+    <a:fmtScheme name="Office">
+      <a:fillStyleLst>
+        <a:solidFill>
+          <a:schemeClr val="phClr"/>
+        </a:solidFill>
+        <a:gradFill rotWithShape="1">
+          <a:gsLst>
+            <a:gs pos="0">
+              <a:schemeClr val="phClr">
+                <a:tint val="50000"/>
+                <a:satMod val="300000"/>
+              </a:schemeClr>
+            </a:gs>
+            <a:gs pos="35000">
+              <a:schemeClr val="phClr">
+                <a:tint val="37000"/>
+                <a:satMod val="300000"/>
+              </a:schemeClr>
+            </a:gs>
+            <a:gs pos="100000">
+              <a:schemeClr val="phClr">
+                <a:tint val="15000"/>
+                <a:satMod val="350000"/>
+              </a:schemeClr>
+            </a:gs>
+          </a:gsLst>
+          <a:lin ang="16200000" scaled="1"/>
+        </a:gradFill>
+        <a:gradFill rotWithShape="1">
+          <a:gsLst>
+            <a:gs pos="0">
+              <a:schemeClr val="phClr">
+                <a:tint val="100000"/>
+                <a:shade val="100000"/>
+                <a:satMod val="130000"/>
+              </a:schemeClr>
+            </a:gs>
+            <a:gs pos="100000">
+              <a:schemeClr val="phClr">
+                <a:tint val="50000"/>
+                <a:shade val="100000"/>
+                <a:satMod val="350000"/>
+              </a:schemeClr>
+            </a:gs>
+          </a:gsLst>
+          <a:lin ang="16200000" scaled="0"/>
+        </a:gradFill>
+      </a:fillStyleLst>
+      <a:lnStyleLst>
+        <a:ln w="9525" cap="flat" cmpd="sng" algn="ctr">
+          <a:solidFill>
+            <a:schemeClr val="phClr">
+              <a:shade val="95000"/>
+              <a:satMod val="105000"/>
+            </a:schemeClr>
+          </a:solidFill>
+          <a:prstDash val="solid"/>
+        </a:ln>
+        <a:ln w="25400" cap="flat" cmpd="sng" algn="ctr">
+          <a:solidFill>
+            <a:schemeClr val="phClr"/>
+          </a:solidFill>
+          <a:prstDash val="solid"/>
+        </a:ln>
+        <a:ln w="38100" cap="flat" cmpd="sng" algn="ctr">
+          <a:solidFill>
+            <a:schemeClr val="phClr"/>
+          </a:solidFill>
+          <a:prstDash val="solid"/>
+        </a:ln>
+      </a:lnStyleLst>
+      <a:effectStyleLst>
+        <a:effectStyle>
+          <a:effectLst>
+            <a:outerShdw blurRad="40000" dist="20000" dir="5400000" rotWithShape="0">
+              <a:srgbClr val="000000">
+                <a:alpha val="38000"/>
+              </a:srgbClr>
+            </a:outerShdw>
+          </a:effectLst>
+        </a:effectStyle>
+        <a:effectStyle>
+          <a:effectLst>
+            <a:outerShdw blurRad="40000" dist="23000" dir="5400000" rotWithShape="0">
+              <a:srgbClr val="000000">
+                <a:alpha val="35000"/>
+              </a:srgbClr>
+            </a:outerShdw>
+          </a:effectLst>
+        </a:effectStyle>
+        <a:effectStyle>
+          <a:effectLst>
+            <a:outerShdw blurRad="40000" dist="23000" dir="5400000" rotWithShape="0">
+              <a:srgbClr val="000000">
+                <a:alpha val="35000"/>
+              </a:srgbClr>
+            </a:outerShdw>
+          </a:effectLst>
+          <a:scene3d>
+            <a:camera prst="orthographicFront">
+              <a:rot lat="0" lon="0" rev="0"/>
+            </a:camera>
+            <a:lightRig rig="threePt" dir="t">
+              <a:rot lat="0" lon="0" rev="1200000"/>
+            </a:lightRig>
+          </a:scene3d>
+          <a:sp3d>
+            <a:bevelT w="63500" h="25400"/>
+          </a:sp3d>
+        </a:effectStyle>
+      </a:effectStyleLst>
+      <a:bgFillStyleLst>
+        <a:solidFill>
+          <a:schemeClr val="phClr"/>
+        </a:solidFill>
+        <a:gradFill rotWithShape="1">
+          <a:gsLst>
+            <a:gs pos="0">
+              <a:schemeClr val="phClr">
+                <a:tint val="40000"/>
+                <a:satMod val="350000"/>
+              </a:schemeClr>
+            </a:gs>
+            <a:gs pos="40000">
+              <a:schemeClr val="phClr">
+                <a:tint val="45000"/>
+                <a:shade val="99000"/>
+                <a:satMod val="350000"/>
+              </a:schemeClr>
+            </a:gs>
+            <a:gs pos="100000">
+              <a:schemeClr val="phClr">
+                <a:shade val="20000"/>
+                <a:satMod val="255000"/>
+              </a:schemeClr>
+            </a:gs>
+          </a:gsLst>
+          <a:path path="circle">
+            <a:fillToRect l="50000" t="-80000" r="50000" b="180000"/>
+          </a:path>
+        </a:gradFill>
+        <a:gradFill rotWithShape="1">
+          <a:gsLst>
+            <a:gs pos="0">
+              <a:schemeClr val="phClr">
+                <a:tint val="80000"/>
+                <a:satMod val="300000"/>
+              </a:schemeClr>
+            </a:gs>
+            <a:gs pos="100000">
+              <a:schemeClr val="phClr">
+                <a:shade val="30000"/>
+                <a:satMod val="200000"/>
+              </a:schemeClr>
+            </a:gs>
+          </a:gsLst>
+          <a:path path="circle">
+            <a:fillToRect l="50000" t="50000" r="50000" b="50000"/>
+          </a:path>
+        </a:gradFill>
+      </a:bgFillStyleLst>
+    </a:fmtScheme>
+  </a:themeElements>
+  <a:objectDefaults>
+    <a:spDef>
+      <a:spPr/>
+      <a:bodyPr/>
+      <a:lstStyle/>
+      <a:style>
+        <a:lnRef idx="1">
+          <a:schemeClr val="accent1"/>
+        </a:lnRef>
+        <a:fillRef idx="3">
+          <a:schemeClr val="accent1"/>
+        </a:fillRef>
+        <a:effectRef idx="2">
+          <a:schemeClr val="accent1"/>
+        </a:effectRef>
+        <a:fontRef idx="minor">
+          <a:schemeClr val="lt1"/>
+        </a:fontRef>
+      </a:style>
+    </a:spDef>
+    <a:lnDef>
+      <a:spPr/>
+      <a:bodyPr/>
+      <a:lstStyle/>
+      <a:style>
+        <a:lnRef idx="2">
+          <a:schemeClr val="accent1"/>
+        </a:lnRef>
+        <a:fillRef idx="0">
+          <a:schemeClr val="accent1"/>
+        </a:fillRef>
+        <a:effectRef idx="1">
+          <a:schemeClr val="accent1"/>
+        </a:effectRef>
+        <a:fontRef idx="minor">
+          <a:schemeClr val="tx1"/>
+        </a:fontRef>
+      </a:style>
+    </a:lnDef>
+  </a:objectDefaults>
+  <a:extraClrSchemeLst/>
+</a:theme>
 </file>
--- a/S1-CL3-Cloud-Infrastructure-Improvement/delivery/topic_02/Topic_02_Slides.pptx
+++ b/S1-CL3-Cloud-Infrastructure-Improvement/delivery/topic_02/Topic_02_Slides.pptx
@@ -10888,7 +10888,7 @@
                 </a:solidFill>
                 <a:latin typeface="Roboto"/>
               </a:rPr>
-              <a:t>A light residency constraint: CERT-In-mandated logs and Companies-Act books-of-account must reside in Mumbai (`ap-south-1`); the main system stays in Sydney.</a:t>
+              <a:t>A light residency constraint: CERT-In-mandated logs and Companies-Act books-of-account must reside in Mumbai (ap-south-1); the main system stays in Sydney.</a:t>
             </a:r>
           </a:p>
           <a:p>

--- a/S1-CL3-Cloud-Infrastructure-Improvement/delivery/topic_02/Topic_02_Slides.pptx
+++ b/S1-CL3-Cloud-Infrastructure-Improvement/delivery/topic_02/Topic_02_Slides.pptx
@@ -519,72 +519,12 @@
           <a:lstStyle/>
           <a:p>
             <a:r>
-              <a:t>Frame the pivot from analysis to DESIGN — with Topic 1's goals set, they now design the reliability</a:t>
-            </a:r>
-          </a:p>
-          <a:p>
-            <a:r>
-              <a:t>changes. Set the depth ceiling: design on paper, to the goals, not beyond; the build is AT3.</a:t>
-            </a:r>
-          </a:p>
-          <a:p>
-            <a:r>
-              <a:t>• First two bullets: Topic 2 continues AT1 — design the changes that make Ledgerline reliable,</a:t>
-            </a:r>
-          </a:p>
-          <a:p>
-            <a:r>
-              <a:t>reliability optimised JOINTLY with security, scalability and cost. Improve without over-building.</a:t>
-            </a:r>
-          </a:p>
-          <a:p>
-            <a:r>
-              <a:t>• Third bullet: name the target — application-tier Multi-AZ + database backup/restore + cross-Region</a:t>
-            </a:r>
-          </a:p>
-          <a:p>
-            <a:r>
-              <a:t>DR to Melbourne (data stays in Australia). Say "Melbourne — onshore" out loud.</a:t>
-            </a:r>
-          </a:p>
-          <a:p>
-            <a:r>
-              <a:t>• Fourth bullet (the discipline): design only, to the goals — the build is AT3. Resist drawing console</a:t>
-            </a:r>
-          </a:p>
-          <a:p>
-            <a:r>
-              <a:t>steps.</a:t>
-            </a:r>
-          </a:p>
-          <a:p>
-            <a:r>
-              <a:t>Misconception to pre-empt: "reliable = make everything Multi-AZ." No — this Topic's centrepiece is</a:t>
-            </a:r>
-          </a:p>
-          <a:p>
-            <a:r>
-              <a:t>REJECTING a Multi-AZ database on a cost-benefit call. Reliability is targeted, not maximised.</a:t>
-            </a:r>
-          </a:p>
-          <a:p>
-            <a:r>
-              <a:t>Question to pose: "Topic 1 set the reliability goal — what does 'design to the goal, not beyond it' rule</a:t>
-            </a:r>
-          </a:p>
-          <a:p>
-            <a:r>
-              <a:t>out?" (gold-plating; any redundancy the goal doesn't justify).</a:t>
-            </a:r>
-          </a:p>
-          <a:p>
-            <a:r>
-              <a:t>UoC/AT1 tie: this Topic develops ICTCLD504 PC 2.3, PE 1 and KE 4/5/8/9; the output is the reliability</a:t>
-            </a:r>
-          </a:p>
-          <a:p>
-            <a:r>
-              <a:t>sections + KE appendix of the AT1 Solution Design.</a:t>
+              <a:t>Workbook tasks 8 and 9 today, then the object-storage question. Metrics before design — you can't design to a target you haven't set.</a:t>
+            </a:r>
+          </a:p>
+          <a:p>
+            <a:r>
+              <a:t>Misconception: scalable = big enough for the busiest day. That's over-provisioning; scalable means capacity moves with load.</a:t>
             </a:r>
           </a:p>
         </p:txBody>
@@ -654,222 +594,12 @@
           <a:lstStyle/>
           <a:p>
             <a:r>
-              <a:t>Facilitation — the Section 2 practice; students write the KE-appendix justification for their practice</a:t>
-            </a:r>
-          </a:p>
-          <a:p>
-            <a:r>
-              <a:t>reliability design — naming the principle behind each choice.</a:t>
-            </a:r>
-          </a:p>
-          <a:p>
-            <a:r>
-              <a:t>Tell students: "For your practice design, write the KE-appendix justification: for each reliability</a:t>
-            </a:r>
-          </a:p>
-          <a:p>
-            <a:r>
-              <a:t>choice, name the cloud design principle behind it, and describe the migration approach that reaches the</a:t>
-            </a:r>
-          </a:p>
-          <a:p>
-            <a:r>
-              <a:t>improved architecture."</a:t>
-            </a:r>
-          </a:p>
-          <a:p>
-            <a:r>
-              <a:t>Steps (put on the board):</a:t>
-            </a:r>
-          </a:p>
-          <a:p>
-            <a:r>
-              <a:t>1. List each reliability choice from your Section-1 practice design.</a:t>
-            </a:r>
-          </a:p>
-          <a:p>
-            <a:r>
-              <a:t>2. Against each, name the design principle that justifies it (design for failure, loose coupling,</a:t>
-            </a:r>
-          </a:p>
-          <a:p>
-            <a:r>
-              <a:t>right-sizing, automation…).</a:t>
-            </a:r>
-          </a:p>
-          <a:p>
-            <a:r>
-              <a:t>3. Describe the migration approach — incremental, keep-serving, roll-back — that reaches the target.</a:t>
-            </a:r>
-          </a:p>
-          <a:p>
-            <a:r>
-              <a:t>Must produce: a short KE-appendix passage linking each choice to a principle plus a migration approach.</a:t>
-            </a:r>
-          </a:p>
-          <a:p>
-            <a:r>
-              <a:t>Timing: ~20 min then discuss. Where they get stuck: they restate the choice instead of naming the</a:t>
-            </a:r>
-          </a:p>
-          <a:p>
-            <a:r>
-              <a:t>PRINCIPLE behind it — circulate and ask "which principle makes that the right move?"</a:t>
-            </a:r>
-          </a:p>
-          <a:p>
-            <a:r>
-              <a:t>Share-back prompt: take one choice and ask the room which principle best justifies it.</a:t>
-            </a:r>
-          </a:p>
-          <a:p>
-            <a:r>
-              <a:t>No-leakage note: the website is the practice vehicle; the AT1 KE appendix is written for Ledgerline —</a:t>
-            </a:r>
-          </a:p>
-          <a:p>
-            <a:r>
-              <a:t>comparable, not identical.</a:t>
-            </a:r>
-          </a:p>
-        </p:txBody>
-      </p:sp>
-      <p:sp>
-        <p:nvSpPr>
-          <p:cNvPr id="4" name="Slide Number Placeholder 3"/>
-          <p:cNvSpPr>
-            <a:spLocks noGrp="1"/>
-          </p:cNvSpPr>
-          <p:nvPr>
-            <p:ph type="sldNum" idx="5" sz="quarter"/>
-          </p:nvPr>
-        </p:nvSpPr>
-        <p:spPr/>
-      </p:sp>
-    </p:spTree>
-  </p:cSld>
-  <p:clrMapOvr>
-    <a:masterClrMapping/>
-  </p:clrMapOvr>
-</p:notes>
-</file>
-
-<file path=ppt/notesSlides/notesSlide11.xml><?xml version="1.0" encoding="utf-8"?>
-<p:notes xmlns:a="http://schemas.openxmlformats.org/drawingml/2006/main" xmlns:p="http://schemas.openxmlformats.org/presentationml/2006/main" xmlns:r="http://schemas.openxmlformats.org/officeDocument/2006/relationships">
-  <p:cSld>
-    <p:spTree>
-      <p:nvGrpSpPr>
-        <p:cNvPr id="1" name=""/>
-        <p:cNvGrpSpPr/>
-        <p:nvPr/>
-      </p:nvGrpSpPr>
-      <p:grpSpPr>
-        <a:xfrm>
-          <a:off x="0" y="0"/>
-          <a:ext cx="0" cy="0"/>
-          <a:chOff x="0" y="0"/>
-          <a:chExt cx="0" cy="0"/>
-        </a:xfrm>
-      </p:grpSpPr>
-      <p:sp>
-        <p:nvSpPr>
-          <p:cNvPr id="2" name="Slide Image Placeholder 1"/>
-          <p:cNvSpPr>
-            <a:spLocks noGrp="1"/>
-          </p:cNvSpPr>
-          <p:nvPr>
-            <p:ph type="sldImg" idx="2"/>
-          </p:nvPr>
-        </p:nvSpPr>
-        <p:spPr/>
-      </p:sp>
-      <p:sp>
-        <p:nvSpPr>
-          <p:cNvPr id="3" name="Notes Placeholder 2"/>
-          <p:cNvSpPr>
-            <a:spLocks noGrp="1"/>
-          </p:cNvSpPr>
-          <p:nvPr>
-            <p:ph type="body" idx="3" sz="quarter"/>
-          </p:nvPr>
-        </p:nvSpPr>
-        <p:spPr/>
-        <p:txBody>
-          <a:bodyPr/>
-          <a:lstStyle/>
-          <a:p>
-            <a:r>
-              <a:t>Section 3 — the security layers that keep the improved design secure. Short section; the message is that</a:t>
-            </a:r>
-          </a:p>
-          <a:p>
-            <a:r>
-              <a:t>reliability changes must INHERIT security, never bypass it.</a:t>
-            </a:r>
-          </a:p>
-          <a:p>
-            <a:r>
-              <a:t>• First bullet: the tools/uses of security layers (KE 8) — network isolation, security groups, IAM</a:t>
-            </a:r>
-          </a:p>
-          <a:p>
-            <a:r>
-              <a:t>least-privilege, and encryption as the baseline. Name the layers.</a:t>
-            </a:r>
-          </a:p>
-          <a:p>
-            <a:r>
-              <a:t>• Second bullet: encryption is assumed ON by default — at rest and in transit — INCLUDING the</a:t>
-            </a:r>
-          </a:p>
-          <a:p>
-            <a:r>
-              <a:t>cross-Region DR copy and the residency data. Nothing regulated travels or rests unencrypted.</a:t>
-            </a:r>
-          </a:p>
-          <a:p>
-            <a:r>
-              <a:t>• Third bullet: reliability changes must not weaken security — each new tier (Multi-AZ app, DR copy)</a:t>
-            </a:r>
-          </a:p>
-          <a:p>
-            <a:r>
-              <a:t>inherits the security layers, not bypasses them.</a:t>
-            </a:r>
-          </a:p>
-          <a:p>
-            <a:r>
-              <a:t>Misconception to pre-empt: "the DR copy is just a backup, so it's lower-security." No — a DR copy of</a:t>
-            </a:r>
-          </a:p>
-          <a:p>
-            <a:r>
-              <a:t>regulated financial data carries the SAME encryption and access controls as the primary; a weaker copy</a:t>
-            </a:r>
-          </a:p>
-          <a:p>
-            <a:r>
-              <a:t>is the breach.</a:t>
-            </a:r>
-          </a:p>
-          <a:p>
-            <a:r>
-              <a:t>Question to pose: "You add a cross-Region DR copy — what security must travel with it?" (encryption in</a:t>
-            </a:r>
-          </a:p>
-          <a:p>
-            <a:r>
-              <a:t>transit + at rest, IAM controls — the DR copy inherits the primary's security layers).</a:t>
-            </a:r>
-          </a:p>
-          <a:p>
-            <a:r>
-              <a:t>UoC/AT1 tie: ICTCLD504 KE 8 (tools &amp; uses of security layers in cloud services) → AT1 Solution Design KE</a:t>
-            </a:r>
-          </a:p>
-          <a:p>
-            <a:r>
-              <a:t>appendix; security is optimised jointly with reliability (PC 2.3).</a:t>
+              <a:t>Activity = assessment Q2 rehearsed. The practice workbook carries no questions — use the assessment's.</a:t>
+            </a:r>
+          </a:p>
+          <a:p>
+            <a:r>
+              <a:t>Check both halves are present: the contrast, and the provisioning explanation.</a:t>
             </a:r>
           </a:p>
         </p:txBody>
@@ -939,72 +669,17 @@
           <a:lstStyle/>
           <a:p>
             <a:r>
-              <a:t>Open Section 1 with the vendor-neutral definition of reliability and its building blocks — the frame</a:t>
-            </a:r>
-          </a:p>
-          <a:p>
-            <a:r>
-              <a:t>before the Ledgerline-specific design.</a:t>
-            </a:r>
-          </a:p>
-          <a:p>
-            <a:r>
-              <a:t>• First bullet: reliability = the system keeps serving through component and zone failures, AND recovers</a:t>
-            </a:r>
-          </a:p>
-          <a:p>
-            <a:r>
-              <a:t>from loss. Two halves — continuity and recovery.</a:t>
-            </a:r>
-          </a:p>
-          <a:p>
-            <a:r>
-              <a:t>• Second bullet: the three building blocks — redundancy across AZs (Multi-AZ), backup/restore, and</a:t>
-            </a:r>
-          </a:p>
-          <a:p>
-            <a:r>
-              <a:t>cross-Region DR. Map each to which half it serves.</a:t>
-            </a:r>
-          </a:p>
-          <a:p>
-            <a:r>
-              <a:t>• Third bullet: reliability is designed JOINTLY with security, scalability and cost — each choice is a</a:t>
-            </a:r>
-          </a:p>
-          <a:p>
-            <a:r>
-              <a:t>trade-off, not a maximum. This is the anti-gold-plating rule again.</a:t>
-            </a:r>
-          </a:p>
-          <a:p>
-            <a:r>
-              <a:t>Misconception to pre-empt: "backup and DR are the same thing." No — backup/restore recovers data in</a:t>
-            </a:r>
-          </a:p>
-          <a:p>
-            <a:r>
-              <a:t>place; cross-Region DR survives losing a whole Region. Different failures, different tools.</a:t>
-            </a:r>
-          </a:p>
-          <a:p>
-            <a:r>
-              <a:t>Question to pose: "Which building block protects against an AZ failure, and which against losing the</a:t>
-            </a:r>
-          </a:p>
-          <a:p>
-            <a:r>
-              <a:t>whole Region?" (Multi-AZ vs cross-Region DR — separates the two).</a:t>
-            </a:r>
-          </a:p>
-          <a:p>
-            <a:r>
-              <a:t>UoC/AT1 tie: ICTCLD504 KE 9 (features/techniques to improve reliability) → AT1 Solution Design</a:t>
-            </a:r>
-          </a:p>
-          <a:p>
-            <a:r>
-              <a:t>reliability design + KE appendix.</a:t>
+              <a:t>Workbook task 8. The goals came from Topic 1; today each one gets its number.</a:t>
+            </a:r>
+          </a:p>
+          <a:p>
+            <a:r>
+              <a:t>"Be reliable" is the goal restated — push to availability percentages, recovery-time targets, response times, cost per period.</a:t>
+            </a:r>
+          </a:p>
+          <a:p>
+            <a:r>
+              <a:t>These exact metrics are what AT3's monitoring and testing measure against — say so; it motivates the care.</a:t>
             </a:r>
           </a:p>
         </p:txBody>
@@ -1074,77 +749,12 @@
           <a:lstStyle/>
           <a:p>
             <a:r>
-              <a:t>Set the concrete reliability TARGET off the diagram — where the design adds redundancy, and the one</a:t>
-            </a:r>
-          </a:p>
-          <a:p>
-            <a:r>
-              <a:t>place it deliberately does NOT. This tees up the centrepiece on the next slide.</a:t>
-            </a:r>
-          </a:p>
-          <a:p>
-            <a:r>
-              <a:t>• First bullet: review the single-AZ baseline against the reliability goals; name where a single</a:t>
-            </a:r>
-          </a:p>
-          <a:p>
-            <a:r>
-              <a:t>failure takes the system down (from Topic 1's analysis).</a:t>
-            </a:r>
-          </a:p>
-          <a:p>
-            <a:r>
-              <a:t>• Second bullet: the target — app tier goes Multi-AZ behind a load balancer; the database gets automated</a:t>
-            </a:r>
-          </a:p>
-          <a:p>
-            <a:r>
-              <a:t>backup/restore; a cross-Region DR copy goes to Melbourne (Australian data stays onshore). Point to each</a:t>
-            </a:r>
-          </a:p>
-          <a:p>
-            <a:r>
-              <a:t>on the diagram.</a:t>
-            </a:r>
-          </a:p>
-          <a:p>
-            <a:r>
-              <a:t>• Third bullet: flag it now — the database is deliberately NOT Multi-AZ; the next slide argues why.</a:t>
-            </a:r>
-          </a:p>
-          <a:p>
-            <a:r>
-              <a:t>Leave the tension unresolved for one slide on purpose.</a:t>
-            </a:r>
-          </a:p>
-          <a:p>
-            <a:r>
-              <a:t>Misconception to pre-empt: "the whole system goes Multi-AZ." No — only the APP tier does; the DB is</a:t>
-            </a:r>
-          </a:p>
-          <a:p>
-            <a:r>
-              <a:t>handled by backup/restore + DR. Redundancy is applied tier by tier, to the goal.</a:t>
-            </a:r>
-          </a:p>
-          <a:p>
-            <a:r>
-              <a:t>Question to pose: "The app tier goes Multi-AZ but the database doesn't — what could possibly justify</a:t>
-            </a:r>
-          </a:p>
-          <a:p>
-            <a:r>
-              <a:t>treating them differently?" (sets up the cost-benefit centrepiece).</a:t>
-            </a:r>
-          </a:p>
-          <a:p>
-            <a:r>
-              <a:t>UoC/AT1 tie: ICTCLD504 PC 2.3 (review &amp; improve architecture for reliability) + PE 1 → AT1 Solution</a:t>
-            </a:r>
-          </a:p>
-          <a:p>
-            <a:r>
-              <a:t>Design reliability design.</a:t>
+              <a:t>Activity = practice workbook task 8.</a:t>
+            </a:r>
+          </a:p>
+          <a:p>
+            <a:r>
+              <a:t>The sanity check: could a later test pass or fail against each metric? If not, tighten it.</a:t>
             </a:r>
           </a:p>
         </p:txBody>
@@ -1214,87 +824,7 @@
           <a:lstStyle/>
           <a:p>
             <a:r>
-              <a:t>THE centrepiece of the whole cluster — teach the cost-benefit REJECTION of a Multi-AZ database. Slow</a:t>
-            </a:r>
-          </a:p>
-          <a:p>
-            <a:r>
-              <a:t>down here; this is the single most assessed piece of reasoning in AT1.</a:t>
-            </a:r>
-          </a:p>
-          <a:p>
-            <a:r>
-              <a:t>• First bullet: Ledgerline is a legacy accounting app, vendor-certified single-instance only — a</a:t>
-            </a:r>
-          </a:p>
-          <a:p>
-            <a:r>
-              <a:t>Multi-AZ (failover) database is simply not available for it.</a:t>
-            </a:r>
-          </a:p>
-          <a:p>
-            <a:r>
-              <a:t>• Second bullet: the only route to DB failover is to REPLACE the accounting product — new licence, data</a:t>
-            </a:r>
-          </a:p>
-          <a:p>
-            <a:r>
-              <a:t>migration, change management, migration risk. Spell out the true cost.</a:t>
-            </a:r>
-          </a:p>
-          <a:p>
-            <a:r>
-              <a:t>• Third bullet (the call): that cost is disproportionate to the reliability gained, so the design REJECTS</a:t>
-            </a:r>
-          </a:p>
-          <a:p>
-            <a:r>
-              <a:t>a Multi-AZ database and leaves the DB single-AZ with backup/restore + cross-Region DR. This is the heart</a:t>
-            </a:r>
-          </a:p>
-          <a:p>
-            <a:r>
-              <a:t>of the Topic.</a:t>
-            </a:r>
-          </a:p>
-          <a:p>
-            <a:r>
-              <a:t>• Fourth bullet: warn against the reflex — "reliable database = Multi-AZ database" is wrong HERE; justify</a:t>
-            </a:r>
-          </a:p>
-          <a:p>
-            <a:r>
-              <a:t>against the goal and the cost, not a checklist.</a:t>
-            </a:r>
-          </a:p>
-          <a:p>
-            <a:r>
-              <a:t>Misconception to pre-empt: exactly that reflex — students pattern-match "reliability → Multi-AZ" and lose</a:t>
-            </a:r>
-          </a:p>
-          <a:p>
-            <a:r>
-              <a:t>the marks. The assessed skill is arguing the trade-off, not naming the feature.</a:t>
-            </a:r>
-          </a:p>
-          <a:p>
-            <a:r>
-              <a:t>Question to pose: "You could get DB failover by replacing the product — why is that the WRONG call here?"</a:t>
-            </a:r>
-          </a:p>
-          <a:p>
-            <a:r>
-              <a:t>(cost + risk disproportionate to the reliability the goal actually needs).</a:t>
-            </a:r>
-          </a:p>
-          <a:p>
-            <a:r>
-              <a:t>UoC/AT1 tie: ICTCLD504 PC 2.3 + PE 1; this is the AT1 cost-benefit centrepiece — the Solution Design</a:t>
-            </a:r>
-          </a:p>
-          <a:p>
-            <a:r>
-              <a:t>must ARGUE it, not just state it.</a:t>
+              <a:t>The definition that governs the Topic. Both directions of elasticity matter — releasing capacity is where the saving lives.</a:t>
             </a:r>
           </a:p>
         </p:txBody>
@@ -1364,82 +894,7 @@
           <a:lstStyle/>
           <a:p>
             <a:r>
-              <a:t>The techniques slide — name the concrete cloud-service features the reliability design leans on, and</a:t>
-            </a:r>
-          </a:p>
-          <a:p>
-            <a:r>
-              <a:t>introduce the parameterised template that carries the design to AT3.</a:t>
-            </a:r>
-          </a:p>
-          <a:p>
-            <a:r>
-              <a:t>• First bullet: the techniques (KE 9) — Multi-AZ deployment, load-balancer health checks, automated</a:t>
-            </a:r>
-          </a:p>
-          <a:p>
-            <a:r>
-              <a:t>database backups/snapshots, and cross-Region snapshot/DR copy. Tie each to the target from two slides</a:t>
-            </a:r>
-          </a:p>
-          <a:p>
-            <a:r>
-              <a:t>back.</a:t>
-            </a:r>
-          </a:p>
-          <a:p>
-            <a:r>
-              <a:t>• Second bullet: express the design as a PARAMETERISED CloudFormation template — Region and environment</a:t>
-            </a:r>
-          </a:p>
-          <a:p>
-            <a:r>
-              <a:t>as parameters — so the same design deploys repeatably, and to Melbourne for DR. One template, many</a:t>
-            </a:r>
-          </a:p>
-          <a:p>
-            <a:r>
-              <a:t>deploys.</a:t>
-            </a:r>
-          </a:p>
-          <a:p>
-            <a:r>
-              <a:t>• Third bullet: choose the feature that meets the goal at LEAST cost; each choice cites the goal it</a:t>
-            </a:r>
-          </a:p>
-          <a:p>
-            <a:r>
-              <a:t>serves. Traceability from feature back to goal.</a:t>
-            </a:r>
-          </a:p>
-          <a:p>
-            <a:r>
-              <a:t>Misconception to pre-empt: "parameterised = more complex." No — parameters are what stop you writing the</a:t>
-            </a:r>
-          </a:p>
-          <a:p>
-            <a:r>
-              <a:t>design twice for two Regions; the DR copy IS the same template with a different Region parameter.</a:t>
-            </a:r>
-          </a:p>
-          <a:p>
-            <a:r>
-              <a:t>Question to pose: "Why parameterise Region instead of hard-coding Sydney?" (the Melbourne DR copy is the</a:t>
-            </a:r>
-          </a:p>
-          <a:p>
-            <a:r>
-              <a:t>same template, Region-swapped — repeatable, not rewritten).</a:t>
-            </a:r>
-          </a:p>
-          <a:p>
-            <a:r>
-              <a:t>UoC/AT1 tie: ICTCLD504 KE 9 (features/techniques to improve reliability) → AT1 Solution Design + KE</a:t>
-            </a:r>
-          </a:p>
-          <a:p>
-            <a:r>
-              <a:t>appendix; the parameterised template is the seam to the AT3 build.</a:t>
+              <a:t>The frame the whole design (and the AT2 work-split) is organised by. Not all four tiers scale the same way — that distinction is the teaching.</a:t>
             </a:r>
           </a:p>
         </p:txBody>
@@ -1509,72 +964,7 @@
           <a:lstStyle/>
           <a:p>
             <a:r>
-              <a:t>Teach residency as an INPUT CONSTRAINT on the reliability/DR design — a scoped slice, not a second</a:t>
-            </a:r>
-          </a:p>
-          <a:p>
-            <a:r>
-              <a:t>architecture. Keep it light; it's one constraint, not a whole new system.</a:t>
-            </a:r>
-          </a:p>
-          <a:p>
-            <a:r>
-              <a:t>• First bullet: the constraint — CERT-In-mandated logs and Companies-Act books-of-account must reside in</a:t>
-            </a:r>
-          </a:p>
-          <a:p>
-            <a:r>
-              <a:t>Mumbai (ap-south-1); the main system stays in Sydney.</a:t>
-            </a:r>
-          </a:p>
-          <a:p>
-            <a:r>
-              <a:t>• Second bullet: the design keeps the regulated data IN-Region — residency is an input constraint the</a:t>
-            </a:r>
-          </a:p>
-          <a:p>
-            <a:r>
-              <a:t>design is shaped around, not a bolt-on added at the end.</a:t>
-            </a:r>
-          </a:p>
-          <a:p>
-            <a:r>
-              <a:t>• Third bullet: frame it as a scoped slice of the reliability/DR design (where the regulated data lives,</a:t>
-            </a:r>
-          </a:p>
-          <a:p>
-            <a:r>
-              <a:t>and its DR), not a second architecture to design in full.</a:t>
-            </a:r>
-          </a:p>
-          <a:p>
-            <a:r>
-              <a:t>Misconception to pre-empt: "residency means build a whole separate Indian system." No — it constrains</a:t>
-            </a:r>
-          </a:p>
-          <a:p>
-            <a:r>
-              <a:t>WHERE specific regulated data (logs, books-of-account) sits; the rest of the design is unchanged.</a:t>
-            </a:r>
-          </a:p>
-          <a:p>
-            <a:r>
-              <a:t>Question to pose: "Which data must stay in Mumbai, and which stays in Sydney — and how does that change</a:t>
-            </a:r>
-          </a:p>
-          <a:p>
-            <a:r>
-              <a:t>the DR design?" (only the regulated slice is pinned to ap-south-1).</a:t>
-            </a:r>
-          </a:p>
-          <a:p>
-            <a:r>
-              <a:t>UoC/AT1 tie: reinforces ICTCLD504 PC 2.3 (improve architecture jointly for security/reliability) — the</a:t>
-            </a:r>
-          </a:p>
-          <a:p>
-            <a:r>
-              <a:t>residency constraint is part of the reliability/DR design in the AT1 Solution Design.</a:t>
+              <a:t>The how-to per tier. The database consistency constraint matters — it's an accounting system; you scale reads, you don't shard the ledger.</a:t>
             </a:r>
           </a:p>
         </p:txBody>
@@ -1644,112 +1034,7 @@
           <a:lstStyle/>
           <a:p>
             <a:r>
-              <a:t>Facilitation — the Section 1 practice; students design the reliability improvements for the practice</a:t>
-            </a:r>
-          </a:p>
-          <a:p>
-            <a:r>
-              <a:t>vehicle, arguing one cost-benefit trade-off explicitly. The key teaching move: same REASONING, possibly</a:t>
-            </a:r>
-          </a:p>
-          <a:p>
-            <a:r>
-              <a:t>the OPPOSITE call to Ledgerline.</a:t>
-            </a:r>
-          </a:p>
-          <a:p>
-            <a:r>
-              <a:t>Tell students: "For the practice vehicle — the website — design the reliability improvements to your</a:t>
-            </a:r>
-          </a:p>
-          <a:p>
-            <a:r>
-              <a:t>Topic-1 goals across the app, data and DR tiers. You decide what each tier needs — to the goals and no</a:t>
-            </a:r>
-          </a:p>
-          <a:p>
-            <a:r>
-              <a:t>further — and you argue at least one cost-benefit trade-off out loud."</a:t>
-            </a:r>
-          </a:p>
-          <a:p>
-            <a:r>
-              <a:t>Steps (put on the board):</a:t>
-            </a:r>
-          </a:p>
-          <a:p>
-            <a:r>
-              <a:t>1. Design the app tier, the data tier and DR to your Topic-1 reliability goals.</a:t>
-            </a:r>
-          </a:p>
-          <a:p>
-            <a:r>
-              <a:t>2. Pick ONE trade-off and argue it explicitly — cost vs the reliability it buys.</a:t>
-            </a:r>
-          </a:p>
-          <a:p>
-            <a:r>
-              <a:t>3. Show how each change meets a NAMED goal.</a:t>
-            </a:r>
-          </a:p>
-          <a:p>
-            <a:r>
-              <a:t>Must produce: a reliability design across the three tiers with one written cost-benefit argument, each</a:t>
-            </a:r>
-          </a:p>
-          <a:p>
-            <a:r>
-              <a:t>change tied to a goal.</a:t>
-            </a:r>
-          </a:p>
-          <a:p>
-            <a:r>
-              <a:t>Timing: ~30 min then discuss. Key point to surface: the website runs MySQL with NO legacy</a:t>
-            </a:r>
-          </a:p>
-          <a:p>
-            <a:r>
-              <a:t>single-instance constraint, so the data-tier call (e.g. whether to go Multi-AZ) is theirs to justify —</a:t>
-            </a:r>
-          </a:p>
-          <a:p>
-            <a:r>
-              <a:t>potentially the OPPOSITE decision to Ledgerline's, reached by the SAME cost-benefit reasoning. That's</a:t>
-            </a:r>
-          </a:p>
-          <a:p>
-            <a:r>
-              <a:t>the learning, not a mistake.</a:t>
-            </a:r>
-          </a:p>
-          <a:p>
-            <a:r>
-              <a:t>Where they get stuck: they copy Ledgerline's "reject Multi-AZ DB" verdict — remind them the constraint</a:t>
-            </a:r>
-          </a:p>
-          <a:p>
-            <a:r>
-              <a:t>is different here, so re-run the reasoning, don't copy the answer.</a:t>
-            </a:r>
-          </a:p>
-          <a:p>
-            <a:r>
-              <a:t>Share-back prompt: ask two students their data-tier call and WHY — expect different verdicts, same</a:t>
-            </a:r>
-          </a:p>
-          <a:p>
-            <a:r>
-              <a:t>reasoning shape.</a:t>
-            </a:r>
-          </a:p>
-          <a:p>
-            <a:r>
-              <a:t>No-leakage note: the website is the practice vehicle; AT1 assesses the reliability design on Ledgerline</a:t>
-            </a:r>
-          </a:p>
-          <a:p>
-            <a:r>
-              <a:t>— comparable, not identical, and the DB constraint differs by design.</a:t>
+              <a:t>The discipline that turns selections into a defensible design. "To be safe" is not a justification.</a:t>
             </a:r>
           </a:p>
         </p:txBody>
@@ -1819,77 +1104,12 @@
           <a:lstStyle/>
           <a:p>
             <a:r>
-              <a:t>Open Section 2 — the design PRINCIPLES that justify the reliability choices already made. Teach them as</a:t>
-            </a:r>
-          </a:p>
-          <a:p>
-            <a:r>
-              <a:t>the "why" behind Multi-AZ and health checks, not as new features.</a:t>
-            </a:r>
-          </a:p>
-          <a:p>
-            <a:r>
-              <a:t>• First bullet: the principles (KE 4) — design for failure, loose coupling, statelessness, right-sizing,</a:t>
-            </a:r>
-          </a:p>
-          <a:p>
-            <a:r>
-              <a:t>and automation over manual steps. Give a one-line example of each.</a:t>
-            </a:r>
-          </a:p>
-          <a:p>
-            <a:r>
-              <a:t>• Second bullet: improve the architecture TO these principles — they are why Multi-AZ and health checks</a:t>
-            </a:r>
-          </a:p>
-          <a:p>
-            <a:r>
-              <a:t>belong in the design. Principles explain the choices.</a:t>
-            </a:r>
-          </a:p>
-          <a:p>
-            <a:r>
-              <a:t>• Third bullet: the simplest design that meets the goal wins; principles justify choices, they don't</a:t>
-            </a:r>
-          </a:p>
-          <a:p>
-            <a:r>
-              <a:t>mandate maximums. Same anti-gold-plating rule.</a:t>
-            </a:r>
-          </a:p>
-          <a:p>
-            <a:r>
-              <a:t>Misconception to pre-empt: "'design for failure' means add every redundancy." No — it means assume</a:t>
-            </a:r>
-          </a:p>
-          <a:p>
-            <a:r>
-              <a:t>components WILL fail and design so the system copes at the level the goal needs; it's a mindset, not a</a:t>
-            </a:r>
-          </a:p>
-          <a:p>
-            <a:r>
-              <a:t>maximum.</a:t>
-            </a:r>
-          </a:p>
-          <a:p>
-            <a:r>
-              <a:t>Question to pose: "'Design for failure' — how does it justify the Multi-AZ app tier but NOT a Multi-AZ</a:t>
-            </a:r>
-          </a:p>
-          <a:p>
-            <a:r>
-              <a:t>database here?" (cope with AZ failure at the app tier; the DB copes via backup/restore + DR at</a:t>
-            </a:r>
-          </a:p>
-          <a:p>
-            <a:r>
-              <a:t>acceptable cost).</a:t>
-            </a:r>
-          </a:p>
-          <a:p>
-            <a:r>
-              <a:t>UoC/AT1 tie: ICTCLD504 KE 4 (design principles for cloud applications) → AT1 Solution Design KE appendix.</a:t>
+              <a:t>Activity = practice workbook task 9 — the biggest design task in AT1.</a:t>
+            </a:r>
+          </a:p>
+          <a:p>
+            <a:r>
+              <a:t>Watch for over-provisioning, and for network/database marked elastic when they support scale rather than scale themselves.</a:t>
             </a:r>
           </a:p>
         </p:txBody>
@@ -1959,67 +1179,12 @@
           <a:lstStyle/>
           <a:p>
             <a:r>
-              <a:t>Teach the MIGRATION principles — how you move the single-AZ baseline to the improved target without a</a:t>
-            </a:r>
-          </a:p>
-          <a:p>
-            <a:r>
-              <a:t>big-bang cutover. Design-level here; the actual migration is AT3.</a:t>
-            </a:r>
-          </a:p>
-          <a:p>
-            <a:r>
-              <a:t>• First bullet: the migration principles (KE 5) — move incrementally, keep the system serving, evidence</a:t>
-            </a:r>
-          </a:p>
-          <a:p>
-            <a:r>
-              <a:t>each step, and be able to ROLL BACK. Say each as a rule.</a:t>
-            </a:r>
-          </a:p>
-          <a:p>
-            <a:r>
-              <a:t>• Second bullet: sequence the improvement so single-AZ becomes Multi-AZ + DR without a big-bang cutover.</a:t>
-            </a:r>
-          </a:p>
-          <a:p>
-            <a:r>
-              <a:t>It's a path, not a switch.</a:t>
-            </a:r>
-          </a:p>
-          <a:p>
-            <a:r>
-              <a:t>• Third bullet: this is design-level HERE — the actual migration/build is AT3. Hold the depth ceiling.</a:t>
-            </a:r>
-          </a:p>
-          <a:p>
-            <a:r>
-              <a:t>Misconception to pre-empt: "migration = turn off the old, turn on the new." No — you move incrementally</a:t>
-            </a:r>
-          </a:p>
-          <a:p>
-            <a:r>
-              <a:t>and keep serving; the ability to roll back is a design requirement, not an afterthought.</a:t>
-            </a:r>
-          </a:p>
-          <a:p>
-            <a:r>
-              <a:t>Question to pose: "Why sequence the migration instead of cutting over in one weekend?" (keep serving,</a:t>
-            </a:r>
-          </a:p>
-          <a:p>
-            <a:r>
-              <a:t>evidence each step, roll back if a step fails — lower risk to a live accounting system).</a:t>
-            </a:r>
-          </a:p>
-          <a:p>
-            <a:r>
-              <a:t>UoC/AT1 tie: ICTCLD504 KE 5 (migrating principles for cloud applications) → AT1 Solution Design KE</a:t>
-            </a:r>
-          </a:p>
-          <a:p>
-            <a:r>
-              <a:t>appendix.</a:t>
+              <a:t>Contextual knowledge for the assessment's Q2 — the contrast is the answer: static content suits object storage; a transactional ledger does not.</a:t>
+            </a:r>
+          </a:p>
+          <a:p>
+            <a:r>
+              <a:t>Be ready to explain provisioning object storage for a static-site workload — that's the examinable half.</a:t>
             </a:r>
           </a:p>
         </p:txBody>
@@ -5122,7 +4287,7 @@
                 </a:solidFill>
                 <a:latin typeface="Roboto"/>
               </a:rPr>
-              <a:t>Designing for reliability</a:t>
+              <a:t>Metrics, and the four-component design</a:t>
             </a:r>
           </a:p>
           <a:p>
@@ -5138,7 +4303,7 @@
                 </a:solidFill>
                 <a:latin typeface="Roboto Light"/>
               </a:rPr>
-              <a:t>Design the reliability improvements to the goals — and know when NOT to build them</a:t>
+              <a:t>Confirm the metrics the improvement is measured by, then design the four resource tiers</a:t>
             </a:r>
           </a:p>
         </p:txBody>
@@ -5214,20 +4379,54 @@
       <p:grpSpPr/>
       <p:sp>
         <p:nvSpPr>
-          <p:cNvPr id="2" name="Rectangle 1"/>
+          <p:cNvPr id="2" name="TextBox 1"/>
+          <p:cNvSpPr txBox="1"/>
+          <p:nvPr/>
+        </p:nvSpPr>
+        <p:spPr>
+          <a:xfrm>
+            <a:off x="640080" y="457200"/>
+            <a:ext cx="10881360" cy="960120"/>
+          </a:xfrm>
+          <a:prstGeom prst="rect">
+            <a:avLst/>
+          </a:prstGeom>
+          <a:noFill/>
+        </p:spPr>
+        <p:txBody>
+          <a:bodyPr wrap="square" anchor="t" lIns="0" rIns="0" tIns="0" bIns="0">
+            <a:spAutoFit/>
+          </a:bodyPr>
+          <a:lstStyle/>
+          <a:p>
+            <a:r>
+              <a:rPr sz="2800" b="1" i="0">
+                <a:solidFill>
+                  <a:srgbClr val="2A2929"/>
+                </a:solidFill>
+                <a:latin typeface="Roboto"/>
+              </a:rPr>
+              <a:t>Selecting and improving each tier</a:t>
+            </a:r>
+          </a:p>
+        </p:txBody>
+      </p:sp>
+      <p:sp>
+        <p:nvSpPr>
+          <p:cNvPr id="3" name="Rectangle 2"/>
           <p:cNvSpPr/>
           <p:nvPr/>
         </p:nvSpPr>
         <p:spPr>
           <a:xfrm>
-            <a:off x="0" y="0"/>
-            <a:ext cx="12191695" cy="1234440"/>
+            <a:off x="658368" y="1371600"/>
+            <a:ext cx="1463040" cy="50800"/>
           </a:xfrm>
           <a:prstGeom prst="rect">
             <a:avLst/>
           </a:prstGeom>
           <a:solidFill>
-            <a:srgbClr val="92268F"/>
+            <a:srgbClr val="27B5CE"/>
           </a:solidFill>
           <a:ln>
             <a:noFill/>
@@ -5258,67 +4457,14 @@
       </p:sp>
       <p:sp>
         <p:nvSpPr>
-          <p:cNvPr id="3" name="Rounded Rectangle 2"/>
-          <p:cNvSpPr/>
-          <p:nvPr/>
-        </p:nvSpPr>
-        <p:spPr>
-          <a:xfrm>
-            <a:off x="640080" y="384048"/>
-            <a:ext cx="1691640" cy="457200"/>
-          </a:xfrm>
-          <a:prstGeom prst="roundRect">
-            <a:avLst/>
-          </a:prstGeom>
-          <a:solidFill>
-            <a:srgbClr val="2A2929"/>
-          </a:solidFill>
-          <a:ln>
-            <a:noFill/>
-          </a:ln>
-          <a:effectLst/>
-        </p:spPr>
-        <p:style>
-          <a:lnRef idx="1">
-            <a:schemeClr val="accent1"/>
-          </a:lnRef>
-          <a:fillRef idx="3">
-            <a:schemeClr val="accent1"/>
-          </a:fillRef>
-          <a:effectRef idx="2">
-            <a:schemeClr val="accent1"/>
-          </a:effectRef>
-          <a:fontRef idx="minor">
-            <a:schemeClr val="lt1"/>
-          </a:fontRef>
-        </p:style>
-        <p:txBody>
-          <a:bodyPr rtlCol="0" anchor="ctr"/>
-          <a:lstStyle/>
-          <a:p>
-            <a:pPr algn="ctr"/>
-            <a:r>
-              <a:rPr sz="1400" b="1" i="0">
-                <a:solidFill>
-                  <a:srgbClr val="FBB900"/>
-                </a:solidFill>
-                <a:latin typeface="Roboto"/>
-              </a:rPr>
-              <a:t>ACTIVITY</a:t>
-            </a:r>
-          </a:p>
-        </p:txBody>
-      </p:sp>
-      <p:sp>
-        <p:nvSpPr>
           <p:cNvPr id="4" name="TextBox 3"/>
           <p:cNvSpPr txBox="1"/>
           <p:nvPr/>
         </p:nvSpPr>
         <p:spPr>
           <a:xfrm>
-            <a:off x="2560320" y="310896"/>
-            <a:ext cx="8961120" cy="685800"/>
+            <a:off x="658368" y="1691640"/>
+            <a:ext cx="10881360" cy="4480560"/>
           </a:xfrm>
           <a:prstGeom prst="rect">
             <a:avLst/>
@@ -5327,40 +4473,6 @@
         </p:spPr>
         <p:txBody>
           <a:bodyPr wrap="square" anchor="ctr" lIns="0" rIns="0" tIns="0" bIns="0">
-            <a:spAutoFit/>
-          </a:bodyPr>
-          <a:lstStyle/>
-          <a:p>
-            <a:r>
-              <a:rPr sz="2600" b="1" i="0">
-                <a:solidFill>
-                  <a:srgbClr val="FFFFFF"/>
-                </a:solidFill>
-                <a:latin typeface="Roboto"/>
-              </a:rPr>
-              <a:t>Design the reliability improvements</a:t>
-            </a:r>
-          </a:p>
-        </p:txBody>
-      </p:sp>
-      <p:sp>
-        <p:nvSpPr>
-          <p:cNvPr id="5" name="TextBox 4"/>
-          <p:cNvSpPr txBox="1"/>
-          <p:nvPr/>
-        </p:nvSpPr>
-        <p:spPr>
-          <a:xfrm>
-            <a:off x="658368" y="1554480"/>
-            <a:ext cx="10881360" cy="4297680"/>
-          </a:xfrm>
-          <a:prstGeom prst="rect">
-            <a:avLst/>
-          </a:prstGeom>
-          <a:noFill/>
-        </p:spPr>
-        <p:txBody>
-          <a:bodyPr wrap="square" anchor="t" lIns="0" rIns="0" tIns="0" bIns="0">
             <a:spAutoFit/>
           </a:bodyPr>
           <a:lstStyle/>
@@ -5377,7 +4489,7 @@
               </a:spcAft>
             </a:pPr>
             <a:r>
-              <a:rPr sz="1700" b="1" i="0">
+              <a:rPr sz="2400" b="1" i="0">
                 <a:solidFill>
                   <a:srgbClr val="EDAB0C"/>
                 </a:solidFill>
@@ -5386,13 +4498,13 @@
               <a:t>■  </a:t>
             </a:r>
             <a:r>
-              <a:rPr sz="1700" b="0" i="0">
+              <a:rPr sz="2400" b="0" i="0">
                 <a:solidFill>
                   <a:srgbClr val="2A2929"/>
                 </a:solidFill>
                 <a:latin typeface="Roboto"/>
               </a:rPr>
-              <a:t>For the practice vehicle (the website), design the reliability improvements to the Topic-1 goals across the app, data and DR tiers — you decide what each tier needs, to the goals and no further.</a:t>
+              <a:t>Network: right-size the path and load-spreading so the tier below can scale out behind it.</a:t>
             </a:r>
           </a:p>
           <a:p>
@@ -5408,7 +4520,7 @@
               </a:spcAft>
             </a:pPr>
             <a:r>
-              <a:rPr sz="1700" b="1" i="0">
+              <a:rPr sz="2400" b="1" i="0">
                 <a:solidFill>
                   <a:srgbClr val="EDAB0C"/>
                 </a:solidFill>
@@ -5417,38 +4529,98 @@
               <a:t>■  </a:t>
             </a:r>
             <a:r>
-              <a:rPr sz="1700" b="0" i="0">
+              <a:rPr sz="2400" b="0" i="0">
                 <a:solidFill>
                   <a:srgbClr val="2A2929"/>
                 </a:solidFill>
                 <a:latin typeface="Roboto"/>
               </a:rPr>
-              <a:t>Argue ONE cost-benefit trade-off explicitly and show how each change meets a named goal. NB the website runs MySQL with no legacy single-instance constraint, so the data-tier call (e.g. whether to go Multi-AZ) is yours to justify — potentially the OPPOSITE call to Ledgerline's, reached by the same cost-benefit reasoning.</a:t>
-            </a:r>
-          </a:p>
-        </p:txBody>
-      </p:sp>
-      <p:sp>
-        <p:nvSpPr>
-          <p:cNvPr id="6" name="Rounded Rectangle 5"/>
+              <a:t>Compute: move from fixed capacity to a pool that grows and shrinks on demand.</a:t>
+            </a:r>
+          </a:p>
+          <a:p>
+            <a:pPr marL="0" indent="0">
+              <a:lnSpc>
+                <a:spcPct val="105000"/>
+              </a:lnSpc>
+              <a:spcBef>
+                <a:spcPts val="0"/>
+              </a:spcBef>
+              <a:spcAft>
+                <a:spcPts val="1000"/>
+              </a:spcAft>
+            </a:pPr>
+            <a:r>
+              <a:rPr sz="2400" b="1" i="0">
+                <a:solidFill>
+                  <a:srgbClr val="EDAB0C"/>
+                </a:solidFill>
+                <a:latin typeface="Roboto"/>
+              </a:rPr>
+              <a:t>■  </a:t>
+            </a:r>
+            <a:r>
+              <a:rPr sz="2400" b="0" i="0">
+                <a:solidFill>
+                  <a:srgbClr val="2A2929"/>
+                </a:solidFill>
+                <a:latin typeface="Roboto"/>
+              </a:rPr>
+              <a:t>Database: select a managed service that scales reads without a rebuild, keeping the accounting data consistent.</a:t>
+            </a:r>
+          </a:p>
+          <a:p>
+            <a:pPr marL="0" indent="0">
+              <a:lnSpc>
+                <a:spcPct val="105000"/>
+              </a:lnSpc>
+              <a:spcBef>
+                <a:spcPts val="0"/>
+              </a:spcBef>
+              <a:spcAft>
+                <a:spcPts val="1000"/>
+              </a:spcAft>
+            </a:pPr>
+            <a:r>
+              <a:rPr sz="2400" b="1" i="0">
+                <a:solidFill>
+                  <a:srgbClr val="EDAB0C"/>
+                </a:solidFill>
+                <a:latin typeface="Roboto"/>
+              </a:rPr>
+              <a:t>■  </a:t>
+            </a:r>
+            <a:r>
+              <a:rPr sz="2400" b="0" i="0">
+                <a:solidFill>
+                  <a:srgbClr val="2A2929"/>
+                </a:solidFill>
+                <a:latin typeface="Roboto"/>
+              </a:rPr>
+              <a:t>Storage: select storage that grows on demand rather than a fixed-size volume.</a:t>
+            </a:r>
+          </a:p>
+        </p:txBody>
+      </p:sp>
+      <p:sp>
+        <p:nvSpPr>
+          <p:cNvPr id="5" name="Rectangle 4"/>
           <p:cNvSpPr/>
           <p:nvPr/>
         </p:nvSpPr>
         <p:spPr>
           <a:xfrm>
-            <a:off x="640080" y="5897880"/>
-            <a:ext cx="4023360" cy="457200"/>
-          </a:xfrm>
-          <a:prstGeom prst="roundRect">
+            <a:off x="0" y="6565392"/>
+            <a:ext cx="12191695" cy="38100"/>
+          </a:xfrm>
+          <a:prstGeom prst="rect">
             <a:avLst/>
           </a:prstGeom>
           <a:solidFill>
-            <a:srgbClr val="F9F9F9"/>
+            <a:srgbClr val="27B5CE"/>
           </a:solidFill>
-          <a:ln w="12700">
-            <a:solidFill>
-              <a:srgbClr val="CCCCCC"/>
-            </a:solidFill>
+          <a:ln>
+            <a:noFill/>
           </a:ln>
           <a:effectLst/>
         </p:spPr>
@@ -5476,85 +4648,7 @@
       </p:sp>
       <p:sp>
         <p:nvSpPr>
-          <p:cNvPr id="7" name="TextBox 6"/>
-          <p:cNvSpPr txBox="1"/>
-          <p:nvPr/>
-        </p:nvSpPr>
-        <p:spPr>
-          <a:xfrm>
-            <a:off x="822960" y="5943600"/>
-            <a:ext cx="3657600" cy="365760"/>
-          </a:xfrm>
-          <a:prstGeom prst="rect">
-            <a:avLst/>
-          </a:prstGeom>
-          <a:noFill/>
-        </p:spPr>
-        <p:txBody>
-          <a:bodyPr wrap="square" anchor="ctr" lIns="0" rIns="0" tIns="0" bIns="0">
-            <a:spAutoFit/>
-          </a:bodyPr>
-          <a:lstStyle/>
-          <a:p>
-            <a:r>
-              <a:rPr sz="1500" b="1" i="0">
-                <a:solidFill>
-                  <a:srgbClr val="2A2929"/>
-                </a:solidFill>
-                <a:latin typeface="Roboto"/>
-              </a:rPr>
-              <a:t>⏱  ~30 min</a:t>
-            </a:r>
-          </a:p>
-        </p:txBody>
-      </p:sp>
-      <p:sp>
-        <p:nvSpPr>
-          <p:cNvPr id="8" name="Rectangle 7"/>
-          <p:cNvSpPr/>
-          <p:nvPr/>
-        </p:nvSpPr>
-        <p:spPr>
-          <a:xfrm>
-            <a:off x="0" y="6565392"/>
-            <a:ext cx="12191695" cy="38100"/>
-          </a:xfrm>
-          <a:prstGeom prst="rect">
-            <a:avLst/>
-          </a:prstGeom>
-          <a:solidFill>
-            <a:srgbClr val="92268F"/>
-          </a:solidFill>
-          <a:ln>
-            <a:noFill/>
-          </a:ln>
-          <a:effectLst/>
-        </p:spPr>
-        <p:style>
-          <a:lnRef idx="1">
-            <a:schemeClr val="accent1"/>
-          </a:lnRef>
-          <a:fillRef idx="3">
-            <a:schemeClr val="accent1"/>
-          </a:fillRef>
-          <a:effectRef idx="2">
-            <a:schemeClr val="accent1"/>
-          </a:effectRef>
-          <a:fontRef idx="minor">
-            <a:schemeClr val="lt1"/>
-          </a:fontRef>
-        </p:style>
-        <p:txBody>
-          <a:bodyPr rtlCol="0" anchor="ctr"/>
-          <a:lstStyle/>
-          <a:p>
-            <a:pPr algn="ctr"/>
-          </a:p>
-        </p:txBody>
-      </p:sp>
-      <p:sp>
-        <p:nvSpPr>
-          <p:cNvPr id="9" name="TextBox 8"/>
+          <p:cNvPr id="6" name="TextBox 5"/>
           <p:cNvSpPr txBox="1"/>
           <p:nvPr/>
         </p:nvSpPr>
@@ -5597,7 +4691,7 @@
       </p:sp>
       <p:sp>
         <p:nvSpPr>
-          <p:cNvPr id="10" name="TextBox 9"/>
+          <p:cNvPr id="7" name="TextBox 6"/>
           <p:cNvSpPr txBox="1"/>
           <p:nvPr/>
         </p:nvSpPr>
@@ -5625,7 +4719,7 @@
                 </a:solidFill>
                 <a:latin typeface="Roboto"/>
               </a:rPr>
-              <a:t>8</a:t>
+              <a:t>7</a:t>
             </a:r>
           </a:p>
         </p:txBody>
@@ -5658,14 +4752,48 @@
       <p:grpSpPr/>
       <p:sp>
         <p:nvSpPr>
-          <p:cNvPr id="2" name="Rectangle 1"/>
+          <p:cNvPr id="2" name="TextBox 1"/>
+          <p:cNvSpPr txBox="1"/>
+          <p:nvPr/>
+        </p:nvSpPr>
+        <p:spPr>
+          <a:xfrm>
+            <a:off x="640080" y="457200"/>
+            <a:ext cx="10881360" cy="960120"/>
+          </a:xfrm>
+          <a:prstGeom prst="rect">
+            <a:avLst/>
+          </a:prstGeom>
+          <a:noFill/>
+        </p:spPr>
+        <p:txBody>
+          <a:bodyPr wrap="square" anchor="t" lIns="0" rIns="0" tIns="0" bIns="0">
+            <a:spAutoFit/>
+          </a:bodyPr>
+          <a:lstStyle/>
+          <a:p>
+            <a:r>
+              <a:rPr sz="2800" b="1" i="0">
+                <a:solidFill>
+                  <a:srgbClr val="2A2929"/>
+                </a:solidFill>
+                <a:latin typeface="Roboto"/>
+              </a:rPr>
+              <a:t>Justify against the business needs</a:t>
+            </a:r>
+          </a:p>
+        </p:txBody>
+      </p:sp>
+      <p:sp>
+        <p:nvSpPr>
+          <p:cNvPr id="3" name="Rectangle 2"/>
           <p:cNvSpPr/>
           <p:nvPr/>
         </p:nvSpPr>
         <p:spPr>
           <a:xfrm>
-            <a:off x="0" y="0"/>
-            <a:ext cx="3931920" cy="6858000"/>
+            <a:off x="658368" y="1371600"/>
+            <a:ext cx="1463040" cy="50800"/>
           </a:xfrm>
           <a:prstGeom prst="rect">
             <a:avLst/>
@@ -5702,14 +4830,14 @@
       </p:sp>
       <p:sp>
         <p:nvSpPr>
-          <p:cNvPr id="3" name="TextBox 2"/>
+          <p:cNvPr id="4" name="TextBox 3"/>
           <p:cNvSpPr txBox="1"/>
           <p:nvPr/>
         </p:nvSpPr>
         <p:spPr>
           <a:xfrm>
-            <a:off x="365760" y="2103120"/>
-            <a:ext cx="3291840" cy="2194560"/>
+            <a:off x="658368" y="1691640"/>
+            <a:ext cx="10881360" cy="4480560"/>
           </a:xfrm>
           <a:prstGeom prst="rect">
             <a:avLst/>
@@ -5717,85 +4845,101 @@
           <a:noFill/>
         </p:spPr>
         <p:txBody>
-          <a:bodyPr wrap="square" anchor="t" lIns="0" rIns="0" tIns="0" bIns="0">
+          <a:bodyPr wrap="square" anchor="ctr" lIns="0" rIns="0" tIns="0" bIns="0">
             <a:spAutoFit/>
           </a:bodyPr>
           <a:lstStyle/>
           <a:p>
-            <a:r>
-              <a:rPr sz="13000" b="1" i="0">
-                <a:solidFill>
-                  <a:srgbClr val="FFFFFF"/>
-                </a:solidFill>
-                <a:latin typeface="Roboto"/>
-              </a:rPr>
-              <a:t>02</a:t>
-            </a:r>
-          </a:p>
-        </p:txBody>
-      </p:sp>
-      <p:sp>
-        <p:nvSpPr>
-          <p:cNvPr id="4" name="TextBox 3"/>
-          <p:cNvSpPr txBox="1"/>
-          <p:nvPr/>
-        </p:nvSpPr>
-        <p:spPr>
-          <a:xfrm>
-            <a:off x="4480560" y="2468880"/>
-            <a:ext cx="7132320" cy="2194560"/>
-          </a:xfrm>
-          <a:prstGeom prst="rect">
-            <a:avLst/>
-          </a:prstGeom>
-          <a:noFill/>
-        </p:spPr>
-        <p:txBody>
-          <a:bodyPr wrap="square" anchor="t" lIns="0" rIns="0" tIns="0" bIns="0">
-            <a:spAutoFit/>
-          </a:bodyPr>
-          <a:lstStyle/>
-          <a:p>
-            <a:r>
-              <a:rPr sz="1600" b="1" i="0">
-                <a:solidFill>
-                  <a:srgbClr val="27B5CE"/>
-                </a:solidFill>
-                <a:latin typeface="Roboto"/>
-              </a:rPr>
-              <a:t>SECTION</a:t>
-            </a:r>
-          </a:p>
-          <a:p>
-            <a:pPr>
+            <a:pPr marL="0" indent="0">
+              <a:lnSpc>
+                <a:spcPct val="105000"/>
+              </a:lnSpc>
               <a:spcBef>
-                <a:spcPts val="600"/>
+                <a:spcPts val="0"/>
               </a:spcBef>
+              <a:spcAft>
+                <a:spcPts val="1000"/>
+              </a:spcAft>
             </a:pPr>
             <a:r>
-              <a:rPr sz="3800" b="1" i="0">
+              <a:rPr sz="2400" b="1" i="0">
+                <a:solidFill>
+                  <a:srgbClr val="EDAB0C"/>
+                </a:solidFill>
+                <a:latin typeface="Roboto"/>
+              </a:rPr>
+              <a:t>■  </a:t>
+            </a:r>
+            <a:r>
+              <a:rPr sz="2400" b="0" i="0">
                 <a:solidFill>
                   <a:srgbClr val="2A2929"/>
                 </a:solidFill>
                 <a:latin typeface="Roboto"/>
               </a:rPr>
-              <a:t>Cloud design &amp; migration principles</a:t>
-            </a:r>
-          </a:p>
-          <a:p>
-            <a:pPr>
+              <a:t>Tie every resource choice to a stated business need — why this tier, why this size.</a:t>
+            </a:r>
+          </a:p>
+          <a:p>
+            <a:pPr marL="0" indent="0">
+              <a:lnSpc>
+                <a:spcPct val="105000"/>
+              </a:lnSpc>
               <a:spcBef>
+                <a:spcPts val="0"/>
+              </a:spcBef>
+              <a:spcAft>
                 <a:spcPts val="1000"/>
+              </a:spcAft>
+            </a:pPr>
+            <a:r>
+              <a:rPr sz="2400" b="1" i="0">
+                <a:solidFill>
+                  <a:srgbClr val="EDAB0C"/>
+                </a:solidFill>
+                <a:latin typeface="Roboto"/>
+              </a:rPr>
+              <a:t>■  </a:t>
+            </a:r>
+            <a:r>
+              <a:rPr sz="2400" b="0" i="0">
+                <a:solidFill>
+                  <a:srgbClr val="2A2929"/>
+                </a:solidFill>
+                <a:latin typeface="Roboto"/>
+              </a:rPr>
+              <a:t>Choose the simplest option that meets the need; note where capacity scales elastically and how a test would demonstrate it.</a:t>
+            </a:r>
+          </a:p>
+          <a:p>
+            <a:pPr marL="0" indent="0">
+              <a:lnSpc>
+                <a:spcPct val="105000"/>
+              </a:lnSpc>
+              <a:spcBef>
+                <a:spcPts val="0"/>
               </a:spcBef>
+              <a:spcAft>
+                <a:spcPts val="1000"/>
+              </a:spcAft>
             </a:pPr>
             <a:r>
-              <a:rPr sz="2000" b="0" i="1">
-                <a:solidFill>
-                  <a:srgbClr val="484848"/>
-                </a:solidFill>
-                <a:latin typeface="Roboto Light"/>
-              </a:rPr>
-              <a:t>the principles under the improvement</a:t>
+              <a:rPr sz="2400" b="1" i="0">
+                <a:solidFill>
+                  <a:srgbClr val="EDAB0C"/>
+                </a:solidFill>
+                <a:latin typeface="Roboto"/>
+              </a:rPr>
+              <a:t>■  </a:t>
+            </a:r>
+            <a:r>
+              <a:rPr sz="2400" b="0" i="0">
+                <a:solidFill>
+                  <a:srgbClr val="2A2929"/>
+                </a:solidFill>
+                <a:latin typeface="Roboto"/>
+              </a:rPr>
+              <a:t>No tier scaled beyond what a need justifies.</a:t>
             </a:r>
           </a:p>
         </p:txBody>
@@ -5917,7 +5061,7 @@
                 </a:solidFill>
                 <a:latin typeface="Roboto"/>
               </a:rPr>
-              <a:t/>
+              <a:t>8</a:t>
             </a:r>
           </a:p>
         </p:txBody>
@@ -5950,48 +5094,14 @@
       <p:grpSpPr/>
       <p:sp>
         <p:nvSpPr>
-          <p:cNvPr id="2" name="TextBox 1"/>
-          <p:cNvSpPr txBox="1"/>
-          <p:nvPr/>
-        </p:nvSpPr>
-        <p:spPr>
-          <a:xfrm>
-            <a:off x="640080" y="457200"/>
-            <a:ext cx="10881360" cy="960120"/>
-          </a:xfrm>
-          <a:prstGeom prst="rect">
-            <a:avLst/>
-          </a:prstGeom>
-          <a:noFill/>
-        </p:spPr>
-        <p:txBody>
-          <a:bodyPr wrap="square" anchor="t" lIns="0" rIns="0" tIns="0" bIns="0">
-            <a:spAutoFit/>
-          </a:bodyPr>
-          <a:lstStyle/>
-          <a:p>
-            <a:r>
-              <a:rPr sz="2800" b="1" i="0">
-                <a:solidFill>
-                  <a:srgbClr val="2A2929"/>
-                </a:solidFill>
-                <a:latin typeface="Roboto"/>
-              </a:rPr>
-              <a:t>Cloud design principles</a:t>
-            </a:r>
-          </a:p>
-        </p:txBody>
-      </p:sp>
-      <p:sp>
-        <p:nvSpPr>
-          <p:cNvPr id="3" name="Rectangle 2"/>
+          <p:cNvPr id="2" name="Rectangle 1"/>
           <p:cNvSpPr/>
           <p:nvPr/>
         </p:nvSpPr>
         <p:spPr>
           <a:xfrm>
-            <a:off x="658368" y="1371600"/>
-            <a:ext cx="1463040" cy="50800"/>
+            <a:off x="0" y="0"/>
+            <a:ext cx="12191695" cy="1234440"/>
           </a:xfrm>
           <a:prstGeom prst="rect">
             <a:avLst/>
@@ -6028,14 +5138,67 @@
       </p:sp>
       <p:sp>
         <p:nvSpPr>
+          <p:cNvPr id="3" name="Rounded Rectangle 2"/>
+          <p:cNvSpPr/>
+          <p:nvPr/>
+        </p:nvSpPr>
+        <p:spPr>
+          <a:xfrm>
+            <a:off x="640080" y="384048"/>
+            <a:ext cx="1691640" cy="457200"/>
+          </a:xfrm>
+          <a:prstGeom prst="roundRect">
+            <a:avLst/>
+          </a:prstGeom>
+          <a:solidFill>
+            <a:srgbClr val="2A2929"/>
+          </a:solidFill>
+          <a:ln>
+            <a:noFill/>
+          </a:ln>
+          <a:effectLst/>
+        </p:spPr>
+        <p:style>
+          <a:lnRef idx="1">
+            <a:schemeClr val="accent1"/>
+          </a:lnRef>
+          <a:fillRef idx="3">
+            <a:schemeClr val="accent1"/>
+          </a:fillRef>
+          <a:effectRef idx="2">
+            <a:schemeClr val="accent1"/>
+          </a:effectRef>
+          <a:fontRef idx="minor">
+            <a:schemeClr val="lt1"/>
+          </a:fontRef>
+        </p:style>
+        <p:txBody>
+          <a:bodyPr rtlCol="0" anchor="ctr"/>
+          <a:lstStyle/>
+          <a:p>
+            <a:pPr algn="ctr"/>
+            <a:r>
+              <a:rPr sz="1400" b="1" i="0">
+                <a:solidFill>
+                  <a:srgbClr val="FBB900"/>
+                </a:solidFill>
+                <a:latin typeface="Roboto"/>
+              </a:rPr>
+              <a:t>ACTIVITY</a:t>
+            </a:r>
+          </a:p>
+        </p:txBody>
+      </p:sp>
+      <p:sp>
+        <p:nvSpPr>
           <p:cNvPr id="4" name="TextBox 3"/>
           <p:cNvSpPr txBox="1"/>
           <p:nvPr/>
         </p:nvSpPr>
         <p:spPr>
           <a:xfrm>
-            <a:off x="658368" y="1691640"/>
-            <a:ext cx="10881360" cy="4480560"/>
+            <a:off x="2560320" y="310896"/>
+            <a:ext cx="8961120" cy="685800"/>
           </a:xfrm>
           <a:prstGeom prst="rect">
             <a:avLst/>
@@ -6044,6 +5207,40 @@
         </p:spPr>
         <p:txBody>
           <a:bodyPr wrap="square" anchor="ctr" lIns="0" rIns="0" tIns="0" bIns="0">
+            <a:spAutoFit/>
+          </a:bodyPr>
+          <a:lstStyle/>
+          <a:p>
+            <a:r>
+              <a:rPr sz="2600" b="1" i="0">
+                <a:solidFill>
+                  <a:srgbClr val="FFFFFF"/>
+                </a:solidFill>
+                <a:latin typeface="Roboto"/>
+              </a:rPr>
+              <a:t>Design the four tiers</a:t>
+            </a:r>
+          </a:p>
+        </p:txBody>
+      </p:sp>
+      <p:sp>
+        <p:nvSpPr>
+          <p:cNvPr id="5" name="TextBox 4"/>
+          <p:cNvSpPr txBox="1"/>
+          <p:nvPr/>
+        </p:nvSpPr>
+        <p:spPr>
+          <a:xfrm>
+            <a:off x="658368" y="1554480"/>
+            <a:ext cx="10881360" cy="4297680"/>
+          </a:xfrm>
+          <a:prstGeom prst="rect">
+            <a:avLst/>
+          </a:prstGeom>
+          <a:noFill/>
+        </p:spPr>
+        <p:txBody>
+          <a:bodyPr wrap="square" anchor="t" lIns="0" rIns="0" tIns="0" bIns="0">
             <a:spAutoFit/>
           </a:bodyPr>
           <a:lstStyle/>
@@ -6060,7 +5257,7 @@
               </a:spcAft>
             </a:pPr>
             <a:r>
-              <a:rPr sz="2400" b="1" i="0">
+              <a:rPr sz="1700" b="1" i="0">
                 <a:solidFill>
                   <a:srgbClr val="EDAB0C"/>
                 </a:solidFill>
@@ -6069,13 +5266,13 @@
               <a:t>■  </a:t>
             </a:r>
             <a:r>
-              <a:rPr sz="2400" b="0" i="0">
+              <a:rPr sz="1700" b="0" i="0">
                 <a:solidFill>
                   <a:srgbClr val="2A2929"/>
                 </a:solidFill>
                 <a:latin typeface="Roboto"/>
               </a:rPr>
-              <a:t>Design for failure, loose coupling, statelessness, right-sizing, and automation over manual steps (KE 4).</a:t>
+              <a:t>Workbook — task 9.</a:t>
             </a:r>
           </a:p>
           <a:p>
@@ -6091,7 +5288,7 @@
               </a:spcAft>
             </a:pPr>
             <a:r>
-              <a:rPr sz="2400" b="1" i="0">
+              <a:rPr sz="1700" b="1" i="0">
                 <a:solidFill>
                   <a:srgbClr val="EDAB0C"/>
                 </a:solidFill>
@@ -6100,51 +5297,100 @@
               <a:t>■  </a:t>
             </a:r>
             <a:r>
-              <a:rPr sz="2400" b="0" i="0">
+              <a:rPr sz="1700" b="0" i="0">
                 <a:solidFill>
                   <a:srgbClr val="2A2929"/>
                 </a:solidFill>
                 <a:latin typeface="Roboto"/>
               </a:rPr>
-              <a:t>Improve the architecture to these principles — they are why Multi-AZ and health checks belong in the design.</a:t>
-            </a:r>
-          </a:p>
-          <a:p>
-            <a:pPr marL="0" indent="0">
-              <a:lnSpc>
-                <a:spcPct val="105000"/>
-              </a:lnSpc>
-              <a:spcBef>
-                <a:spcPts val="0"/>
-              </a:spcBef>
-              <a:spcAft>
-                <a:spcPts val="1000"/>
-              </a:spcAft>
-            </a:pPr>
-            <a:r>
-              <a:rPr sz="2400" b="1" i="0">
-                <a:solidFill>
-                  <a:srgbClr val="EDAB0C"/>
-                </a:solidFill>
-                <a:latin typeface="Roboto"/>
-              </a:rPr>
-              <a:t>■  </a:t>
-            </a:r>
-            <a:r>
-              <a:rPr sz="2400" b="0" i="0">
+              <a:t>Select and improve the network, compute, database and storage tiers for the practice engagement, each choice justified against a named need.</a:t>
+            </a:r>
+          </a:p>
+        </p:txBody>
+      </p:sp>
+      <p:sp>
+        <p:nvSpPr>
+          <p:cNvPr id="6" name="Rounded Rectangle 5"/>
+          <p:cNvSpPr/>
+          <p:nvPr/>
+        </p:nvSpPr>
+        <p:spPr>
+          <a:xfrm>
+            <a:off x="640080" y="5897880"/>
+            <a:ext cx="4023360" cy="457200"/>
+          </a:xfrm>
+          <a:prstGeom prst="roundRect">
+            <a:avLst/>
+          </a:prstGeom>
+          <a:solidFill>
+            <a:srgbClr val="F9F9F9"/>
+          </a:solidFill>
+          <a:ln w="12700">
+            <a:solidFill>
+              <a:srgbClr val="CCCCCC"/>
+            </a:solidFill>
+          </a:ln>
+          <a:effectLst/>
+        </p:spPr>
+        <p:style>
+          <a:lnRef idx="1">
+            <a:schemeClr val="accent1"/>
+          </a:lnRef>
+          <a:fillRef idx="3">
+            <a:schemeClr val="accent1"/>
+          </a:fillRef>
+          <a:effectRef idx="2">
+            <a:schemeClr val="accent1"/>
+          </a:effectRef>
+          <a:fontRef idx="minor">
+            <a:schemeClr val="lt1"/>
+          </a:fontRef>
+        </p:style>
+        <p:txBody>
+          <a:bodyPr rtlCol="0" anchor="ctr"/>
+          <a:lstStyle/>
+          <a:p>
+            <a:pPr algn="ctr"/>
+          </a:p>
+        </p:txBody>
+      </p:sp>
+      <p:sp>
+        <p:nvSpPr>
+          <p:cNvPr id="7" name="TextBox 6"/>
+          <p:cNvSpPr txBox="1"/>
+          <p:nvPr/>
+        </p:nvSpPr>
+        <p:spPr>
+          <a:xfrm>
+            <a:off x="822960" y="5943600"/>
+            <a:ext cx="3657600" cy="365760"/>
+          </a:xfrm>
+          <a:prstGeom prst="rect">
+            <a:avLst/>
+          </a:prstGeom>
+          <a:noFill/>
+        </p:spPr>
+        <p:txBody>
+          <a:bodyPr wrap="square" anchor="ctr" lIns="0" rIns="0" tIns="0" bIns="0">
+            <a:spAutoFit/>
+          </a:bodyPr>
+          <a:lstStyle/>
+          <a:p>
+            <a:r>
+              <a:rPr sz="1500" b="1" i="0">
                 <a:solidFill>
                   <a:srgbClr val="2A2929"/>
                 </a:solidFill>
                 <a:latin typeface="Roboto"/>
               </a:rPr>
-              <a:t>Simplest design that meets the goal wins; principles justify choices, they don't mandate maximums.</a:t>
-            </a:r>
-          </a:p>
-        </p:txBody>
-      </p:sp>
-      <p:sp>
-        <p:nvSpPr>
-          <p:cNvPr id="5" name="Rectangle 4"/>
+              <a:t>⏱  ~35 min</a:t>
+            </a:r>
+          </a:p>
+        </p:txBody>
+      </p:sp>
+      <p:sp>
+        <p:nvSpPr>
+          <p:cNvPr id="8" name="Rectangle 7"/>
           <p:cNvSpPr/>
           <p:nvPr/>
         </p:nvSpPr>
@@ -6188,7 +5434,7 @@
       </p:sp>
       <p:sp>
         <p:nvSpPr>
-          <p:cNvPr id="6" name="TextBox 5"/>
+          <p:cNvPr id="9" name="TextBox 8"/>
           <p:cNvSpPr txBox="1"/>
           <p:nvPr/>
         </p:nvSpPr>
@@ -6231,7 +5477,7 @@
       </p:sp>
       <p:sp>
         <p:nvSpPr>
-          <p:cNvPr id="7" name="TextBox 6"/>
+          <p:cNvPr id="10" name="TextBox 9"/>
           <p:cNvSpPr txBox="1"/>
           <p:nvPr/>
         </p:nvSpPr>
@@ -6278,7 +5524,7 @@
     <p:bg>
       <p:bgPr>
         <a:solidFill>
-          <a:srgbClr val="FFFFFF"/>
+          <a:srgbClr val="F9F9F9"/>
         </a:solidFill>
         <a:effectLst/>
       </p:bgPr>
@@ -6298,8 +5544,8 @@
         </p:nvSpPr>
         <p:spPr>
           <a:xfrm>
-            <a:off x="640080" y="457200"/>
-            <a:ext cx="10881360" cy="960120"/>
+            <a:off x="640080" y="548640"/>
+            <a:ext cx="10881360" cy="1097280"/>
           </a:xfrm>
           <a:prstGeom prst="rect">
             <a:avLst/>
@@ -6313,13 +5559,29 @@
           <a:lstStyle/>
           <a:p>
             <a:r>
-              <a:rPr sz="2800" b="1" i="0">
+              <a:rPr sz="3200" b="1" i="0">
                 <a:solidFill>
                   <a:srgbClr val="2A2929"/>
                 </a:solidFill>
                 <a:latin typeface="Roboto"/>
               </a:rPr>
-              <a:t>Migrating the baseline to the improved architecture</a:t>
+              <a:t>Key takeaways</a:t>
+            </a:r>
+          </a:p>
+          <a:p>
+            <a:pPr>
+              <a:spcBef>
+                <a:spcPts val="200"/>
+              </a:spcBef>
+            </a:pPr>
+            <a:r>
+              <a:rPr sz="1800" b="1" i="0">
+                <a:solidFill>
+                  <a:srgbClr val="27B5CE"/>
+                </a:solidFill>
+                <a:latin typeface="Roboto"/>
+              </a:rPr>
+              <a:t>Section 2 · The four tiers</a:t>
             </a:r>
           </a:p>
         </p:txBody>
@@ -6332,7 +5594,7 @@
         </p:nvSpPr>
         <p:spPr>
           <a:xfrm>
-            <a:off x="658368" y="1371600"/>
+            <a:off x="658368" y="1600200"/>
             <a:ext cx="1463040" cy="50800"/>
           </a:xfrm>
           <a:prstGeom prst="rect">
@@ -6370,117 +5632,47 @@
       </p:sp>
       <p:sp>
         <p:nvSpPr>
-          <p:cNvPr id="4" name="TextBox 3"/>
-          <p:cNvSpPr txBox="1"/>
-          <p:nvPr/>
-        </p:nvSpPr>
-        <p:spPr>
-          <a:xfrm>
-            <a:off x="658368" y="1691640"/>
-            <a:ext cx="10881360" cy="4480560"/>
-          </a:xfrm>
-          <a:prstGeom prst="rect">
-            <a:avLst/>
-          </a:prstGeom>
-          <a:noFill/>
-        </p:spPr>
-        <p:txBody>
-          <a:bodyPr wrap="square" anchor="ctr" lIns="0" rIns="0" tIns="0" bIns="0">
-            <a:spAutoFit/>
-          </a:bodyPr>
-          <a:lstStyle/>
-          <a:p>
-            <a:pPr marL="0" indent="0">
-              <a:lnSpc>
-                <a:spcPct val="105000"/>
-              </a:lnSpc>
-              <a:spcBef>
-                <a:spcPts val="0"/>
-              </a:spcBef>
-              <a:spcAft>
-                <a:spcPts val="1000"/>
-              </a:spcAft>
-            </a:pPr>
-            <a:r>
-              <a:rPr sz="2400" b="1" i="0">
-                <a:solidFill>
-                  <a:srgbClr val="EDAB0C"/>
-                </a:solidFill>
-                <a:latin typeface="Roboto"/>
-              </a:rPr>
-              <a:t>■  </a:t>
-            </a:r>
-            <a:r>
-              <a:rPr sz="2400" b="0" i="0">
-                <a:solidFill>
-                  <a:srgbClr val="2A2929"/>
-                </a:solidFill>
-                <a:latin typeface="Roboto"/>
-              </a:rPr>
-              <a:t>Migration principles: move incrementally, keep the system serving, evidence each step, and be able to roll back (KE 5).</a:t>
-            </a:r>
-          </a:p>
-          <a:p>
-            <a:pPr marL="0" indent="0">
-              <a:lnSpc>
-                <a:spcPct val="105000"/>
-              </a:lnSpc>
-              <a:spcBef>
-                <a:spcPts val="0"/>
-              </a:spcBef>
-              <a:spcAft>
-                <a:spcPts val="1000"/>
-              </a:spcAft>
-            </a:pPr>
-            <a:r>
-              <a:rPr sz="2400" b="1" i="0">
-                <a:solidFill>
-                  <a:srgbClr val="EDAB0C"/>
-                </a:solidFill>
-                <a:latin typeface="Roboto"/>
-              </a:rPr>
-              <a:t>■  </a:t>
-            </a:r>
-            <a:r>
-              <a:rPr sz="2400" b="0" i="0">
-                <a:solidFill>
-                  <a:srgbClr val="2A2929"/>
-                </a:solidFill>
-                <a:latin typeface="Roboto"/>
-              </a:rPr>
-              <a:t>Sequence the improvement so the single-AZ baseline becomes the Multi-AZ + DR target without a big-bang cutover.</a:t>
-            </a:r>
-          </a:p>
-          <a:p>
-            <a:pPr marL="0" indent="0">
-              <a:lnSpc>
-                <a:spcPct val="105000"/>
-              </a:lnSpc>
-              <a:spcBef>
-                <a:spcPts val="0"/>
-              </a:spcBef>
-              <a:spcAft>
-                <a:spcPts val="1000"/>
-              </a:spcAft>
-            </a:pPr>
-            <a:r>
-              <a:rPr sz="2400" b="1" i="0">
-                <a:solidFill>
-                  <a:srgbClr val="EDAB0C"/>
-                </a:solidFill>
-                <a:latin typeface="Roboto"/>
-              </a:rPr>
-              <a:t>■  </a:t>
-            </a:r>
-            <a:r>
-              <a:rPr sz="2400" b="0" i="0">
-                <a:solidFill>
-                  <a:srgbClr val="2A2929"/>
-                </a:solidFill>
-                <a:latin typeface="Roboto"/>
-              </a:rPr>
-              <a:t>This is design-level here — the actual migration/build is AT3.</a:t>
-            </a:r>
+          <p:cNvPr id="4" name="Rectangle 3"/>
+          <p:cNvSpPr/>
+          <p:nvPr/>
+        </p:nvSpPr>
+        <p:spPr>
+          <a:xfrm>
+            <a:off x="640080" y="1965960"/>
+            <a:ext cx="10927080" cy="841248"/>
+          </a:xfrm>
+          <a:prstGeom prst="rect">
+            <a:avLst/>
+          </a:prstGeom>
+          <a:solidFill>
+            <a:srgbClr val="FFFFFF"/>
+          </a:solidFill>
+          <a:ln w="12700">
+            <a:solidFill>
+              <a:srgbClr val="CCCCCC"/>
+            </a:solidFill>
+          </a:ln>
+          <a:effectLst/>
+        </p:spPr>
+        <p:style>
+          <a:lnRef idx="1">
+            <a:schemeClr val="accent1"/>
+          </a:lnRef>
+          <a:fillRef idx="3">
+            <a:schemeClr val="accent1"/>
+          </a:fillRef>
+          <a:effectRef idx="2">
+            <a:schemeClr val="accent1"/>
+          </a:effectRef>
+          <a:fontRef idx="minor">
+            <a:schemeClr val="lt1"/>
+          </a:fontRef>
+        </p:style>
+        <p:txBody>
+          <a:bodyPr rtlCol="0" anchor="ctr"/>
+          <a:lstStyle/>
+          <a:p>
+            <a:pPr algn="ctr"/>
           </a:p>
         </p:txBody>
       </p:sp>
@@ -6492,8 +5684,8 @@
         </p:nvSpPr>
         <p:spPr>
           <a:xfrm>
-            <a:off x="0" y="6565392"/>
-            <a:ext cx="12191695" cy="38100"/>
+            <a:off x="640080" y="1965960"/>
+            <a:ext cx="109728" cy="841248"/>
           </a:xfrm>
           <a:prstGeom prst="rect">
             <a:avLst/>
@@ -6536,6 +5728,347 @@
         </p:nvSpPr>
         <p:spPr>
           <a:xfrm>
+            <a:off x="960120" y="1965960"/>
+            <a:ext cx="10424160" cy="841248"/>
+          </a:xfrm>
+          <a:prstGeom prst="rect">
+            <a:avLst/>
+          </a:prstGeom>
+          <a:noFill/>
+        </p:spPr>
+        <p:txBody>
+          <a:bodyPr wrap="square" anchor="ctr" lIns="0" rIns="0" tIns="0" bIns="0">
+            <a:spAutoFit/>
+          </a:bodyPr>
+          <a:lstStyle/>
+          <a:p>
+            <a:pPr>
+              <a:lnSpc>
+                <a:spcPct val="100000"/>
+              </a:lnSpc>
+            </a:pPr>
+            <a:r>
+              <a:rPr sz="1700" b="0" i="0">
+                <a:solidFill>
+                  <a:srgbClr val="2A2929"/>
+                </a:solidFill>
+                <a:latin typeface="Roboto"/>
+              </a:rPr>
+              <a:t>Network, compute, database, storage — the design's frame and the build's work-split.</a:t>
+            </a:r>
+          </a:p>
+        </p:txBody>
+      </p:sp>
+      <p:sp>
+        <p:nvSpPr>
+          <p:cNvPr id="7" name="Rectangle 6"/>
+          <p:cNvSpPr/>
+          <p:nvPr/>
+        </p:nvSpPr>
+        <p:spPr>
+          <a:xfrm>
+            <a:off x="640080" y="2916936"/>
+            <a:ext cx="10927080" cy="841248"/>
+          </a:xfrm>
+          <a:prstGeom prst="rect">
+            <a:avLst/>
+          </a:prstGeom>
+          <a:solidFill>
+            <a:srgbClr val="FFFFFF"/>
+          </a:solidFill>
+          <a:ln w="12700">
+            <a:solidFill>
+              <a:srgbClr val="CCCCCC"/>
+            </a:solidFill>
+          </a:ln>
+          <a:effectLst/>
+        </p:spPr>
+        <p:style>
+          <a:lnRef idx="1">
+            <a:schemeClr val="accent1"/>
+          </a:lnRef>
+          <a:fillRef idx="3">
+            <a:schemeClr val="accent1"/>
+          </a:fillRef>
+          <a:effectRef idx="2">
+            <a:schemeClr val="accent1"/>
+          </a:effectRef>
+          <a:fontRef idx="minor">
+            <a:schemeClr val="lt1"/>
+          </a:fontRef>
+        </p:style>
+        <p:txBody>
+          <a:bodyPr rtlCol="0" anchor="ctr"/>
+          <a:lstStyle/>
+          <a:p>
+            <a:pPr algn="ctr"/>
+          </a:p>
+        </p:txBody>
+      </p:sp>
+      <p:sp>
+        <p:nvSpPr>
+          <p:cNvPr id="8" name="Rectangle 7"/>
+          <p:cNvSpPr/>
+          <p:nvPr/>
+        </p:nvSpPr>
+        <p:spPr>
+          <a:xfrm>
+            <a:off x="640080" y="2916936"/>
+            <a:ext cx="109728" cy="841248"/>
+          </a:xfrm>
+          <a:prstGeom prst="rect">
+            <a:avLst/>
+          </a:prstGeom>
+          <a:solidFill>
+            <a:srgbClr val="27B5CE"/>
+          </a:solidFill>
+          <a:ln>
+            <a:noFill/>
+          </a:ln>
+          <a:effectLst/>
+        </p:spPr>
+        <p:style>
+          <a:lnRef idx="1">
+            <a:schemeClr val="accent1"/>
+          </a:lnRef>
+          <a:fillRef idx="3">
+            <a:schemeClr val="accent1"/>
+          </a:fillRef>
+          <a:effectRef idx="2">
+            <a:schemeClr val="accent1"/>
+          </a:effectRef>
+          <a:fontRef idx="minor">
+            <a:schemeClr val="lt1"/>
+          </a:fontRef>
+        </p:style>
+        <p:txBody>
+          <a:bodyPr rtlCol="0" anchor="ctr"/>
+          <a:lstStyle/>
+          <a:p>
+            <a:pPr algn="ctr"/>
+          </a:p>
+        </p:txBody>
+      </p:sp>
+      <p:sp>
+        <p:nvSpPr>
+          <p:cNvPr id="9" name="TextBox 8"/>
+          <p:cNvSpPr txBox="1"/>
+          <p:nvPr/>
+        </p:nvSpPr>
+        <p:spPr>
+          <a:xfrm>
+            <a:off x="960120" y="2916936"/>
+            <a:ext cx="10424160" cy="841248"/>
+          </a:xfrm>
+          <a:prstGeom prst="rect">
+            <a:avLst/>
+          </a:prstGeom>
+          <a:noFill/>
+        </p:spPr>
+        <p:txBody>
+          <a:bodyPr wrap="square" anchor="ctr" lIns="0" rIns="0" tIns="0" bIns="0">
+            <a:spAutoFit/>
+          </a:bodyPr>
+          <a:lstStyle/>
+          <a:p>
+            <a:pPr>
+              <a:lnSpc>
+                <a:spcPct val="100000"/>
+              </a:lnSpc>
+            </a:pPr>
+            <a:r>
+              <a:rPr sz="1700" b="0" i="0">
+                <a:solidFill>
+                  <a:srgbClr val="2A2929"/>
+                </a:solidFill>
+                <a:latin typeface="Roboto"/>
+              </a:rPr>
+              <a:t>Compute and storage scale; network and database support.</a:t>
+            </a:r>
+          </a:p>
+        </p:txBody>
+      </p:sp>
+      <p:sp>
+        <p:nvSpPr>
+          <p:cNvPr id="10" name="Rectangle 9"/>
+          <p:cNvSpPr/>
+          <p:nvPr/>
+        </p:nvSpPr>
+        <p:spPr>
+          <a:xfrm>
+            <a:off x="640080" y="3867912"/>
+            <a:ext cx="10927080" cy="841248"/>
+          </a:xfrm>
+          <a:prstGeom prst="rect">
+            <a:avLst/>
+          </a:prstGeom>
+          <a:solidFill>
+            <a:srgbClr val="FFFFFF"/>
+          </a:solidFill>
+          <a:ln w="12700">
+            <a:solidFill>
+              <a:srgbClr val="CCCCCC"/>
+            </a:solidFill>
+          </a:ln>
+          <a:effectLst/>
+        </p:spPr>
+        <p:style>
+          <a:lnRef idx="1">
+            <a:schemeClr val="accent1"/>
+          </a:lnRef>
+          <a:fillRef idx="3">
+            <a:schemeClr val="accent1"/>
+          </a:fillRef>
+          <a:effectRef idx="2">
+            <a:schemeClr val="accent1"/>
+          </a:effectRef>
+          <a:fontRef idx="minor">
+            <a:schemeClr val="lt1"/>
+          </a:fontRef>
+        </p:style>
+        <p:txBody>
+          <a:bodyPr rtlCol="0" anchor="ctr"/>
+          <a:lstStyle/>
+          <a:p>
+            <a:pPr algn="ctr"/>
+          </a:p>
+        </p:txBody>
+      </p:sp>
+      <p:sp>
+        <p:nvSpPr>
+          <p:cNvPr id="11" name="Rectangle 10"/>
+          <p:cNvSpPr/>
+          <p:nvPr/>
+        </p:nvSpPr>
+        <p:spPr>
+          <a:xfrm>
+            <a:off x="640080" y="3867912"/>
+            <a:ext cx="109728" cy="841248"/>
+          </a:xfrm>
+          <a:prstGeom prst="rect">
+            <a:avLst/>
+          </a:prstGeom>
+          <a:solidFill>
+            <a:srgbClr val="27B5CE"/>
+          </a:solidFill>
+          <a:ln>
+            <a:noFill/>
+          </a:ln>
+          <a:effectLst/>
+        </p:spPr>
+        <p:style>
+          <a:lnRef idx="1">
+            <a:schemeClr val="accent1"/>
+          </a:lnRef>
+          <a:fillRef idx="3">
+            <a:schemeClr val="accent1"/>
+          </a:fillRef>
+          <a:effectRef idx="2">
+            <a:schemeClr val="accent1"/>
+          </a:effectRef>
+          <a:fontRef idx="minor">
+            <a:schemeClr val="lt1"/>
+          </a:fontRef>
+        </p:style>
+        <p:txBody>
+          <a:bodyPr rtlCol="0" anchor="ctr"/>
+          <a:lstStyle/>
+          <a:p>
+            <a:pPr algn="ctr"/>
+          </a:p>
+        </p:txBody>
+      </p:sp>
+      <p:sp>
+        <p:nvSpPr>
+          <p:cNvPr id="12" name="TextBox 11"/>
+          <p:cNvSpPr txBox="1"/>
+          <p:nvPr/>
+        </p:nvSpPr>
+        <p:spPr>
+          <a:xfrm>
+            <a:off x="960120" y="3867912"/>
+            <a:ext cx="10424160" cy="841248"/>
+          </a:xfrm>
+          <a:prstGeom prst="rect">
+            <a:avLst/>
+          </a:prstGeom>
+          <a:noFill/>
+        </p:spPr>
+        <p:txBody>
+          <a:bodyPr wrap="square" anchor="ctr" lIns="0" rIns="0" tIns="0" bIns="0">
+            <a:spAutoFit/>
+          </a:bodyPr>
+          <a:lstStyle/>
+          <a:p>
+            <a:pPr>
+              <a:lnSpc>
+                <a:spcPct val="100000"/>
+              </a:lnSpc>
+            </a:pPr>
+            <a:r>
+              <a:rPr sz="1700" b="0" i="0">
+                <a:solidFill>
+                  <a:srgbClr val="2A2929"/>
+                </a:solidFill>
+                <a:latin typeface="Roboto"/>
+              </a:rPr>
+              <a:t>Simplest option that meets the need, elasticity demonstrable by test.</a:t>
+            </a:r>
+          </a:p>
+        </p:txBody>
+      </p:sp>
+      <p:sp>
+        <p:nvSpPr>
+          <p:cNvPr id="13" name="Rectangle 12"/>
+          <p:cNvSpPr/>
+          <p:nvPr/>
+        </p:nvSpPr>
+        <p:spPr>
+          <a:xfrm>
+            <a:off x="0" y="6565392"/>
+            <a:ext cx="12191695" cy="38100"/>
+          </a:xfrm>
+          <a:prstGeom prst="rect">
+            <a:avLst/>
+          </a:prstGeom>
+          <a:solidFill>
+            <a:srgbClr val="27B5CE"/>
+          </a:solidFill>
+          <a:ln>
+            <a:noFill/>
+          </a:ln>
+          <a:effectLst/>
+        </p:spPr>
+        <p:style>
+          <a:lnRef idx="1">
+            <a:schemeClr val="accent1"/>
+          </a:lnRef>
+          <a:fillRef idx="3">
+            <a:schemeClr val="accent1"/>
+          </a:fillRef>
+          <a:effectRef idx="2">
+            <a:schemeClr val="accent1"/>
+          </a:effectRef>
+          <a:fontRef idx="minor">
+            <a:schemeClr val="lt1"/>
+          </a:fontRef>
+        </p:style>
+        <p:txBody>
+          <a:bodyPr rtlCol="0" anchor="ctr"/>
+          <a:lstStyle/>
+          <a:p>
+            <a:pPr algn="ctr"/>
+          </a:p>
+        </p:txBody>
+      </p:sp>
+      <p:sp>
+        <p:nvSpPr>
+          <p:cNvPr id="14" name="TextBox 13"/>
+          <p:cNvSpPr txBox="1"/>
+          <p:nvPr/>
+        </p:nvSpPr>
+        <p:spPr>
+          <a:xfrm>
             <a:off x="502920" y="6400800"/>
             <a:ext cx="5486400" cy="320040"/>
           </a:xfrm>
@@ -6573,7 +6106,7 @@
       </p:sp>
       <p:sp>
         <p:nvSpPr>
-          <p:cNvPr id="7" name="TextBox 6"/>
+          <p:cNvPr id="15" name="TextBox 14"/>
           <p:cNvSpPr txBox="1"/>
           <p:nvPr/>
         </p:nvSpPr>
@@ -6641,13 +6174,13 @@
         <p:spPr>
           <a:xfrm>
             <a:off x="0" y="0"/>
-            <a:ext cx="12191695" cy="1234440"/>
+            <a:ext cx="3931920" cy="6858000"/>
           </a:xfrm>
           <a:prstGeom prst="rect">
             <a:avLst/>
           </a:prstGeom>
           <a:solidFill>
-            <a:srgbClr val="27B5CE"/>
+            <a:srgbClr val="205F61"/>
           </a:solidFill>
           <a:ln>
             <a:noFill/>
@@ -6678,20 +6211,120 @@
       </p:sp>
       <p:sp>
         <p:nvSpPr>
-          <p:cNvPr id="3" name="Rounded Rectangle 2"/>
+          <p:cNvPr id="3" name="TextBox 2"/>
+          <p:cNvSpPr txBox="1"/>
+          <p:nvPr/>
+        </p:nvSpPr>
+        <p:spPr>
+          <a:xfrm>
+            <a:off x="365760" y="2103120"/>
+            <a:ext cx="3291840" cy="2194560"/>
+          </a:xfrm>
+          <a:prstGeom prst="rect">
+            <a:avLst/>
+          </a:prstGeom>
+          <a:noFill/>
+        </p:spPr>
+        <p:txBody>
+          <a:bodyPr wrap="square" anchor="t" lIns="0" rIns="0" tIns="0" bIns="0">
+            <a:spAutoFit/>
+          </a:bodyPr>
+          <a:lstStyle/>
+          <a:p>
+            <a:r>
+              <a:rPr sz="13000" b="1" i="0">
+                <a:solidFill>
+                  <a:srgbClr val="FFFFFF"/>
+                </a:solidFill>
+                <a:latin typeface="Roboto"/>
+              </a:rPr>
+              <a:t>03</a:t>
+            </a:r>
+          </a:p>
+        </p:txBody>
+      </p:sp>
+      <p:sp>
+        <p:nvSpPr>
+          <p:cNvPr id="4" name="TextBox 3"/>
+          <p:cNvSpPr txBox="1"/>
+          <p:nvPr/>
+        </p:nvSpPr>
+        <p:spPr>
+          <a:xfrm>
+            <a:off x="4480560" y="2468880"/>
+            <a:ext cx="7132320" cy="2194560"/>
+          </a:xfrm>
+          <a:prstGeom prst="rect">
+            <a:avLst/>
+          </a:prstGeom>
+          <a:noFill/>
+        </p:spPr>
+        <p:txBody>
+          <a:bodyPr wrap="square" anchor="t" lIns="0" rIns="0" tIns="0" bIns="0">
+            <a:spAutoFit/>
+          </a:bodyPr>
+          <a:lstStyle/>
+          <a:p>
+            <a:r>
+              <a:rPr sz="1600" b="1" i="0">
+                <a:solidFill>
+                  <a:srgbClr val="205F61"/>
+                </a:solidFill>
+                <a:latin typeface="Roboto"/>
+              </a:rPr>
+              <a:t>SECTION</a:t>
+            </a:r>
+          </a:p>
+          <a:p>
+            <a:pPr>
+              <a:spcBef>
+                <a:spcPts val="600"/>
+              </a:spcBef>
+            </a:pPr>
+            <a:r>
+              <a:rPr sz="3800" b="1" i="0">
+                <a:solidFill>
+                  <a:srgbClr val="2A2929"/>
+                </a:solidFill>
+                <a:latin typeface="Roboto"/>
+              </a:rPr>
+              <a:t>Object storage in context</a:t>
+            </a:r>
+          </a:p>
+          <a:p>
+            <a:pPr>
+              <a:spcBef>
+                <a:spcPts val="1000"/>
+              </a:spcBef>
+            </a:pPr>
+            <a:r>
+              <a:rPr sz="2000" b="0" i="1">
+                <a:solidFill>
+                  <a:srgbClr val="484848"/>
+                </a:solidFill>
+                <a:latin typeface="Roboto Light"/>
+              </a:rPr>
+              <a:t>the contrast that sharpens the storage choice</a:t>
+            </a:r>
+          </a:p>
+        </p:txBody>
+      </p:sp>
+      <p:sp>
+        <p:nvSpPr>
+          <p:cNvPr id="5" name="Rectangle 4"/>
           <p:cNvSpPr/>
           <p:nvPr/>
         </p:nvSpPr>
         <p:spPr>
           <a:xfrm>
-            <a:off x="640080" y="384048"/>
-            <a:ext cx="1691640" cy="457200"/>
-          </a:xfrm>
-          <a:prstGeom prst="roundRect">
+            <a:off x="0" y="6565392"/>
+            <a:ext cx="12191695" cy="38100"/>
+          </a:xfrm>
+          <a:prstGeom prst="rect">
             <a:avLst/>
           </a:prstGeom>
           <a:solidFill>
-            <a:srgbClr val="2A2929"/>
+            <a:srgbClr val="205F61"/>
           </a:solidFill>
           <a:ln>
             <a:noFill/>
@@ -6717,62 +6350,19 @@
           <a:lstStyle/>
           <a:p>
             <a:pPr algn="ctr"/>
-            <a:r>
-              <a:rPr sz="1400" b="1" i="0">
-                <a:solidFill>
-                  <a:srgbClr val="FBB900"/>
-                </a:solidFill>
-                <a:latin typeface="Roboto"/>
-              </a:rPr>
-              <a:t>ACTIVITY</a:t>
-            </a:r>
-          </a:p>
-        </p:txBody>
-      </p:sp>
-      <p:sp>
-        <p:nvSpPr>
-          <p:cNvPr id="4" name="TextBox 3"/>
+          </a:p>
+        </p:txBody>
+      </p:sp>
+      <p:sp>
+        <p:nvSpPr>
+          <p:cNvPr id="6" name="TextBox 5"/>
           <p:cNvSpPr txBox="1"/>
           <p:nvPr/>
         </p:nvSpPr>
         <p:spPr>
           <a:xfrm>
-            <a:off x="2560320" y="310896"/>
-            <a:ext cx="8961120" cy="685800"/>
-          </a:xfrm>
-          <a:prstGeom prst="rect">
-            <a:avLst/>
-          </a:prstGeom>
-          <a:noFill/>
-        </p:spPr>
-        <p:txBody>
-          <a:bodyPr wrap="square" anchor="ctr" lIns="0" rIns="0" tIns="0" bIns="0">
-            <a:spAutoFit/>
-          </a:bodyPr>
-          <a:lstStyle/>
-          <a:p>
-            <a:r>
-              <a:rPr sz="2600" b="1" i="0">
-                <a:solidFill>
-                  <a:srgbClr val="FFFFFF"/>
-                </a:solidFill>
-                <a:latin typeface="Roboto"/>
-              </a:rPr>
-              <a:t>Justify the design in principle</a:t>
-            </a:r>
-          </a:p>
-        </p:txBody>
-      </p:sp>
-      <p:sp>
-        <p:nvSpPr>
-          <p:cNvPr id="5" name="TextBox 4"/>
-          <p:cNvSpPr txBox="1"/>
-          <p:nvPr/>
-        </p:nvSpPr>
-        <p:spPr>
-          <a:xfrm>
-            <a:off x="658368" y="1554480"/>
-            <a:ext cx="10881360" cy="4297680"/>
+            <a:off x="502920" y="6400800"/>
+            <a:ext cx="5486400" cy="320040"/>
           </a:xfrm>
           <a:prstGeom prst="rect">
             <a:avLst/>
@@ -6785,81 +6375,24 @@
           </a:bodyPr>
           <a:lstStyle/>
           <a:p>
-            <a:pPr marL="0" indent="0">
-              <a:lnSpc>
-                <a:spcPct val="105000"/>
-              </a:lnSpc>
-              <a:spcBef>
-                <a:spcPts val="0"/>
-              </a:spcBef>
-              <a:spcAft>
-                <a:spcPts val="1000"/>
-              </a:spcAft>
-            </a:pPr>
-            <a:r>
-              <a:rPr sz="1700" b="1" i="0">
-                <a:solidFill>
-                  <a:srgbClr val="EDAB0C"/>
-                </a:solidFill>
-                <a:latin typeface="Roboto"/>
-              </a:rPr>
-              <a:t>■  </a:t>
-            </a:r>
-            <a:r>
-              <a:rPr sz="1700" b="0" i="0">
+            <a:r>
+              <a:rPr sz="1100" b="1" i="0">
                 <a:solidFill>
                   <a:srgbClr val="2A2929"/>
                 </a:solidFill>
                 <a:latin typeface="Roboto"/>
               </a:rPr>
-              <a:t>For your practice design, write the KE-appendix justification: name the cloud design principle behind each reliability choice and the migration approach that reaches it.</a:t>
-            </a:r>
-          </a:p>
-        </p:txBody>
-      </p:sp>
-      <p:sp>
-        <p:nvSpPr>
-          <p:cNvPr id="6" name="Rounded Rectangle 5"/>
-          <p:cNvSpPr/>
-          <p:nvPr/>
-        </p:nvSpPr>
-        <p:spPr>
-          <a:xfrm>
-            <a:off x="640080" y="5897880"/>
-            <a:ext cx="4023360" cy="457200"/>
-          </a:xfrm>
-          <a:prstGeom prst="roundRect">
-            <a:avLst/>
-          </a:prstGeom>
-          <a:solidFill>
-            <a:srgbClr val="F9F9F9"/>
-          </a:solidFill>
-          <a:ln w="12700">
-            <a:solidFill>
-              <a:srgbClr val="CCCCCC"/>
-            </a:solidFill>
-          </a:ln>
-          <a:effectLst/>
-        </p:spPr>
-        <p:style>
-          <a:lnRef idx="1">
-            <a:schemeClr val="accent1"/>
-          </a:lnRef>
-          <a:fillRef idx="3">
-            <a:schemeClr val="accent1"/>
-          </a:fillRef>
-          <a:effectRef idx="2">
-            <a:schemeClr val="accent1"/>
-          </a:effectRef>
-          <a:fontRef idx="minor">
-            <a:schemeClr val="lt1"/>
-          </a:fontRef>
-        </p:style>
-        <p:txBody>
-          <a:bodyPr rtlCol="0" anchor="ctr"/>
-          <a:lstStyle/>
-          <a:p>
-            <a:pPr algn="ctr"/>
+              <a:t>Kangan </a:t>
+            </a:r>
+            <a:r>
+              <a:rPr sz="1100" b="1" i="0">
+                <a:solidFill>
+                  <a:srgbClr val="D68E10"/>
+                </a:solidFill>
+                <a:latin typeface="Roboto"/>
+              </a:rPr>
+              <a:t>Institute</a:t>
+            </a:r>
           </a:p>
         </p:txBody>
       </p:sp>
@@ -6871,86 +6404,8 @@
         </p:nvSpPr>
         <p:spPr>
           <a:xfrm>
-            <a:off x="822960" y="5943600"/>
-            <a:ext cx="3657600" cy="365760"/>
-          </a:xfrm>
-          <a:prstGeom prst="rect">
-            <a:avLst/>
-          </a:prstGeom>
-          <a:noFill/>
-        </p:spPr>
-        <p:txBody>
-          <a:bodyPr wrap="square" anchor="ctr" lIns="0" rIns="0" tIns="0" bIns="0">
-            <a:spAutoFit/>
-          </a:bodyPr>
-          <a:lstStyle/>
-          <a:p>
-            <a:r>
-              <a:rPr sz="1500" b="1" i="0">
-                <a:solidFill>
-                  <a:srgbClr val="2A2929"/>
-                </a:solidFill>
-                <a:latin typeface="Roboto"/>
-              </a:rPr>
-              <a:t>⏱  ~20 min</a:t>
-            </a:r>
-          </a:p>
-        </p:txBody>
-      </p:sp>
-      <p:sp>
-        <p:nvSpPr>
-          <p:cNvPr id="8" name="Rectangle 7"/>
-          <p:cNvSpPr/>
-          <p:nvPr/>
-        </p:nvSpPr>
-        <p:spPr>
-          <a:xfrm>
-            <a:off x="0" y="6565392"/>
-            <a:ext cx="12191695" cy="38100"/>
-          </a:xfrm>
-          <a:prstGeom prst="rect">
-            <a:avLst/>
-          </a:prstGeom>
-          <a:solidFill>
-            <a:srgbClr val="27B5CE"/>
-          </a:solidFill>
-          <a:ln>
-            <a:noFill/>
-          </a:ln>
-          <a:effectLst/>
-        </p:spPr>
-        <p:style>
-          <a:lnRef idx="1">
-            <a:schemeClr val="accent1"/>
-          </a:lnRef>
-          <a:fillRef idx="3">
-            <a:schemeClr val="accent1"/>
-          </a:fillRef>
-          <a:effectRef idx="2">
-            <a:schemeClr val="accent1"/>
-          </a:effectRef>
-          <a:fontRef idx="minor">
-            <a:schemeClr val="lt1"/>
-          </a:fontRef>
-        </p:style>
-        <p:txBody>
-          <a:bodyPr rtlCol="0" anchor="ctr"/>
-          <a:lstStyle/>
-          <a:p>
-            <a:pPr algn="ctr"/>
-          </a:p>
-        </p:txBody>
-      </p:sp>
-      <p:sp>
-        <p:nvSpPr>
-          <p:cNvPr id="9" name="TextBox 8"/>
-          <p:cNvSpPr txBox="1"/>
-          <p:nvPr/>
-        </p:nvSpPr>
-        <p:spPr>
-          <a:xfrm>
-            <a:off x="502920" y="6400800"/>
-            <a:ext cx="5486400" cy="320040"/>
+            <a:off x="10515600" y="6400800"/>
+            <a:ext cx="1188720" cy="320040"/>
           </a:xfrm>
           <a:prstGeom prst="rect">
             <a:avLst/>
@@ -6963,49 +6418,6 @@
           </a:bodyPr>
           <a:lstStyle/>
           <a:p>
-            <a:r>
-              <a:rPr sz="1100" b="1" i="0">
-                <a:solidFill>
-                  <a:srgbClr val="2A2929"/>
-                </a:solidFill>
-                <a:latin typeface="Roboto"/>
-              </a:rPr>
-              <a:t>Kangan </a:t>
-            </a:r>
-            <a:r>
-              <a:rPr sz="1100" b="1" i="0">
-                <a:solidFill>
-                  <a:srgbClr val="D68E10"/>
-                </a:solidFill>
-                <a:latin typeface="Roboto"/>
-              </a:rPr>
-              <a:t>Institute</a:t>
-            </a:r>
-          </a:p>
-        </p:txBody>
-      </p:sp>
-      <p:sp>
-        <p:nvSpPr>
-          <p:cNvPr id="10" name="TextBox 9"/>
-          <p:cNvSpPr txBox="1"/>
-          <p:nvPr/>
-        </p:nvSpPr>
-        <p:spPr>
-          <a:xfrm>
-            <a:off x="10515600" y="6400800"/>
-            <a:ext cx="1188720" cy="320040"/>
-          </a:xfrm>
-          <a:prstGeom prst="rect">
-            <a:avLst/>
-          </a:prstGeom>
-          <a:noFill/>
-        </p:spPr>
-        <p:txBody>
-          <a:bodyPr wrap="square" anchor="t" lIns="0" rIns="0" tIns="0" bIns="0">
-            <a:spAutoFit/>
-          </a:bodyPr>
-          <a:lstStyle/>
-          <a:p>
             <a:pPr algn="r"/>
             <a:r>
               <a:rPr sz="1100" b="0" i="0">
@@ -7014,7 +6426,7 @@
                 </a:solidFill>
                 <a:latin typeface="Roboto"/>
               </a:rPr>
-              <a:t>11</a:t>
+              <a:t/>
             </a:r>
           </a:p>
         </p:txBody>
@@ -7047,14 +6459,48 @@
       <p:grpSpPr/>
       <p:sp>
         <p:nvSpPr>
-          <p:cNvPr id="2" name="Rectangle 1"/>
+          <p:cNvPr id="2" name="TextBox 1"/>
+          <p:cNvSpPr txBox="1"/>
+          <p:nvPr/>
+        </p:nvSpPr>
+        <p:spPr>
+          <a:xfrm>
+            <a:off x="640080" y="457200"/>
+            <a:ext cx="10881360" cy="960120"/>
+          </a:xfrm>
+          <a:prstGeom prst="rect">
+            <a:avLst/>
+          </a:prstGeom>
+          <a:noFill/>
+        </p:spPr>
+        <p:txBody>
+          <a:bodyPr wrap="square" anchor="t" lIns="0" rIns="0" tIns="0" bIns="0">
+            <a:spAutoFit/>
+          </a:bodyPr>
+          <a:lstStyle/>
+          <a:p>
+            <a:r>
+              <a:rPr sz="2800" b="1" i="0">
+                <a:solidFill>
+                  <a:srgbClr val="2A2929"/>
+                </a:solidFill>
+                <a:latin typeface="Roboto"/>
+              </a:rPr>
+              <a:t>Object storage, and what it is for</a:t>
+            </a:r>
+          </a:p>
+        </p:txBody>
+      </p:sp>
+      <p:sp>
+        <p:nvSpPr>
+          <p:cNvPr id="3" name="Rectangle 2"/>
           <p:cNvSpPr/>
           <p:nvPr/>
         </p:nvSpPr>
         <p:spPr>
           <a:xfrm>
-            <a:off x="0" y="0"/>
-            <a:ext cx="3931920" cy="6858000"/>
+            <a:off x="658368" y="1371600"/>
+            <a:ext cx="1463040" cy="50800"/>
           </a:xfrm>
           <a:prstGeom prst="rect">
             <a:avLst/>
@@ -7091,14 +6537,14 @@
       </p:sp>
       <p:sp>
         <p:nvSpPr>
-          <p:cNvPr id="3" name="TextBox 2"/>
+          <p:cNvPr id="4" name="TextBox 3"/>
           <p:cNvSpPr txBox="1"/>
           <p:nvPr/>
         </p:nvSpPr>
         <p:spPr>
           <a:xfrm>
-            <a:off x="365760" y="2103120"/>
-            <a:ext cx="3291840" cy="2194560"/>
+            <a:off x="658368" y="1691640"/>
+            <a:ext cx="10881360" cy="4480560"/>
           </a:xfrm>
           <a:prstGeom prst="rect">
             <a:avLst/>
@@ -7106,85 +6552,101 @@
           <a:noFill/>
         </p:spPr>
         <p:txBody>
-          <a:bodyPr wrap="square" anchor="t" lIns="0" rIns="0" tIns="0" bIns="0">
+          <a:bodyPr wrap="square" anchor="ctr" lIns="0" rIns="0" tIns="0" bIns="0">
             <a:spAutoFit/>
           </a:bodyPr>
           <a:lstStyle/>
           <a:p>
-            <a:r>
-              <a:rPr sz="13000" b="1" i="0">
-                <a:solidFill>
-                  <a:srgbClr val="FFFFFF"/>
-                </a:solidFill>
-                <a:latin typeface="Roboto"/>
-              </a:rPr>
-              <a:t>03</a:t>
-            </a:r>
-          </a:p>
-        </p:txBody>
-      </p:sp>
-      <p:sp>
-        <p:nvSpPr>
-          <p:cNvPr id="4" name="TextBox 3"/>
-          <p:cNvSpPr txBox="1"/>
-          <p:nvPr/>
-        </p:nvSpPr>
-        <p:spPr>
-          <a:xfrm>
-            <a:off x="4480560" y="2468880"/>
-            <a:ext cx="7132320" cy="2194560"/>
-          </a:xfrm>
-          <a:prstGeom prst="rect">
-            <a:avLst/>
-          </a:prstGeom>
-          <a:noFill/>
-        </p:spPr>
-        <p:txBody>
-          <a:bodyPr wrap="square" anchor="t" lIns="0" rIns="0" tIns="0" bIns="0">
-            <a:spAutoFit/>
-          </a:bodyPr>
-          <a:lstStyle/>
-          <a:p>
-            <a:r>
-              <a:rPr sz="1600" b="1" i="0">
-                <a:solidFill>
-                  <a:srgbClr val="205F61"/>
-                </a:solidFill>
-                <a:latin typeface="Roboto"/>
-              </a:rPr>
-              <a:t>SECTION</a:t>
-            </a:r>
-          </a:p>
-          <a:p>
-            <a:pPr>
+            <a:pPr marL="0" indent="0">
+              <a:lnSpc>
+                <a:spcPct val="105000"/>
+              </a:lnSpc>
               <a:spcBef>
-                <a:spcPts val="600"/>
+                <a:spcPts val="0"/>
               </a:spcBef>
+              <a:spcAft>
+                <a:spcPts val="1000"/>
+              </a:spcAft>
             </a:pPr>
             <a:r>
-              <a:rPr sz="3800" b="1" i="0">
+              <a:rPr sz="2400" b="1" i="0">
+                <a:solidFill>
+                  <a:srgbClr val="EDAB0C"/>
+                </a:solidFill>
+                <a:latin typeface="Roboto"/>
+              </a:rPr>
+              <a:t>■  </a:t>
+            </a:r>
+            <a:r>
+              <a:rPr sz="2400" b="0" i="0">
                 <a:solidFill>
                   <a:srgbClr val="2A2929"/>
                 </a:solidFill>
                 <a:latin typeface="Roboto"/>
               </a:rPr>
-              <a:t>Security layers underpinning the design</a:t>
-            </a:r>
-          </a:p>
-          <a:p>
-            <a:pPr>
+              <a:t>Object storage holds whole objects addressed by key — it scales on demand and serves static content directly, no server involved.</a:t>
+            </a:r>
+          </a:p>
+          <a:p>
+            <a:pPr marL="0" indent="0">
+              <a:lnSpc>
+                <a:spcPct val="105000"/>
+              </a:lnSpc>
               <a:spcBef>
+                <a:spcPts val="0"/>
+              </a:spcBef>
+              <a:spcAft>
                 <a:spcPts val="1000"/>
+              </a:spcAft>
+            </a:pPr>
+            <a:r>
+              <a:rPr sz="2400" b="1" i="0">
+                <a:solidFill>
+                  <a:srgbClr val="EDAB0C"/>
+                </a:solidFill>
+                <a:latin typeface="Roboto"/>
+              </a:rPr>
+              <a:t>■  </a:t>
+            </a:r>
+            <a:r>
+              <a:rPr sz="2400" b="0" i="0">
+                <a:solidFill>
+                  <a:srgbClr val="2A2929"/>
+                </a:solidFill>
+                <a:latin typeface="Roboto"/>
+              </a:rPr>
+              <a:t>The natural home for a static website's content: pages, images, downloads.</a:t>
+            </a:r>
+          </a:p>
+          <a:p>
+            <a:pPr marL="0" indent="0">
+              <a:lnSpc>
+                <a:spcPct val="105000"/>
+              </a:lnSpc>
+              <a:spcBef>
+                <a:spcPts val="0"/>
               </a:spcBef>
+              <a:spcAft>
+                <a:spcPts val="1000"/>
+              </a:spcAft>
             </a:pPr>
             <a:r>
-              <a:rPr sz="2000" b="0" i="1">
-                <a:solidFill>
-                  <a:srgbClr val="484848"/>
-                </a:solidFill>
-                <a:latin typeface="Roboto Light"/>
-              </a:rPr>
-              <a:t>the improvement stays secure</a:t>
+              <a:rPr sz="2400" b="1" i="0">
+                <a:solidFill>
+                  <a:srgbClr val="EDAB0C"/>
+                </a:solidFill>
+                <a:latin typeface="Roboto"/>
+              </a:rPr>
+              <a:t>■  </a:t>
+            </a:r>
+            <a:r>
+              <a:rPr sz="2400" b="0" i="0">
+                <a:solidFill>
+                  <a:srgbClr val="2A2929"/>
+                </a:solidFill>
+                <a:latin typeface="Roboto"/>
+              </a:rPr>
+              <a:t>A stateful, transactional, database-backed system is the opposite workload — object storage is not its primary store.</a:t>
             </a:r>
           </a:p>
         </p:txBody>
@@ -7306,7 +6768,7 @@
                 </a:solidFill>
                 <a:latin typeface="Roboto"/>
               </a:rPr>
-              <a:t/>
+              <a:t>11</a:t>
             </a:r>
           </a:p>
         </p:txBody>
@@ -7339,48 +6801,14 @@
       <p:grpSpPr/>
       <p:sp>
         <p:nvSpPr>
-          <p:cNvPr id="2" name="TextBox 1"/>
-          <p:cNvSpPr txBox="1"/>
-          <p:nvPr/>
-        </p:nvSpPr>
-        <p:spPr>
-          <a:xfrm>
-            <a:off x="640080" y="457200"/>
-            <a:ext cx="10881360" cy="960120"/>
-          </a:xfrm>
-          <a:prstGeom prst="rect">
-            <a:avLst/>
-          </a:prstGeom>
-          <a:noFill/>
-        </p:spPr>
-        <p:txBody>
-          <a:bodyPr wrap="square" anchor="t" lIns="0" rIns="0" tIns="0" bIns="0">
-            <a:spAutoFit/>
-          </a:bodyPr>
-          <a:lstStyle/>
-          <a:p>
-            <a:r>
-              <a:rPr sz="2800" b="1" i="0">
-                <a:solidFill>
-                  <a:srgbClr val="2A2929"/>
-                </a:solidFill>
-                <a:latin typeface="Roboto"/>
-              </a:rPr>
-              <a:t>Security layers that keep the design secure</a:t>
-            </a:r>
-          </a:p>
-        </p:txBody>
-      </p:sp>
-      <p:sp>
-        <p:nvSpPr>
-          <p:cNvPr id="3" name="Rectangle 2"/>
+          <p:cNvPr id="2" name="Rectangle 1"/>
           <p:cNvSpPr/>
           <p:nvPr/>
         </p:nvSpPr>
         <p:spPr>
           <a:xfrm>
-            <a:off x="658368" y="1371600"/>
-            <a:ext cx="1463040" cy="50800"/>
+            <a:off x="0" y="0"/>
+            <a:ext cx="12191695" cy="1234440"/>
           </a:xfrm>
           <a:prstGeom prst="rect">
             <a:avLst/>
@@ -7417,14 +6845,67 @@
       </p:sp>
       <p:sp>
         <p:nvSpPr>
+          <p:cNvPr id="3" name="Rounded Rectangle 2"/>
+          <p:cNvSpPr/>
+          <p:nvPr/>
+        </p:nvSpPr>
+        <p:spPr>
+          <a:xfrm>
+            <a:off x="640080" y="384048"/>
+            <a:ext cx="1691640" cy="457200"/>
+          </a:xfrm>
+          <a:prstGeom prst="roundRect">
+            <a:avLst/>
+          </a:prstGeom>
+          <a:solidFill>
+            <a:srgbClr val="2A2929"/>
+          </a:solidFill>
+          <a:ln>
+            <a:noFill/>
+          </a:ln>
+          <a:effectLst/>
+        </p:spPr>
+        <p:style>
+          <a:lnRef idx="1">
+            <a:schemeClr val="accent1"/>
+          </a:lnRef>
+          <a:fillRef idx="3">
+            <a:schemeClr val="accent1"/>
+          </a:fillRef>
+          <a:effectRef idx="2">
+            <a:schemeClr val="accent1"/>
+          </a:effectRef>
+          <a:fontRef idx="minor">
+            <a:schemeClr val="lt1"/>
+          </a:fontRef>
+        </p:style>
+        <p:txBody>
+          <a:bodyPr rtlCol="0" anchor="ctr"/>
+          <a:lstStyle/>
+          <a:p>
+            <a:pPr algn="ctr"/>
+            <a:r>
+              <a:rPr sz="1400" b="1" i="0">
+                <a:solidFill>
+                  <a:srgbClr val="FBB900"/>
+                </a:solidFill>
+                <a:latin typeface="Roboto"/>
+              </a:rPr>
+              <a:t>ACTIVITY</a:t>
+            </a:r>
+          </a:p>
+        </p:txBody>
+      </p:sp>
+      <p:sp>
+        <p:nvSpPr>
           <p:cNvPr id="4" name="TextBox 3"/>
           <p:cNvSpPr txBox="1"/>
           <p:nvPr/>
         </p:nvSpPr>
         <p:spPr>
           <a:xfrm>
-            <a:off x="658368" y="1691640"/>
-            <a:ext cx="10881360" cy="4480560"/>
+            <a:off x="2560320" y="310896"/>
+            <a:ext cx="8961120" cy="685800"/>
           </a:xfrm>
           <a:prstGeom prst="rect">
             <a:avLst/>
@@ -7433,6 +6914,40 @@
         </p:spPr>
         <p:txBody>
           <a:bodyPr wrap="square" anchor="ctr" lIns="0" rIns="0" tIns="0" bIns="0">
+            <a:spAutoFit/>
+          </a:bodyPr>
+          <a:lstStyle/>
+          <a:p>
+            <a:r>
+              <a:rPr sz="2600" b="1" i="0">
+                <a:solidFill>
+                  <a:srgbClr val="FFFFFF"/>
+                </a:solidFill>
+                <a:latin typeface="Roboto"/>
+              </a:rPr>
+              <a:t>Answer the object-storage question</a:t>
+            </a:r>
+          </a:p>
+        </p:txBody>
+      </p:sp>
+      <p:sp>
+        <p:nvSpPr>
+          <p:cNvPr id="5" name="TextBox 4"/>
+          <p:cNvSpPr txBox="1"/>
+          <p:nvPr/>
+        </p:nvSpPr>
+        <p:spPr>
+          <a:xfrm>
+            <a:off x="658368" y="1554480"/>
+            <a:ext cx="10881360" cy="4297680"/>
+          </a:xfrm>
+          <a:prstGeom prst="rect">
+            <a:avLst/>
+          </a:prstGeom>
+          <a:noFill/>
+        </p:spPr>
+        <p:txBody>
+          <a:bodyPr wrap="square" anchor="t" lIns="0" rIns="0" tIns="0" bIns="0">
             <a:spAutoFit/>
           </a:bodyPr>
           <a:lstStyle/>
@@ -7449,7 +6964,7 @@
               </a:spcAft>
             </a:pPr>
             <a:r>
-              <a:rPr sz="2400" b="1" i="0">
+              <a:rPr sz="1700" b="1" i="0">
                 <a:solidFill>
                   <a:srgbClr val="EDAB0C"/>
                 </a:solidFill>
@@ -7458,13 +6973,13 @@
               <a:t>■  </a:t>
             </a:r>
             <a:r>
-              <a:rPr sz="2400" b="0" i="0">
+              <a:rPr sz="1700" b="0" i="0">
                 <a:solidFill>
                   <a:srgbClr val="2A2929"/>
                 </a:solidFill>
                 <a:latin typeface="Roboto"/>
               </a:rPr>
-              <a:t>The tools and uses of security layers in cloud services: network isolation, security groups, IAM least-privilege, and encryption as the baseline (KE 8).</a:t>
+              <a:t>The assessment's question Q2, rehearsed in writing.</a:t>
             </a:r>
           </a:p>
           <a:p>
@@ -7480,7 +6995,7 @@
               </a:spcAft>
             </a:pPr>
             <a:r>
-              <a:rPr sz="2400" b="1" i="0">
+              <a:rPr sz="1700" b="1" i="0">
                 <a:solidFill>
                   <a:srgbClr val="EDAB0C"/>
                 </a:solidFill>
@@ -7489,51 +7004,100 @@
               <a:t>■  </a:t>
             </a:r>
             <a:r>
-              <a:rPr sz="2400" b="0" i="0">
+              <a:rPr sz="1700" b="0" i="0">
                 <a:solidFill>
                   <a:srgbClr val="2A2929"/>
                 </a:solidFill>
                 <a:latin typeface="Roboto"/>
               </a:rPr>
-              <a:t>Encryption is assumed on by default (at rest and in transit) — including the cross-Region DR copy and the residency data.</a:t>
-            </a:r>
-          </a:p>
-          <a:p>
-            <a:pPr marL="0" indent="0">
-              <a:lnSpc>
-                <a:spcPct val="105000"/>
-              </a:lnSpc>
-              <a:spcBef>
-                <a:spcPts val="0"/>
-              </a:spcBef>
-              <a:spcAft>
-                <a:spcPts val="1000"/>
-              </a:spcAft>
-            </a:pPr>
-            <a:r>
-              <a:rPr sz="2400" b="1" i="0">
-                <a:solidFill>
-                  <a:srgbClr val="EDAB0C"/>
-                </a:solidFill>
-                <a:latin typeface="Roboto"/>
-              </a:rPr>
-              <a:t>■  </a:t>
-            </a:r>
-            <a:r>
-              <a:rPr sz="2400" b="0" i="0">
+              <a:t>Contrast a stateful accounting workload's storage needs with an object-storage-dependent website workload, and explain how you would provision the latter.</a:t>
+            </a:r>
+          </a:p>
+        </p:txBody>
+      </p:sp>
+      <p:sp>
+        <p:nvSpPr>
+          <p:cNvPr id="6" name="Rounded Rectangle 5"/>
+          <p:cNvSpPr/>
+          <p:nvPr/>
+        </p:nvSpPr>
+        <p:spPr>
+          <a:xfrm>
+            <a:off x="640080" y="5897880"/>
+            <a:ext cx="4023360" cy="457200"/>
+          </a:xfrm>
+          <a:prstGeom prst="roundRect">
+            <a:avLst/>
+          </a:prstGeom>
+          <a:solidFill>
+            <a:srgbClr val="F9F9F9"/>
+          </a:solidFill>
+          <a:ln w="12700">
+            <a:solidFill>
+              <a:srgbClr val="CCCCCC"/>
+            </a:solidFill>
+          </a:ln>
+          <a:effectLst/>
+        </p:spPr>
+        <p:style>
+          <a:lnRef idx="1">
+            <a:schemeClr val="accent1"/>
+          </a:lnRef>
+          <a:fillRef idx="3">
+            <a:schemeClr val="accent1"/>
+          </a:fillRef>
+          <a:effectRef idx="2">
+            <a:schemeClr val="accent1"/>
+          </a:effectRef>
+          <a:fontRef idx="minor">
+            <a:schemeClr val="lt1"/>
+          </a:fontRef>
+        </p:style>
+        <p:txBody>
+          <a:bodyPr rtlCol="0" anchor="ctr"/>
+          <a:lstStyle/>
+          <a:p>
+            <a:pPr algn="ctr"/>
+          </a:p>
+        </p:txBody>
+      </p:sp>
+      <p:sp>
+        <p:nvSpPr>
+          <p:cNvPr id="7" name="TextBox 6"/>
+          <p:cNvSpPr txBox="1"/>
+          <p:nvPr/>
+        </p:nvSpPr>
+        <p:spPr>
+          <a:xfrm>
+            <a:off x="822960" y="5943600"/>
+            <a:ext cx="3657600" cy="365760"/>
+          </a:xfrm>
+          <a:prstGeom prst="rect">
+            <a:avLst/>
+          </a:prstGeom>
+          <a:noFill/>
+        </p:spPr>
+        <p:txBody>
+          <a:bodyPr wrap="square" anchor="ctr" lIns="0" rIns="0" tIns="0" bIns="0">
+            <a:spAutoFit/>
+          </a:bodyPr>
+          <a:lstStyle/>
+          <a:p>
+            <a:r>
+              <a:rPr sz="1500" b="1" i="0">
                 <a:solidFill>
                   <a:srgbClr val="2A2929"/>
                 </a:solidFill>
                 <a:latin typeface="Roboto"/>
               </a:rPr>
-              <a:t>Reliability changes must not weaken security — each new tier (Multi-AZ app, DR copy) inherits the security layers, not bypasses them.</a:t>
-            </a:r>
-          </a:p>
-        </p:txBody>
-      </p:sp>
-      <p:sp>
-        <p:nvSpPr>
-          <p:cNvPr id="5" name="Rectangle 4"/>
+              <a:t>⏱  ~15 min</a:t>
+            </a:r>
+          </a:p>
+        </p:txBody>
+      </p:sp>
+      <p:sp>
+        <p:nvSpPr>
+          <p:cNvPr id="8" name="Rectangle 7"/>
           <p:cNvSpPr/>
           <p:nvPr/>
         </p:nvSpPr>
@@ -7577,7 +7141,7 @@
       </p:sp>
       <p:sp>
         <p:nvSpPr>
-          <p:cNvPr id="6" name="TextBox 5"/>
+          <p:cNvPr id="9" name="TextBox 8"/>
           <p:cNvSpPr txBox="1"/>
           <p:nvPr/>
         </p:nvSpPr>
@@ -7620,7 +7184,7 @@
       </p:sp>
       <p:sp>
         <p:nvSpPr>
-          <p:cNvPr id="7" name="TextBox 6"/>
+          <p:cNvPr id="10" name="TextBox 9"/>
           <p:cNvSpPr txBox="1"/>
           <p:nvPr/>
         </p:nvSpPr>
@@ -7667,7 +7231,7 @@
     <p:bg>
       <p:bgPr>
         <a:solidFill>
-          <a:srgbClr val="2A2929"/>
+          <a:srgbClr val="F9F9F9"/>
         </a:solidFill>
         <a:effectLst/>
       </p:bgPr>
@@ -7681,20 +7245,70 @@
       <p:grpSpPr/>
       <p:sp>
         <p:nvSpPr>
-          <p:cNvPr id="2" name="Rectangle 1"/>
+          <p:cNvPr id="2" name="TextBox 1"/>
+          <p:cNvSpPr txBox="1"/>
+          <p:nvPr/>
+        </p:nvSpPr>
+        <p:spPr>
+          <a:xfrm>
+            <a:off x="640080" y="548640"/>
+            <a:ext cx="10881360" cy="1097280"/>
+          </a:xfrm>
+          <a:prstGeom prst="rect">
+            <a:avLst/>
+          </a:prstGeom>
+          <a:noFill/>
+        </p:spPr>
+        <p:txBody>
+          <a:bodyPr wrap="square" anchor="t" lIns="0" rIns="0" tIns="0" bIns="0">
+            <a:spAutoFit/>
+          </a:bodyPr>
+          <a:lstStyle/>
+          <a:p>
+            <a:r>
+              <a:rPr sz="3200" b="1" i="0">
+                <a:solidFill>
+                  <a:srgbClr val="2A2929"/>
+                </a:solidFill>
+                <a:latin typeface="Roboto"/>
+              </a:rPr>
+              <a:t>Key takeaways</a:t>
+            </a:r>
+          </a:p>
+          <a:p>
+            <a:pPr>
+              <a:spcBef>
+                <a:spcPts val="200"/>
+              </a:spcBef>
+            </a:pPr>
+            <a:r>
+              <a:rPr sz="1800" b="1" i="0">
+                <a:solidFill>
+                  <a:srgbClr val="205F61"/>
+                </a:solidFill>
+                <a:latin typeface="Roboto"/>
+              </a:rPr>
+              <a:t>Topic 2 · Key takeaways</a:t>
+            </a:r>
+          </a:p>
+        </p:txBody>
+      </p:sp>
+      <p:sp>
+        <p:nvSpPr>
+          <p:cNvPr id="3" name="Rectangle 2"/>
           <p:cNvSpPr/>
           <p:nvPr/>
         </p:nvSpPr>
         <p:spPr>
           <a:xfrm>
-            <a:off x="0" y="0"/>
-            <a:ext cx="411480" cy="6858000"/>
+            <a:off x="658368" y="1600200"/>
+            <a:ext cx="1463040" cy="50800"/>
           </a:xfrm>
           <a:prstGeom prst="rect">
             <a:avLst/>
           </a:prstGeom>
           <a:solidFill>
-            <a:srgbClr val="EDAB0C"/>
+            <a:srgbClr val="205F61"/>
           </a:solidFill>
           <a:ln>
             <a:noFill/>
@@ -7725,14 +7339,445 @@
       </p:sp>
       <p:sp>
         <p:nvSpPr>
-          <p:cNvPr id="3" name="TextBox 2"/>
+          <p:cNvPr id="4" name="Rectangle 3"/>
+          <p:cNvSpPr/>
+          <p:nvPr/>
+        </p:nvSpPr>
+        <p:spPr>
+          <a:xfrm>
+            <a:off x="640080" y="1965960"/>
+            <a:ext cx="10927080" cy="841248"/>
+          </a:xfrm>
+          <a:prstGeom prst="rect">
+            <a:avLst/>
+          </a:prstGeom>
+          <a:solidFill>
+            <a:srgbClr val="FFFFFF"/>
+          </a:solidFill>
+          <a:ln w="12700">
+            <a:solidFill>
+              <a:srgbClr val="CCCCCC"/>
+            </a:solidFill>
+          </a:ln>
+          <a:effectLst/>
+        </p:spPr>
+        <p:style>
+          <a:lnRef idx="1">
+            <a:schemeClr val="accent1"/>
+          </a:lnRef>
+          <a:fillRef idx="3">
+            <a:schemeClr val="accent1"/>
+          </a:fillRef>
+          <a:effectRef idx="2">
+            <a:schemeClr val="accent1"/>
+          </a:effectRef>
+          <a:fontRef idx="minor">
+            <a:schemeClr val="lt1"/>
+          </a:fontRef>
+        </p:style>
+        <p:txBody>
+          <a:bodyPr rtlCol="0" anchor="ctr"/>
+          <a:lstStyle/>
+          <a:p>
+            <a:pPr algn="ctr"/>
+          </a:p>
+        </p:txBody>
+      </p:sp>
+      <p:sp>
+        <p:nvSpPr>
+          <p:cNvPr id="5" name="Rectangle 4"/>
+          <p:cNvSpPr/>
+          <p:nvPr/>
+        </p:nvSpPr>
+        <p:spPr>
+          <a:xfrm>
+            <a:off x="640080" y="1965960"/>
+            <a:ext cx="109728" cy="841248"/>
+          </a:xfrm>
+          <a:prstGeom prst="rect">
+            <a:avLst/>
+          </a:prstGeom>
+          <a:solidFill>
+            <a:srgbClr val="205F61"/>
+          </a:solidFill>
+          <a:ln>
+            <a:noFill/>
+          </a:ln>
+          <a:effectLst/>
+        </p:spPr>
+        <p:style>
+          <a:lnRef idx="1">
+            <a:schemeClr val="accent1"/>
+          </a:lnRef>
+          <a:fillRef idx="3">
+            <a:schemeClr val="accent1"/>
+          </a:fillRef>
+          <a:effectRef idx="2">
+            <a:schemeClr val="accent1"/>
+          </a:effectRef>
+          <a:fontRef idx="minor">
+            <a:schemeClr val="lt1"/>
+          </a:fontRef>
+        </p:style>
+        <p:txBody>
+          <a:bodyPr rtlCol="0" anchor="ctr"/>
+          <a:lstStyle/>
+          <a:p>
+            <a:pPr algn="ctr"/>
+          </a:p>
+        </p:txBody>
+      </p:sp>
+      <p:sp>
+        <p:nvSpPr>
+          <p:cNvPr id="6" name="TextBox 5"/>
           <p:cNvSpPr txBox="1"/>
           <p:nvPr/>
         </p:nvSpPr>
         <p:spPr>
           <a:xfrm>
-            <a:off x="914400" y="1463040"/>
-            <a:ext cx="10515600" cy="4023360"/>
+            <a:off x="960120" y="1965960"/>
+            <a:ext cx="10424160" cy="841248"/>
+          </a:xfrm>
+          <a:prstGeom prst="rect">
+            <a:avLst/>
+          </a:prstGeom>
+          <a:noFill/>
+        </p:spPr>
+        <p:txBody>
+          <a:bodyPr wrap="square" anchor="ctr" lIns="0" rIns="0" tIns="0" bIns="0">
+            <a:spAutoFit/>
+          </a:bodyPr>
+          <a:lstStyle/>
+          <a:p>
+            <a:pPr>
+              <a:lnSpc>
+                <a:spcPct val="100000"/>
+              </a:lnSpc>
+            </a:pPr>
+            <a:r>
+              <a:rPr sz="1700" b="0" i="0">
+                <a:solidFill>
+                  <a:srgbClr val="2A2929"/>
+                </a:solidFill>
+                <a:latin typeface="Roboto"/>
+              </a:rPr>
+              <a:t>Metrics first: a number with a target for every goal, written to be tested against.</a:t>
+            </a:r>
+          </a:p>
+        </p:txBody>
+      </p:sp>
+      <p:sp>
+        <p:nvSpPr>
+          <p:cNvPr id="7" name="Rectangle 6"/>
+          <p:cNvSpPr/>
+          <p:nvPr/>
+        </p:nvSpPr>
+        <p:spPr>
+          <a:xfrm>
+            <a:off x="640080" y="2916936"/>
+            <a:ext cx="10927080" cy="841248"/>
+          </a:xfrm>
+          <a:prstGeom prst="rect">
+            <a:avLst/>
+          </a:prstGeom>
+          <a:solidFill>
+            <a:srgbClr val="FFFFFF"/>
+          </a:solidFill>
+          <a:ln w="12700">
+            <a:solidFill>
+              <a:srgbClr val="CCCCCC"/>
+            </a:solidFill>
+          </a:ln>
+          <a:effectLst/>
+        </p:spPr>
+        <p:style>
+          <a:lnRef idx="1">
+            <a:schemeClr val="accent1"/>
+          </a:lnRef>
+          <a:fillRef idx="3">
+            <a:schemeClr val="accent1"/>
+          </a:fillRef>
+          <a:effectRef idx="2">
+            <a:schemeClr val="accent1"/>
+          </a:effectRef>
+          <a:fontRef idx="minor">
+            <a:schemeClr val="lt1"/>
+          </a:fontRef>
+        </p:style>
+        <p:txBody>
+          <a:bodyPr rtlCol="0" anchor="ctr"/>
+          <a:lstStyle/>
+          <a:p>
+            <a:pPr algn="ctr"/>
+          </a:p>
+        </p:txBody>
+      </p:sp>
+      <p:sp>
+        <p:nvSpPr>
+          <p:cNvPr id="8" name="Rectangle 7"/>
+          <p:cNvSpPr/>
+          <p:nvPr/>
+        </p:nvSpPr>
+        <p:spPr>
+          <a:xfrm>
+            <a:off x="640080" y="2916936"/>
+            <a:ext cx="109728" cy="841248"/>
+          </a:xfrm>
+          <a:prstGeom prst="rect">
+            <a:avLst/>
+          </a:prstGeom>
+          <a:solidFill>
+            <a:srgbClr val="205F61"/>
+          </a:solidFill>
+          <a:ln>
+            <a:noFill/>
+          </a:ln>
+          <a:effectLst/>
+        </p:spPr>
+        <p:style>
+          <a:lnRef idx="1">
+            <a:schemeClr val="accent1"/>
+          </a:lnRef>
+          <a:fillRef idx="3">
+            <a:schemeClr val="accent1"/>
+          </a:fillRef>
+          <a:effectRef idx="2">
+            <a:schemeClr val="accent1"/>
+          </a:effectRef>
+          <a:fontRef idx="minor">
+            <a:schemeClr val="lt1"/>
+          </a:fontRef>
+        </p:style>
+        <p:txBody>
+          <a:bodyPr rtlCol="0" anchor="ctr"/>
+          <a:lstStyle/>
+          <a:p>
+            <a:pPr algn="ctr"/>
+          </a:p>
+        </p:txBody>
+      </p:sp>
+      <p:sp>
+        <p:nvSpPr>
+          <p:cNvPr id="9" name="TextBox 8"/>
+          <p:cNvSpPr txBox="1"/>
+          <p:nvPr/>
+        </p:nvSpPr>
+        <p:spPr>
+          <a:xfrm>
+            <a:off x="960120" y="2916936"/>
+            <a:ext cx="10424160" cy="841248"/>
+          </a:xfrm>
+          <a:prstGeom prst="rect">
+            <a:avLst/>
+          </a:prstGeom>
+          <a:noFill/>
+        </p:spPr>
+        <p:txBody>
+          <a:bodyPr wrap="square" anchor="ctr" lIns="0" rIns="0" tIns="0" bIns="0">
+            <a:spAutoFit/>
+          </a:bodyPr>
+          <a:lstStyle/>
+          <a:p>
+            <a:pPr>
+              <a:lnSpc>
+                <a:spcPct val="100000"/>
+              </a:lnSpc>
+            </a:pPr>
+            <a:r>
+              <a:rPr sz="1700" b="0" i="0">
+                <a:solidFill>
+                  <a:srgbClr val="2A2929"/>
+                </a:solidFill>
+                <a:latin typeface="Roboto"/>
+              </a:rPr>
+              <a:t>Four tiers, each selected and improved to a named need — simplest that fits.</a:t>
+            </a:r>
+          </a:p>
+        </p:txBody>
+      </p:sp>
+      <p:sp>
+        <p:nvSpPr>
+          <p:cNvPr id="10" name="Rectangle 9"/>
+          <p:cNvSpPr/>
+          <p:nvPr/>
+        </p:nvSpPr>
+        <p:spPr>
+          <a:xfrm>
+            <a:off x="640080" y="3867912"/>
+            <a:ext cx="10927080" cy="841248"/>
+          </a:xfrm>
+          <a:prstGeom prst="rect">
+            <a:avLst/>
+          </a:prstGeom>
+          <a:solidFill>
+            <a:srgbClr val="FFFFFF"/>
+          </a:solidFill>
+          <a:ln w="12700">
+            <a:solidFill>
+              <a:srgbClr val="CCCCCC"/>
+            </a:solidFill>
+          </a:ln>
+          <a:effectLst/>
+        </p:spPr>
+        <p:style>
+          <a:lnRef idx="1">
+            <a:schemeClr val="accent1"/>
+          </a:lnRef>
+          <a:fillRef idx="3">
+            <a:schemeClr val="accent1"/>
+          </a:fillRef>
+          <a:effectRef idx="2">
+            <a:schemeClr val="accent1"/>
+          </a:effectRef>
+          <a:fontRef idx="minor">
+            <a:schemeClr val="lt1"/>
+          </a:fontRef>
+        </p:style>
+        <p:txBody>
+          <a:bodyPr rtlCol="0" anchor="ctr"/>
+          <a:lstStyle/>
+          <a:p>
+            <a:pPr algn="ctr"/>
+          </a:p>
+        </p:txBody>
+      </p:sp>
+      <p:sp>
+        <p:nvSpPr>
+          <p:cNvPr id="11" name="Rectangle 10"/>
+          <p:cNvSpPr/>
+          <p:nvPr/>
+        </p:nvSpPr>
+        <p:spPr>
+          <a:xfrm>
+            <a:off x="640080" y="3867912"/>
+            <a:ext cx="109728" cy="841248"/>
+          </a:xfrm>
+          <a:prstGeom prst="rect">
+            <a:avLst/>
+          </a:prstGeom>
+          <a:solidFill>
+            <a:srgbClr val="205F61"/>
+          </a:solidFill>
+          <a:ln>
+            <a:noFill/>
+          </a:ln>
+          <a:effectLst/>
+        </p:spPr>
+        <p:style>
+          <a:lnRef idx="1">
+            <a:schemeClr val="accent1"/>
+          </a:lnRef>
+          <a:fillRef idx="3">
+            <a:schemeClr val="accent1"/>
+          </a:fillRef>
+          <a:effectRef idx="2">
+            <a:schemeClr val="accent1"/>
+          </a:effectRef>
+          <a:fontRef idx="minor">
+            <a:schemeClr val="lt1"/>
+          </a:fontRef>
+        </p:style>
+        <p:txBody>
+          <a:bodyPr rtlCol="0" anchor="ctr"/>
+          <a:lstStyle/>
+          <a:p>
+            <a:pPr algn="ctr"/>
+          </a:p>
+        </p:txBody>
+      </p:sp>
+      <p:sp>
+        <p:nvSpPr>
+          <p:cNvPr id="12" name="TextBox 11"/>
+          <p:cNvSpPr txBox="1"/>
+          <p:nvPr/>
+        </p:nvSpPr>
+        <p:spPr>
+          <a:xfrm>
+            <a:off x="960120" y="3867912"/>
+            <a:ext cx="10424160" cy="841248"/>
+          </a:xfrm>
+          <a:prstGeom prst="rect">
+            <a:avLst/>
+          </a:prstGeom>
+          <a:noFill/>
+        </p:spPr>
+        <p:txBody>
+          <a:bodyPr wrap="square" anchor="ctr" lIns="0" rIns="0" tIns="0" bIns="0">
+            <a:spAutoFit/>
+          </a:bodyPr>
+          <a:lstStyle/>
+          <a:p>
+            <a:pPr>
+              <a:lnSpc>
+                <a:spcPct val="100000"/>
+              </a:lnSpc>
+            </a:pPr>
+            <a:r>
+              <a:rPr sz="1700" b="0" i="0">
+                <a:solidFill>
+                  <a:srgbClr val="2A2929"/>
+                </a:solidFill>
+                <a:latin typeface="Roboto"/>
+              </a:rPr>
+              <a:t>Object storage suits static content; a transactional system is the contrast to know.</a:t>
+            </a:r>
+          </a:p>
+        </p:txBody>
+      </p:sp>
+      <p:sp>
+        <p:nvSpPr>
+          <p:cNvPr id="13" name="Rectangle 12"/>
+          <p:cNvSpPr/>
+          <p:nvPr/>
+        </p:nvSpPr>
+        <p:spPr>
+          <a:xfrm>
+            <a:off x="0" y="6565392"/>
+            <a:ext cx="12191695" cy="38100"/>
+          </a:xfrm>
+          <a:prstGeom prst="rect">
+            <a:avLst/>
+          </a:prstGeom>
+          <a:solidFill>
+            <a:srgbClr val="205F61"/>
+          </a:solidFill>
+          <a:ln>
+            <a:noFill/>
+          </a:ln>
+          <a:effectLst/>
+        </p:spPr>
+        <p:style>
+          <a:lnRef idx="1">
+            <a:schemeClr val="accent1"/>
+          </a:lnRef>
+          <a:fillRef idx="3">
+            <a:schemeClr val="accent1"/>
+          </a:fillRef>
+          <a:effectRef idx="2">
+            <a:schemeClr val="accent1"/>
+          </a:effectRef>
+          <a:fontRef idx="minor">
+            <a:schemeClr val="lt1"/>
+          </a:fontRef>
+        </p:style>
+        <p:txBody>
+          <a:bodyPr rtlCol="0" anchor="ctr"/>
+          <a:lstStyle/>
+          <a:p>
+            <a:pPr algn="ctr"/>
+          </a:p>
+        </p:txBody>
+      </p:sp>
+      <p:sp>
+        <p:nvSpPr>
+          <p:cNvPr id="14" name="TextBox 13"/>
+          <p:cNvSpPr txBox="1"/>
+          <p:nvPr/>
+        </p:nvSpPr>
+        <p:spPr>
+          <a:xfrm>
+            <a:off x="502920" y="6400800"/>
+            <a:ext cx="5486400" cy="320040"/>
           </a:xfrm>
           <a:prstGeom prst="rect">
             <a:avLst/>
@@ -7746,89 +7791,57 @@
           <a:lstStyle/>
           <a:p>
             <a:r>
-              <a:rPr sz="4000" b="1" i="0">
-                <a:solidFill>
-                  <a:srgbClr val="FFFFFF"/>
-                </a:solidFill>
-                <a:latin typeface="Roboto"/>
-              </a:rPr>
-              <a:t>Topic 2 · Key takeaways</a:t>
-            </a:r>
-          </a:p>
-          <a:p>
-            <a:pPr>
-              <a:lnSpc>
-                <a:spcPct val="105000"/>
-              </a:lnSpc>
-              <a:spcBef>
-                <a:spcPts val="1200"/>
-              </a:spcBef>
-            </a:pPr>
-            <a:r>
-              <a:rPr sz="1900" b="0" i="0">
-                <a:solidFill>
-                  <a:srgbClr val="E8E8E8"/>
-                </a:solidFill>
-                <a:latin typeface="Roboto Light"/>
-              </a:rPr>
-              <a:t>Reliability = Multi-AZ app tier + DB backup/restore + cross-Region DR to Melbourne (data onshore).</a:t>
-            </a:r>
-          </a:p>
-          <a:p>
-            <a:pPr>
-              <a:lnSpc>
-                <a:spcPct val="105000"/>
-              </a:lnSpc>
-              <a:spcBef>
-                <a:spcPts val="1200"/>
-              </a:spcBef>
-            </a:pPr>
-            <a:r>
-              <a:rPr sz="1900" b="0" i="0">
-                <a:solidFill>
-                  <a:srgbClr val="E8E8E8"/>
-                </a:solidFill>
-                <a:latin typeface="Roboto Light"/>
-              </a:rPr>
-              <a:t>The centrepiece: reject a Multi-AZ database — the DB is single-AZ by a cost-benefit call, argued explicitly.</a:t>
-            </a:r>
-          </a:p>
-          <a:p>
-            <a:pPr>
-              <a:lnSpc>
-                <a:spcPct val="105000"/>
-              </a:lnSpc>
-              <a:spcBef>
-                <a:spcPts val="1200"/>
-              </a:spcBef>
-            </a:pPr>
-            <a:r>
-              <a:rPr sz="1900" b="0" i="0">
-                <a:solidFill>
-                  <a:srgbClr val="E8E8E8"/>
-                </a:solidFill>
-                <a:latin typeface="Roboto Light"/>
-              </a:rPr>
-              <a:t>Justify every reliability choice against a goal and against cost; don't over-engineer.</a:t>
-            </a:r>
-          </a:p>
-          <a:p>
-            <a:pPr>
-              <a:lnSpc>
-                <a:spcPct val="105000"/>
-              </a:lnSpc>
-              <a:spcBef>
-                <a:spcPts val="1200"/>
-              </a:spcBef>
-            </a:pPr>
-            <a:r>
-              <a:rPr sz="1900" b="0" i="0">
-                <a:solidFill>
-                  <a:srgbClr val="E8E8E8"/>
-                </a:solidFill>
-                <a:latin typeface="Roboto Light"/>
-              </a:rPr>
-              <a:t>Cloud design/migration principles and encryption-baseline security layers underpin the whole improvement.</a:t>
+              <a:rPr sz="1100" b="1" i="0">
+                <a:solidFill>
+                  <a:srgbClr val="2A2929"/>
+                </a:solidFill>
+                <a:latin typeface="Roboto"/>
+              </a:rPr>
+              <a:t>Kangan </a:t>
+            </a:r>
+            <a:r>
+              <a:rPr sz="1100" b="1" i="0">
+                <a:solidFill>
+                  <a:srgbClr val="D68E10"/>
+                </a:solidFill>
+                <a:latin typeface="Roboto"/>
+              </a:rPr>
+              <a:t>Institute</a:t>
+            </a:r>
+          </a:p>
+        </p:txBody>
+      </p:sp>
+      <p:sp>
+        <p:nvSpPr>
+          <p:cNvPr id="15" name="TextBox 14"/>
+          <p:cNvSpPr txBox="1"/>
+          <p:nvPr/>
+        </p:nvSpPr>
+        <p:spPr>
+          <a:xfrm>
+            <a:off x="10515600" y="6400800"/>
+            <a:ext cx="1188720" cy="320040"/>
+          </a:xfrm>
+          <a:prstGeom prst="rect">
+            <a:avLst/>
+          </a:prstGeom>
+          <a:noFill/>
+        </p:spPr>
+        <p:txBody>
+          <a:bodyPr wrap="square" anchor="t" lIns="0" rIns="0" tIns="0" bIns="0">
+            <a:spAutoFit/>
+          </a:bodyPr>
+          <a:lstStyle/>
+          <a:p>
+            <a:pPr algn="r"/>
+            <a:r>
+              <a:rPr sz="1100" b="0" i="0">
+                <a:solidFill>
+                  <a:srgbClr val="7A7A7A"/>
+                </a:solidFill>
+                <a:latin typeface="Roboto"/>
+              </a:rPr>
+              <a:t>13</a:t>
             </a:r>
           </a:p>
         </p:txBody>
@@ -7932,7 +7945,7 @@
                 </a:solidFill>
                 <a:latin typeface="Roboto"/>
               </a:rPr>
-              <a:t>Next: Topic 3 — designing for scalability</a:t>
+              <a:t>Next: Topic 3 — security, reliability and cost</a:t>
             </a:r>
           </a:p>
           <a:p>
@@ -7951,7 +7964,7 @@
                 </a:solidFill>
                 <a:latin typeface="Roboto Light"/>
               </a:rPr>
-              <a:t>You've designed the reliability half of the Solution Design; next you design the scalability half and the four resource components.</a:t>
+              <a:t>The metrics are set and the four tiers are designed.</a:t>
             </a:r>
           </a:p>
           <a:p>
@@ -7970,7 +7983,7 @@
                 </a:solidFill>
                 <a:latin typeface="Roboto Light"/>
               </a:rPr>
-              <a:t>Bring this design — scalability builds on the same reviewed architecture.</a:t>
+              <a:t>Next the improvement designs: security, reliability and scalability, cost and monitoring — and the cost-benefit case that justifies them.</a:t>
             </a:r>
           </a:p>
         </p:txBody>
@@ -8030,7 +8043,7 @@
                 </a:solidFill>
                 <a:latin typeface="Roboto"/>
               </a:rPr>
-              <a:t>Designing for reliability</a:t>
+              <a:t>The design starts with a yardstick</a:t>
             </a:r>
           </a:p>
         </p:txBody>
@@ -8128,7 +8141,7 @@
                 </a:solidFill>
                 <a:latin typeface="Roboto"/>
               </a:rPr>
-              <a:t>Topic 2 continues AT1: with the goals set in Topic 1, you now design the changes that make Ledgerline's infrastructure reliable.</a:t>
+              <a:t>The analysis is done and the decisions are confirmed; now the design work starts.</a:t>
             </a:r>
           </a:p>
           <a:p>
@@ -8159,7 +8172,7 @@
                 </a:solidFill>
                 <a:latin typeface="Roboto"/>
               </a:rPr>
-              <a:t>Reliability, jointly with security, scalability and cost — improve the architecture without over-building it.</a:t>
+              <a:t>First the metrics — the numbers the improved system will be measured against — then the four resource tiers.</a:t>
             </a:r>
           </a:p>
           <a:p>
@@ -8190,7 +8203,7 @@
                 </a:solidFill>
                 <a:latin typeface="Roboto"/>
               </a:rPr>
-              <a:t>Target: application-tier Multi-AZ + database backup/restore + cross-Region DR to Melbourne (data stays in Australia).</a:t>
+              <a:t>Scalability here means elastic capacity-on-demand, demonstrable by test — not a forecast, and not over-provisioning.</a:t>
             </a:r>
           </a:p>
           <a:p>
@@ -8221,14 +8234,14 @@
                 </a:solidFill>
                 <a:latin typeface="Roboto"/>
               </a:rPr>
-              <a:t>Design only, to the goals — the build is AT3.</a:t>
+              <a:t>Design only, to the business needs — the build is AT3.</a:t>
             </a:r>
           </a:p>
         </p:txBody>
       </p:sp>
       <p:pic>
         <p:nvPicPr>
-          <p:cNvPr id="5" name="Picture 4" descr="gen-4ef48ddc.png"/>
+          <p:cNvPr id="5" name="Picture 4" descr="gen-5b848889.png"/>
           <p:cNvPicPr>
             <a:picLocks noChangeAspect="1"/>
           </p:cNvPicPr>
@@ -8521,7 +8534,7 @@
                 </a:solidFill>
                 <a:latin typeface="Roboto"/>
               </a:rPr>
-              <a:t>Reliability improvement design</a:t>
+              <a:t>Confirm the performance metrics</a:t>
             </a:r>
           </a:p>
           <a:p>
@@ -8537,7 +8550,7 @@
                 </a:solidFill>
                 <a:latin typeface="Roboto Light"/>
               </a:rPr>
-              <a:t>improve reliability to the goal, not beyond it</a:t>
+              <a:t>a number with a target, for every goal</a:t>
             </a:r>
           </a:p>
         </p:txBody>
@@ -8719,7 +8732,7 @@
                 </a:solidFill>
                 <a:latin typeface="Roboto"/>
               </a:rPr>
-              <a:t>What makes a cloud system reliable</a:t>
+              <a:t>From goals to metrics</a:t>
             </a:r>
           </a:p>
         </p:txBody>
@@ -8817,7 +8830,7 @@
                 </a:solidFill>
                 <a:latin typeface="Roboto"/>
               </a:rPr>
-              <a:t>Reliability = the system keeps serving through component and zone failures, and recovers from loss.</a:t>
+              <a:t>A goal is directional; a metric makes it measurable — a number with a target the improved system can be tested against.</a:t>
             </a:r>
           </a:p>
           <a:p>
@@ -8848,7 +8861,7 @@
                 </a:solidFill>
                 <a:latin typeface="Roboto"/>
               </a:rPr>
-              <a:t>Three building blocks: redundancy across Availability Zones (Multi-AZ), backup/restore, and cross-Region disaster recovery.</a:t>
+              <a:t>Evaluate and confirm the metrics for each goal: availability, recovery times, response time, cost per period.</a:t>
             </a:r>
           </a:p>
           <a:p>
@@ -8879,7 +8892,7 @@
                 </a:solidFill>
                 <a:latin typeface="Roboto"/>
               </a:rPr>
-              <a:t>Reliability is designed jointly with security, scalability and cost — each choice is a trade-off, not a maximum.</a:t>
+              <a:t>Write them so a later test can pass or fail against them — these numbers come back in the build.</a:t>
             </a:r>
           </a:p>
         </p:txBody>
@@ -9034,48 +9047,14 @@
       <p:grpSpPr/>
       <p:sp>
         <p:nvSpPr>
-          <p:cNvPr id="2" name="TextBox 1"/>
-          <p:cNvSpPr txBox="1"/>
-          <p:nvPr/>
-        </p:nvSpPr>
-        <p:spPr>
-          <a:xfrm>
-            <a:off x="640080" y="457200"/>
-            <a:ext cx="10881360" cy="960120"/>
-          </a:xfrm>
-          <a:prstGeom prst="rect">
-            <a:avLst/>
-          </a:prstGeom>
-          <a:noFill/>
-        </p:spPr>
-        <p:txBody>
-          <a:bodyPr wrap="square" anchor="t" lIns="0" rIns="0" tIns="0" bIns="0">
-            <a:spAutoFit/>
-          </a:bodyPr>
-          <a:lstStyle/>
-          <a:p>
-            <a:r>
-              <a:rPr sz="2800" b="1" i="0">
-                <a:solidFill>
-                  <a:srgbClr val="2A2929"/>
-                </a:solidFill>
-                <a:latin typeface="Roboto"/>
-              </a:rPr>
-              <a:t>Review the architecture, set the reliability target</a:t>
-            </a:r>
-          </a:p>
-        </p:txBody>
-      </p:sp>
-      <p:sp>
-        <p:nvSpPr>
-          <p:cNvPr id="3" name="Rectangle 2"/>
+          <p:cNvPr id="2" name="Rectangle 1"/>
           <p:cNvSpPr/>
           <p:nvPr/>
         </p:nvSpPr>
         <p:spPr>
           <a:xfrm>
-            <a:off x="658368" y="1371600"/>
-            <a:ext cx="1463040" cy="50800"/>
+            <a:off x="0" y="0"/>
+            <a:ext cx="12191695" cy="1234440"/>
           </a:xfrm>
           <a:prstGeom prst="rect">
             <a:avLst/>
@@ -9112,14 +9091,101 @@
       </p:sp>
       <p:sp>
         <p:nvSpPr>
+          <p:cNvPr id="3" name="Rounded Rectangle 2"/>
+          <p:cNvSpPr/>
+          <p:nvPr/>
+        </p:nvSpPr>
+        <p:spPr>
+          <a:xfrm>
+            <a:off x="640080" y="384048"/>
+            <a:ext cx="1691640" cy="457200"/>
+          </a:xfrm>
+          <a:prstGeom prst="roundRect">
+            <a:avLst/>
+          </a:prstGeom>
+          <a:solidFill>
+            <a:srgbClr val="2A2929"/>
+          </a:solidFill>
+          <a:ln>
+            <a:noFill/>
+          </a:ln>
+          <a:effectLst/>
+        </p:spPr>
+        <p:style>
+          <a:lnRef idx="1">
+            <a:schemeClr val="accent1"/>
+          </a:lnRef>
+          <a:fillRef idx="3">
+            <a:schemeClr val="accent1"/>
+          </a:fillRef>
+          <a:effectRef idx="2">
+            <a:schemeClr val="accent1"/>
+          </a:effectRef>
+          <a:fontRef idx="minor">
+            <a:schemeClr val="lt1"/>
+          </a:fontRef>
+        </p:style>
+        <p:txBody>
+          <a:bodyPr rtlCol="0" anchor="ctr"/>
+          <a:lstStyle/>
+          <a:p>
+            <a:pPr algn="ctr"/>
+            <a:r>
+              <a:rPr sz="1400" b="1" i="0">
+                <a:solidFill>
+                  <a:srgbClr val="FBB900"/>
+                </a:solidFill>
+                <a:latin typeface="Roboto"/>
+              </a:rPr>
+              <a:t>ACTIVITY</a:t>
+            </a:r>
+          </a:p>
+        </p:txBody>
+      </p:sp>
+      <p:sp>
+        <p:nvSpPr>
           <p:cNvPr id="4" name="TextBox 3"/>
           <p:cNvSpPr txBox="1"/>
           <p:nvPr/>
         </p:nvSpPr>
         <p:spPr>
           <a:xfrm>
-            <a:off x="658368" y="1737360"/>
-            <a:ext cx="5486400" cy="4297680"/>
+            <a:off x="2560320" y="310896"/>
+            <a:ext cx="8961120" cy="685800"/>
+          </a:xfrm>
+          <a:prstGeom prst="rect">
+            <a:avLst/>
+          </a:prstGeom>
+          <a:noFill/>
+        </p:spPr>
+        <p:txBody>
+          <a:bodyPr wrap="square" anchor="ctr" lIns="0" rIns="0" tIns="0" bIns="0">
+            <a:spAutoFit/>
+          </a:bodyPr>
+          <a:lstStyle/>
+          <a:p>
+            <a:r>
+              <a:rPr sz="2600" b="1" i="0">
+                <a:solidFill>
+                  <a:srgbClr val="FFFFFF"/>
+                </a:solidFill>
+                <a:latin typeface="Roboto"/>
+              </a:rPr>
+              <a:t>Confirm the metrics</a:t>
+            </a:r>
+          </a:p>
+        </p:txBody>
+      </p:sp>
+      <p:sp>
+        <p:nvSpPr>
+          <p:cNvPr id="5" name="TextBox 4"/>
+          <p:cNvSpPr txBox="1"/>
+          <p:nvPr/>
+        </p:nvSpPr>
+        <p:spPr>
+          <a:xfrm>
+            <a:off x="658368" y="1554480"/>
+            <a:ext cx="10881360" cy="4297680"/>
           </a:xfrm>
           <a:prstGeom prst="rect">
             <a:avLst/>
@@ -9159,7 +9225,7 @@
                 </a:solidFill>
                 <a:latin typeface="Roboto"/>
               </a:rPr>
-              <a:t>Review Ledgerline's single-AZ baseline against the reliability goals; name where a single failure takes the system down.</a:t>
+              <a:t>Workbook — task 8.</a:t>
             </a:r>
           </a:p>
           <a:p>
@@ -9190,69 +9256,94 @@
                 </a:solidFill>
                 <a:latin typeface="Roboto"/>
               </a:rPr>
-              <a:t>Target: the application tier goes Multi-AZ behind a load balancer; the database gets automated backup/restore; a cross-Region DR copy goes to Melbourne (Australian data stays onshore).</a:t>
-            </a:r>
-          </a:p>
-          <a:p>
-            <a:pPr marL="0" indent="0">
-              <a:lnSpc>
-                <a:spcPct val="105000"/>
-              </a:lnSpc>
-              <a:spcBef>
-                <a:spcPts val="0"/>
-              </a:spcBef>
-              <a:spcAft>
-                <a:spcPts val="1000"/>
-              </a:spcAft>
-            </a:pPr>
-            <a:r>
-              <a:rPr sz="1700" b="1" i="0">
-                <a:solidFill>
-                  <a:srgbClr val="EDAB0C"/>
-                </a:solidFill>
-                <a:latin typeface="Roboto"/>
-              </a:rPr>
-              <a:t>■  </a:t>
-            </a:r>
-            <a:r>
-              <a:rPr sz="1700" b="0" i="0">
+              <a:t>Evaluate and confirm the performance metrics for the practice engagement — a named metric and a target value for each goal.</a:t>
+            </a:r>
+          </a:p>
+        </p:txBody>
+      </p:sp>
+      <p:sp>
+        <p:nvSpPr>
+          <p:cNvPr id="6" name="Rounded Rectangle 5"/>
+          <p:cNvSpPr/>
+          <p:nvPr/>
+        </p:nvSpPr>
+        <p:spPr>
+          <a:xfrm>
+            <a:off x="640080" y="5897880"/>
+            <a:ext cx="4023360" cy="457200"/>
+          </a:xfrm>
+          <a:prstGeom prst="roundRect">
+            <a:avLst/>
+          </a:prstGeom>
+          <a:solidFill>
+            <a:srgbClr val="F9F9F9"/>
+          </a:solidFill>
+          <a:ln w="12700">
+            <a:solidFill>
+              <a:srgbClr val="CCCCCC"/>
+            </a:solidFill>
+          </a:ln>
+          <a:effectLst/>
+        </p:spPr>
+        <p:style>
+          <a:lnRef idx="1">
+            <a:schemeClr val="accent1"/>
+          </a:lnRef>
+          <a:fillRef idx="3">
+            <a:schemeClr val="accent1"/>
+          </a:fillRef>
+          <a:effectRef idx="2">
+            <a:schemeClr val="accent1"/>
+          </a:effectRef>
+          <a:fontRef idx="minor">
+            <a:schemeClr val="lt1"/>
+          </a:fontRef>
+        </p:style>
+        <p:txBody>
+          <a:bodyPr rtlCol="0" anchor="ctr"/>
+          <a:lstStyle/>
+          <a:p>
+            <a:pPr algn="ctr"/>
+          </a:p>
+        </p:txBody>
+      </p:sp>
+      <p:sp>
+        <p:nvSpPr>
+          <p:cNvPr id="7" name="TextBox 6"/>
+          <p:cNvSpPr txBox="1"/>
+          <p:nvPr/>
+        </p:nvSpPr>
+        <p:spPr>
+          <a:xfrm>
+            <a:off x="822960" y="5943600"/>
+            <a:ext cx="3657600" cy="365760"/>
+          </a:xfrm>
+          <a:prstGeom prst="rect">
+            <a:avLst/>
+          </a:prstGeom>
+          <a:noFill/>
+        </p:spPr>
+        <p:txBody>
+          <a:bodyPr wrap="square" anchor="ctr" lIns="0" rIns="0" tIns="0" bIns="0">
+            <a:spAutoFit/>
+          </a:bodyPr>
+          <a:lstStyle/>
+          <a:p>
+            <a:r>
+              <a:rPr sz="1500" b="1" i="0">
                 <a:solidFill>
                   <a:srgbClr val="2A2929"/>
                 </a:solidFill>
                 <a:latin typeface="Roboto"/>
               </a:rPr>
-              <a:t>The database is deliberately NOT Multi-AZ — the next slide argues why.</a:t>
-            </a:r>
-          </a:p>
-        </p:txBody>
-      </p:sp>
-      <p:pic>
-        <p:nvPicPr>
-          <p:cNvPr id="5" name="Picture 4" descr="reliability-target.png"/>
-          <p:cNvPicPr>
-            <a:picLocks noChangeAspect="1"/>
-          </p:cNvPicPr>
-          <p:nvPr/>
-        </p:nvPicPr>
-        <p:blipFill>
-          <a:blip r:embed="rId2"/>
-          <a:stretch>
-            <a:fillRect/>
-          </a:stretch>
-        </p:blipFill>
-        <p:spPr>
-          <a:xfrm>
-            <a:off x="6400800" y="2057400"/>
-            <a:ext cx="5120640" cy="3474720"/>
-          </a:xfrm>
-          <a:prstGeom prst="rect">
-            <a:avLst/>
-          </a:prstGeom>
-        </p:spPr>
-      </p:pic>
-      <p:sp>
-        <p:nvSpPr>
-          <p:cNvPr id="6" name="Rectangle 5"/>
+              <a:t>⏱  ~25 min</a:t>
+            </a:r>
+          </a:p>
+        </p:txBody>
+      </p:sp>
+      <p:sp>
+        <p:nvSpPr>
+          <p:cNvPr id="8" name="Rectangle 7"/>
           <p:cNvSpPr/>
           <p:nvPr/>
         </p:nvSpPr>
@@ -9296,7 +9387,7 @@
       </p:sp>
       <p:sp>
         <p:nvSpPr>
-          <p:cNvPr id="7" name="TextBox 6"/>
+          <p:cNvPr id="9" name="TextBox 8"/>
           <p:cNvSpPr txBox="1"/>
           <p:nvPr/>
         </p:nvSpPr>
@@ -9339,7 +9430,7 @@
       </p:sp>
       <p:sp>
         <p:nvSpPr>
-          <p:cNvPr id="8" name="TextBox 7"/>
+          <p:cNvPr id="10" name="TextBox 9"/>
           <p:cNvSpPr txBox="1"/>
           <p:nvPr/>
         </p:nvSpPr>
@@ -9386,7 +9477,7 @@
     <p:bg>
       <p:bgPr>
         <a:solidFill>
-          <a:srgbClr val="FFFFFF"/>
+          <a:srgbClr val="F9F9F9"/>
         </a:solidFill>
         <a:effectLst/>
       </p:bgPr>
@@ -9406,8 +9497,8 @@
         </p:nvSpPr>
         <p:spPr>
           <a:xfrm>
-            <a:off x="640080" y="457200"/>
-            <a:ext cx="10881360" cy="960120"/>
+            <a:off x="640080" y="548640"/>
+            <a:ext cx="10881360" cy="1097280"/>
           </a:xfrm>
           <a:prstGeom prst="rect">
             <a:avLst/>
@@ -9421,13 +9512,29 @@
           <a:lstStyle/>
           <a:p>
             <a:r>
-              <a:rPr sz="2800" b="1" i="0">
+              <a:rPr sz="3200" b="1" i="0">
                 <a:solidFill>
                   <a:srgbClr val="2A2929"/>
                 </a:solidFill>
                 <a:latin typeface="Roboto"/>
               </a:rPr>
-              <a:t>The centrepiece — reject the Multi-AZ database</a:t>
+              <a:t>Key takeaways</a:t>
+            </a:r>
+          </a:p>
+          <a:p>
+            <a:pPr>
+              <a:spcBef>
+                <a:spcPts val="200"/>
+              </a:spcBef>
+            </a:pPr>
+            <a:r>
+              <a:rPr sz="1800" b="1" i="0">
+                <a:solidFill>
+                  <a:srgbClr val="92268F"/>
+                </a:solidFill>
+                <a:latin typeface="Roboto"/>
+              </a:rPr>
+              <a:t>Section 1 · The yardstick</a:t>
             </a:r>
           </a:p>
         </p:txBody>
@@ -9440,7 +9547,7 @@
         </p:nvSpPr>
         <p:spPr>
           <a:xfrm>
-            <a:off x="658368" y="1371600"/>
+            <a:off x="658368" y="1600200"/>
             <a:ext cx="1463040" cy="50800"/>
           </a:xfrm>
           <a:prstGeom prst="rect">
@@ -9478,148 +9585,47 @@
       </p:sp>
       <p:sp>
         <p:nvSpPr>
-          <p:cNvPr id="4" name="TextBox 3"/>
-          <p:cNvSpPr txBox="1"/>
-          <p:nvPr/>
-        </p:nvSpPr>
-        <p:spPr>
-          <a:xfrm>
-            <a:off x="658368" y="1691640"/>
-            <a:ext cx="10881360" cy="4480560"/>
-          </a:xfrm>
-          <a:prstGeom prst="rect">
-            <a:avLst/>
-          </a:prstGeom>
-          <a:noFill/>
-        </p:spPr>
-        <p:txBody>
-          <a:bodyPr wrap="square" anchor="ctr" lIns="0" rIns="0" tIns="0" bIns="0">
-            <a:spAutoFit/>
-          </a:bodyPr>
-          <a:lstStyle/>
-          <a:p>
-            <a:pPr marL="0" indent="0">
-              <a:lnSpc>
-                <a:spcPct val="105000"/>
-              </a:lnSpc>
-              <a:spcBef>
-                <a:spcPts val="0"/>
-              </a:spcBef>
-              <a:spcAft>
-                <a:spcPts val="1000"/>
-              </a:spcAft>
-            </a:pPr>
-            <a:r>
-              <a:rPr sz="2200" b="1" i="0">
-                <a:solidFill>
-                  <a:srgbClr val="EDAB0C"/>
-                </a:solidFill>
-                <a:latin typeface="Roboto"/>
-              </a:rPr>
-              <a:t>■  </a:t>
-            </a:r>
-            <a:r>
-              <a:rPr sz="2200" b="0" i="0">
-                <a:solidFill>
-                  <a:srgbClr val="2A2929"/>
-                </a:solidFill>
-                <a:latin typeface="Roboto"/>
-              </a:rPr>
-              <a:t>Ledgerline is a legacy accounting app, vendor-certified single-instance only — a Multi-AZ (failover) database is simply not available for it.</a:t>
-            </a:r>
-          </a:p>
-          <a:p>
-            <a:pPr marL="0" indent="0">
-              <a:lnSpc>
-                <a:spcPct val="105000"/>
-              </a:lnSpc>
-              <a:spcBef>
-                <a:spcPts val="0"/>
-              </a:spcBef>
-              <a:spcAft>
-                <a:spcPts val="1000"/>
-              </a:spcAft>
-            </a:pPr>
-            <a:r>
-              <a:rPr sz="2200" b="1" i="0">
-                <a:solidFill>
-                  <a:srgbClr val="EDAB0C"/>
-                </a:solidFill>
-                <a:latin typeface="Roboto"/>
-              </a:rPr>
-              <a:t>■  </a:t>
-            </a:r>
-            <a:r>
-              <a:rPr sz="2200" b="0" i="0">
-                <a:solidFill>
-                  <a:srgbClr val="2A2929"/>
-                </a:solidFill>
-                <a:latin typeface="Roboto"/>
-              </a:rPr>
-              <a:t>The only route to DB failover is to replace the accounting product: new licence, data migration, change management, and migration risk.</a:t>
-            </a:r>
-          </a:p>
-          <a:p>
-            <a:pPr marL="0" indent="0">
-              <a:lnSpc>
-                <a:spcPct val="105000"/>
-              </a:lnSpc>
-              <a:spcBef>
-                <a:spcPts val="0"/>
-              </a:spcBef>
-              <a:spcAft>
-                <a:spcPts val="1000"/>
-              </a:spcAft>
-            </a:pPr>
-            <a:r>
-              <a:rPr sz="2200" b="1" i="0">
-                <a:solidFill>
-                  <a:srgbClr val="EDAB0C"/>
-                </a:solidFill>
-                <a:latin typeface="Roboto"/>
-              </a:rPr>
-              <a:t>■  </a:t>
-            </a:r>
-            <a:r>
-              <a:rPr sz="2200" b="0" i="0">
-                <a:solidFill>
-                  <a:srgbClr val="2A2929"/>
-                </a:solidFill>
-                <a:latin typeface="Roboto"/>
-              </a:rPr>
-              <a:t>That cost is disproportionate to the reliability gained — so the design REJECTS a Multi-AZ database and leaves the DB single-AZ with backup/restore + cross-Region DR. This cost-benefit call is the heart of the Topic.</a:t>
-            </a:r>
-          </a:p>
-          <a:p>
-            <a:pPr marL="0" indent="0">
-              <a:lnSpc>
-                <a:spcPct val="105000"/>
-              </a:lnSpc>
-              <a:spcBef>
-                <a:spcPts val="0"/>
-              </a:spcBef>
-              <a:spcAft>
-                <a:spcPts val="1000"/>
-              </a:spcAft>
-            </a:pPr>
-            <a:r>
-              <a:rPr sz="2200" b="1" i="0">
-                <a:solidFill>
-                  <a:srgbClr val="EDAB0C"/>
-                </a:solidFill>
-                <a:latin typeface="Roboto"/>
-              </a:rPr>
-              <a:t>■  </a:t>
-            </a:r>
-            <a:r>
-              <a:rPr sz="2200" b="0" i="0">
-                <a:solidFill>
-                  <a:srgbClr val="2A2929"/>
-                </a:solidFill>
-                <a:latin typeface="Roboto"/>
-              </a:rPr>
-              <a:t>Warn against the reflex: "reliable database = Multi-AZ database" is wrong here — justify against the goal and the cost, not against a checklist.</a:t>
-            </a:r>
+          <p:cNvPr id="4" name="Rectangle 3"/>
+          <p:cNvSpPr/>
+          <p:nvPr/>
+        </p:nvSpPr>
+        <p:spPr>
+          <a:xfrm>
+            <a:off x="640080" y="1965960"/>
+            <a:ext cx="10927080" cy="841248"/>
+          </a:xfrm>
+          <a:prstGeom prst="rect">
+            <a:avLst/>
+          </a:prstGeom>
+          <a:solidFill>
+            <a:srgbClr val="FFFFFF"/>
+          </a:solidFill>
+          <a:ln w="12700">
+            <a:solidFill>
+              <a:srgbClr val="CCCCCC"/>
+            </a:solidFill>
+          </a:ln>
+          <a:effectLst/>
+        </p:spPr>
+        <p:style>
+          <a:lnRef idx="1">
+            <a:schemeClr val="accent1"/>
+          </a:lnRef>
+          <a:fillRef idx="3">
+            <a:schemeClr val="accent1"/>
+          </a:fillRef>
+          <a:effectRef idx="2">
+            <a:schemeClr val="accent1"/>
+          </a:effectRef>
+          <a:fontRef idx="minor">
+            <a:schemeClr val="lt1"/>
+          </a:fontRef>
+        </p:style>
+        <p:txBody>
+          <a:bodyPr rtlCol="0" anchor="ctr"/>
+          <a:lstStyle/>
+          <a:p>
+            <a:pPr algn="ctr"/>
           </a:p>
         </p:txBody>
       </p:sp>
@@ -9631,8 +9637,8 @@
         </p:nvSpPr>
         <p:spPr>
           <a:xfrm>
-            <a:off x="0" y="6565392"/>
-            <a:ext cx="12191695" cy="38100"/>
+            <a:off x="640080" y="1965960"/>
+            <a:ext cx="109728" cy="841248"/>
           </a:xfrm>
           <a:prstGeom prst="rect">
             <a:avLst/>
@@ -9675,6 +9681,218 @@
         </p:nvSpPr>
         <p:spPr>
           <a:xfrm>
+            <a:off x="960120" y="1965960"/>
+            <a:ext cx="10424160" cy="841248"/>
+          </a:xfrm>
+          <a:prstGeom prst="rect">
+            <a:avLst/>
+          </a:prstGeom>
+          <a:noFill/>
+        </p:spPr>
+        <p:txBody>
+          <a:bodyPr wrap="square" anchor="ctr" lIns="0" rIns="0" tIns="0" bIns="0">
+            <a:spAutoFit/>
+          </a:bodyPr>
+          <a:lstStyle/>
+          <a:p>
+            <a:pPr>
+              <a:lnSpc>
+                <a:spcPct val="100000"/>
+              </a:lnSpc>
+            </a:pPr>
+            <a:r>
+              <a:rPr sz="1700" b="0" i="0">
+                <a:solidFill>
+                  <a:srgbClr val="2A2929"/>
+                </a:solidFill>
+                <a:latin typeface="Roboto"/>
+              </a:rPr>
+              <a:t>Every goal gets a metric; every metric gets a target.</a:t>
+            </a:r>
+          </a:p>
+        </p:txBody>
+      </p:sp>
+      <p:sp>
+        <p:nvSpPr>
+          <p:cNvPr id="7" name="Rectangle 6"/>
+          <p:cNvSpPr/>
+          <p:nvPr/>
+        </p:nvSpPr>
+        <p:spPr>
+          <a:xfrm>
+            <a:off x="640080" y="2916936"/>
+            <a:ext cx="10927080" cy="841248"/>
+          </a:xfrm>
+          <a:prstGeom prst="rect">
+            <a:avLst/>
+          </a:prstGeom>
+          <a:solidFill>
+            <a:srgbClr val="FFFFFF"/>
+          </a:solidFill>
+          <a:ln w="12700">
+            <a:solidFill>
+              <a:srgbClr val="CCCCCC"/>
+            </a:solidFill>
+          </a:ln>
+          <a:effectLst/>
+        </p:spPr>
+        <p:style>
+          <a:lnRef idx="1">
+            <a:schemeClr val="accent1"/>
+          </a:lnRef>
+          <a:fillRef idx="3">
+            <a:schemeClr val="accent1"/>
+          </a:fillRef>
+          <a:effectRef idx="2">
+            <a:schemeClr val="accent1"/>
+          </a:effectRef>
+          <a:fontRef idx="minor">
+            <a:schemeClr val="lt1"/>
+          </a:fontRef>
+        </p:style>
+        <p:txBody>
+          <a:bodyPr rtlCol="0" anchor="ctr"/>
+          <a:lstStyle/>
+          <a:p>
+            <a:pPr algn="ctr"/>
+          </a:p>
+        </p:txBody>
+      </p:sp>
+      <p:sp>
+        <p:nvSpPr>
+          <p:cNvPr id="8" name="Rectangle 7"/>
+          <p:cNvSpPr/>
+          <p:nvPr/>
+        </p:nvSpPr>
+        <p:spPr>
+          <a:xfrm>
+            <a:off x="640080" y="2916936"/>
+            <a:ext cx="109728" cy="841248"/>
+          </a:xfrm>
+          <a:prstGeom prst="rect">
+            <a:avLst/>
+          </a:prstGeom>
+          <a:solidFill>
+            <a:srgbClr val="92268F"/>
+          </a:solidFill>
+          <a:ln>
+            <a:noFill/>
+          </a:ln>
+          <a:effectLst/>
+        </p:spPr>
+        <p:style>
+          <a:lnRef idx="1">
+            <a:schemeClr val="accent1"/>
+          </a:lnRef>
+          <a:fillRef idx="3">
+            <a:schemeClr val="accent1"/>
+          </a:fillRef>
+          <a:effectRef idx="2">
+            <a:schemeClr val="accent1"/>
+          </a:effectRef>
+          <a:fontRef idx="minor">
+            <a:schemeClr val="lt1"/>
+          </a:fontRef>
+        </p:style>
+        <p:txBody>
+          <a:bodyPr rtlCol="0" anchor="ctr"/>
+          <a:lstStyle/>
+          <a:p>
+            <a:pPr algn="ctr"/>
+          </a:p>
+        </p:txBody>
+      </p:sp>
+      <p:sp>
+        <p:nvSpPr>
+          <p:cNvPr id="9" name="TextBox 8"/>
+          <p:cNvSpPr txBox="1"/>
+          <p:nvPr/>
+        </p:nvSpPr>
+        <p:spPr>
+          <a:xfrm>
+            <a:off x="960120" y="2916936"/>
+            <a:ext cx="10424160" cy="841248"/>
+          </a:xfrm>
+          <a:prstGeom prst="rect">
+            <a:avLst/>
+          </a:prstGeom>
+          <a:noFill/>
+        </p:spPr>
+        <p:txBody>
+          <a:bodyPr wrap="square" anchor="ctr" lIns="0" rIns="0" tIns="0" bIns="0">
+            <a:spAutoFit/>
+          </a:bodyPr>
+          <a:lstStyle/>
+          <a:p>
+            <a:pPr>
+              <a:lnSpc>
+                <a:spcPct val="100000"/>
+              </a:lnSpc>
+            </a:pPr>
+            <a:r>
+              <a:rPr sz="1700" b="0" i="0">
+                <a:solidFill>
+                  <a:srgbClr val="2A2929"/>
+                </a:solidFill>
+                <a:latin typeface="Roboto"/>
+              </a:rPr>
+              <a:t>Written to be tested against, later, by the build.</a:t>
+            </a:r>
+          </a:p>
+        </p:txBody>
+      </p:sp>
+      <p:sp>
+        <p:nvSpPr>
+          <p:cNvPr id="10" name="Rectangle 9"/>
+          <p:cNvSpPr/>
+          <p:nvPr/>
+        </p:nvSpPr>
+        <p:spPr>
+          <a:xfrm>
+            <a:off x="0" y="6565392"/>
+            <a:ext cx="12191695" cy="38100"/>
+          </a:xfrm>
+          <a:prstGeom prst="rect">
+            <a:avLst/>
+          </a:prstGeom>
+          <a:solidFill>
+            <a:srgbClr val="92268F"/>
+          </a:solidFill>
+          <a:ln>
+            <a:noFill/>
+          </a:ln>
+          <a:effectLst/>
+        </p:spPr>
+        <p:style>
+          <a:lnRef idx="1">
+            <a:schemeClr val="accent1"/>
+          </a:lnRef>
+          <a:fillRef idx="3">
+            <a:schemeClr val="accent1"/>
+          </a:fillRef>
+          <a:effectRef idx="2">
+            <a:schemeClr val="accent1"/>
+          </a:effectRef>
+          <a:fontRef idx="minor">
+            <a:schemeClr val="lt1"/>
+          </a:fontRef>
+        </p:style>
+        <p:txBody>
+          <a:bodyPr rtlCol="0" anchor="ctr"/>
+          <a:lstStyle/>
+          <a:p>
+            <a:pPr algn="ctr"/>
+          </a:p>
+        </p:txBody>
+      </p:sp>
+      <p:sp>
+        <p:nvSpPr>
+          <p:cNvPr id="11" name="TextBox 10"/>
+          <p:cNvSpPr txBox="1"/>
+          <p:nvPr/>
+        </p:nvSpPr>
+        <p:spPr>
+          <a:xfrm>
             <a:off x="502920" y="6400800"/>
             <a:ext cx="5486400" cy="320040"/>
           </a:xfrm>
@@ -9712,7 +9930,7 @@
       </p:sp>
       <p:sp>
         <p:nvSpPr>
-          <p:cNvPr id="7" name="TextBox 6"/>
+          <p:cNvPr id="12" name="TextBox 11"/>
           <p:cNvSpPr txBox="1"/>
           <p:nvPr/>
         </p:nvSpPr>
@@ -9773,54 +9991,20 @@
       <p:grpSpPr/>
       <p:sp>
         <p:nvSpPr>
-          <p:cNvPr id="2" name="TextBox 1"/>
-          <p:cNvSpPr txBox="1"/>
-          <p:nvPr/>
-        </p:nvSpPr>
-        <p:spPr>
-          <a:xfrm>
-            <a:off x="640080" y="457200"/>
-            <a:ext cx="10881360" cy="960120"/>
-          </a:xfrm>
-          <a:prstGeom prst="rect">
-            <a:avLst/>
-          </a:prstGeom>
-          <a:noFill/>
-        </p:spPr>
-        <p:txBody>
-          <a:bodyPr wrap="square" anchor="t" lIns="0" rIns="0" tIns="0" bIns="0">
-            <a:spAutoFit/>
-          </a:bodyPr>
-          <a:lstStyle/>
-          <a:p>
-            <a:r>
-              <a:rPr sz="2800" b="1" i="0">
-                <a:solidFill>
-                  <a:srgbClr val="2A2929"/>
-                </a:solidFill>
-                <a:latin typeface="Roboto"/>
-              </a:rPr>
-              <a:t>Database reliability — the options weighed</a:t>
-            </a:r>
-          </a:p>
-        </p:txBody>
-      </p:sp>
-      <p:sp>
-        <p:nvSpPr>
-          <p:cNvPr id="3" name="Rectangle 2"/>
+          <p:cNvPr id="2" name="Rectangle 1"/>
           <p:cNvSpPr/>
           <p:nvPr/>
         </p:nvSpPr>
         <p:spPr>
           <a:xfrm>
-            <a:off x="658368" y="1371600"/>
-            <a:ext cx="1463040" cy="50800"/>
+            <a:off x="0" y="0"/>
+            <a:ext cx="3931920" cy="6858000"/>
           </a:xfrm>
           <a:prstGeom prst="rect">
             <a:avLst/>
           </a:prstGeom>
           <a:solidFill>
-            <a:srgbClr val="92268F"/>
+            <a:srgbClr val="27B5CE"/>
           </a:solidFill>
           <a:ln>
             <a:noFill/>
@@ -9849,404 +10033,16 @@
           </a:p>
         </p:txBody>
       </p:sp>
-      <p:graphicFrame>
-        <p:nvGraphicFramePr>
-          <p:cNvPr id="4" name="Table 3"/>
-          <p:cNvGraphicFramePr>
-            <a:graphicFrameLocks noGrp="1"/>
-          </p:cNvGraphicFramePr>
-          <p:nvPr/>
-        </p:nvGraphicFramePr>
-        <p:xfrm>
-          <a:off x="658368" y="1828800"/>
-          <a:ext cx="10881360" cy="1828800"/>
-        </p:xfrm>
-        <a:graphic>
-          <a:graphicData uri="http://schemas.openxmlformats.org/drawingml/2006/table">
-            <a:tbl>
-              <a:tblPr>
-                <a:tableStyleId>{5C22544A-7EE6-4342-B048-85BDC9FD1C3A}</a:tableStyleId>
-              </a:tblPr>
-              <a:tblGrid>
-                <a:gridCol w="2720340"/>
-                <a:gridCol w="2720340"/>
-                <a:gridCol w="2720340"/>
-                <a:gridCol w="2720340"/>
-              </a:tblGrid>
-              <a:tr h="457200">
-                <a:tc>
-                  <a:txBody>
-                    <a:bodyPr/>
-                    <a:lstStyle/>
-                    <a:p>
-                      <a:r>
-                        <a:rPr sz="1400" b="1" i="0">
-                          <a:solidFill>
-                            <a:srgbClr val="FFFFFF"/>
-                          </a:solidFill>
-                          <a:latin typeface="Roboto"/>
-                        </a:rPr>
-                        <a:t>Option</a:t>
-                      </a:r>
-                    </a:p>
-                  </a:txBody>
-                  <a:tcPr marL="76200" marR="76200">
-                    <a:solidFill>
-                      <a:srgbClr val="92268F"/>
-                    </a:solidFill>
-                  </a:tcPr>
-                </a:tc>
-                <a:tc>
-                  <a:txBody>
-                    <a:bodyPr/>
-                    <a:lstStyle/>
-                    <a:p>
-                      <a:r>
-                        <a:rPr sz="1400" b="1" i="0">
-                          <a:solidFill>
-                            <a:srgbClr val="FFFFFF"/>
-                          </a:solidFill>
-                          <a:latin typeface="Roboto"/>
-                        </a:rPr>
-                        <a:t>Reliability gain</a:t>
-                      </a:r>
-                    </a:p>
-                  </a:txBody>
-                  <a:tcPr marL="76200" marR="76200">
-                    <a:solidFill>
-                      <a:srgbClr val="92268F"/>
-                    </a:solidFill>
-                  </a:tcPr>
-                </a:tc>
-                <a:tc>
-                  <a:txBody>
-                    <a:bodyPr/>
-                    <a:lstStyle/>
-                    <a:p>
-                      <a:r>
-                        <a:rPr sz="1400" b="1" i="0">
-                          <a:solidFill>
-                            <a:srgbClr val="FFFFFF"/>
-                          </a:solidFill>
-                          <a:latin typeface="Roboto"/>
-                        </a:rPr>
-                        <a:t>Cost / risk</a:t>
-                      </a:r>
-                    </a:p>
-                  </a:txBody>
-                  <a:tcPr marL="76200" marR="76200">
-                    <a:solidFill>
-                      <a:srgbClr val="92268F"/>
-                    </a:solidFill>
-                  </a:tcPr>
-                </a:tc>
-                <a:tc>
-                  <a:txBody>
-                    <a:bodyPr/>
-                    <a:lstStyle/>
-                    <a:p>
-                      <a:r>
-                        <a:rPr sz="1400" b="1" i="0">
-                          <a:solidFill>
-                            <a:srgbClr val="FFFFFF"/>
-                          </a:solidFill>
-                          <a:latin typeface="Roboto"/>
-                        </a:rPr>
-                        <a:t>Verdict</a:t>
-                      </a:r>
-                    </a:p>
-                  </a:txBody>
-                  <a:tcPr marL="76200" marR="76200">
-                    <a:solidFill>
-                      <a:srgbClr val="92268F"/>
-                    </a:solidFill>
-                  </a:tcPr>
-                </a:tc>
-              </a:tr>
-              <a:tr h="457200">
-                <a:tc>
-                  <a:txBody>
-                    <a:bodyPr/>
-                    <a:lstStyle/>
-                    <a:p>
-                      <a:r>
-                        <a:rPr sz="1300" b="0" i="0">
-                          <a:solidFill>
-                            <a:srgbClr val="2A2929"/>
-                          </a:solidFill>
-                          <a:latin typeface="Roboto"/>
-                        </a:rPr>
-                        <a:t>Single-AZ + backup/restore + cross-Region DR</a:t>
-                      </a:r>
-                    </a:p>
-                  </a:txBody>
-                  <a:tcPr marL="76200" marR="76200" marT="50800" marB="50800">
-                    <a:solidFill>
-                      <a:srgbClr val="FFFFFF"/>
-                    </a:solidFill>
-                  </a:tcPr>
-                </a:tc>
-                <a:tc>
-                  <a:txBody>
-                    <a:bodyPr/>
-                    <a:lstStyle/>
-                    <a:p>
-                      <a:r>
-                        <a:rPr sz="1300" b="0" i="0">
-                          <a:solidFill>
-                            <a:srgbClr val="2A2929"/>
-                          </a:solidFill>
-                          <a:latin typeface="Roboto"/>
-                        </a:rPr>
-                        <a:t>recover from loss; DR to Melbourne</a:t>
-                      </a:r>
-                    </a:p>
-                  </a:txBody>
-                  <a:tcPr marL="76200" marR="76200" marT="50800" marB="50800">
-                    <a:solidFill>
-                      <a:srgbClr val="FFFFFF"/>
-                    </a:solidFill>
-                  </a:tcPr>
-                </a:tc>
-                <a:tc>
-                  <a:txBody>
-                    <a:bodyPr/>
-                    <a:lstStyle/>
-                    <a:p>
-                      <a:r>
-                        <a:rPr sz="1300" b="0" i="0">
-                          <a:solidFill>
-                            <a:srgbClr val="2A2929"/>
-                          </a:solidFill>
-                          <a:latin typeface="Roboto"/>
-                        </a:rPr>
-                        <a:t>low — no product change</a:t>
-                      </a:r>
-                    </a:p>
-                  </a:txBody>
-                  <a:tcPr marL="76200" marR="76200" marT="50800" marB="50800">
-                    <a:solidFill>
-                      <a:srgbClr val="FFFFFF"/>
-                    </a:solidFill>
-                  </a:tcPr>
-                </a:tc>
-                <a:tc>
-                  <a:txBody>
-                    <a:bodyPr/>
-                    <a:lstStyle/>
-                    <a:p>
-                      <a:r>
-                        <a:rPr sz="1300" b="0" i="0">
-                          <a:solidFill>
-                            <a:srgbClr val="2A2929"/>
-                          </a:solidFill>
-                          <a:latin typeface="Roboto"/>
-                        </a:rPr>
-                        <a:t>CHOSEN</a:t>
-                      </a:r>
-                    </a:p>
-                  </a:txBody>
-                  <a:tcPr marL="76200" marR="76200" marT="50800" marB="50800">
-                    <a:solidFill>
-                      <a:srgbClr val="FFFFFF"/>
-                    </a:solidFill>
-                  </a:tcPr>
-                </a:tc>
-              </a:tr>
-              <a:tr h="457200">
-                <a:tc>
-                  <a:txBody>
-                    <a:bodyPr/>
-                    <a:lstStyle/>
-                    <a:p>
-                      <a:r>
-                        <a:rPr sz="1300" b="0" i="0">
-                          <a:solidFill>
-                            <a:srgbClr val="2A2929"/>
-                          </a:solidFill>
-                          <a:latin typeface="Roboto"/>
-                        </a:rPr>
-                        <a:t>Multi-AZ (failover) database</a:t>
-                      </a:r>
-                    </a:p>
-                  </a:txBody>
-                  <a:tcPr marL="76200" marR="76200" marT="50800" marB="50800">
-                    <a:solidFill>
-                      <a:srgbClr val="F9F9F9"/>
-                    </a:solidFill>
-                  </a:tcPr>
-                </a:tc>
-                <a:tc>
-                  <a:txBody>
-                    <a:bodyPr/>
-                    <a:lstStyle/>
-                    <a:p>
-                      <a:r>
-                        <a:rPr sz="1300" b="0" i="0">
-                          <a:solidFill>
-                            <a:srgbClr val="2A2929"/>
-                          </a:solidFill>
-                          <a:latin typeface="Roboto"/>
-                        </a:rPr>
-                        <a:t>zero-downtime AZ failover</a:t>
-                      </a:r>
-                    </a:p>
-                  </a:txBody>
-                  <a:tcPr marL="76200" marR="76200" marT="50800" marB="50800">
-                    <a:solidFill>
-                      <a:srgbClr val="F9F9F9"/>
-                    </a:solidFill>
-                  </a:tcPr>
-                </a:tc>
-                <a:tc>
-                  <a:txBody>
-                    <a:bodyPr/>
-                    <a:lstStyle/>
-                    <a:p>
-                      <a:r>
-                        <a:rPr sz="1300" b="0" i="0">
-                          <a:solidFill>
-                            <a:srgbClr val="2A2929"/>
-                          </a:solidFill>
-                          <a:latin typeface="Roboto"/>
-                        </a:rPr>
-                        <a:t>not available — vendor single-instance only</a:t>
-                      </a:r>
-                    </a:p>
-                  </a:txBody>
-                  <a:tcPr marL="76200" marR="76200" marT="50800" marB="50800">
-                    <a:solidFill>
-                      <a:srgbClr val="F9F9F9"/>
-                    </a:solidFill>
-                  </a:tcPr>
-                </a:tc>
-                <a:tc>
-                  <a:txBody>
-                    <a:bodyPr/>
-                    <a:lstStyle/>
-                    <a:p>
-                      <a:r>
-                        <a:rPr sz="1300" b="0" i="0">
-                          <a:solidFill>
-                            <a:srgbClr val="2A2929"/>
-                          </a:solidFill>
-                          <a:latin typeface="Roboto"/>
-                        </a:rPr>
-                        <a:t>infeasible</a:t>
-                      </a:r>
-                    </a:p>
-                  </a:txBody>
-                  <a:tcPr marL="76200" marR="76200" marT="50800" marB="50800">
-                    <a:solidFill>
-                      <a:srgbClr val="F9F9F9"/>
-                    </a:solidFill>
-                  </a:tcPr>
-                </a:tc>
-              </a:tr>
-              <a:tr h="457200">
-                <a:tc>
-                  <a:txBody>
-                    <a:bodyPr/>
-                    <a:lstStyle/>
-                    <a:p>
-                      <a:r>
-                        <a:rPr sz="1300" b="0" i="0">
-                          <a:solidFill>
-                            <a:srgbClr val="2A2929"/>
-                          </a:solidFill>
-                          <a:latin typeface="Roboto"/>
-                        </a:rPr>
-                        <a:t>Replace the accounting product</a:t>
-                      </a:r>
-                    </a:p>
-                  </a:txBody>
-                  <a:tcPr marL="76200" marR="76200" marT="50800" marB="50800">
-                    <a:solidFill>
-                      <a:srgbClr val="FFFFFF"/>
-                    </a:solidFill>
-                  </a:tcPr>
-                </a:tc>
-                <a:tc>
-                  <a:txBody>
-                    <a:bodyPr/>
-                    <a:lstStyle/>
-                    <a:p>
-                      <a:r>
-                        <a:rPr sz="1300" b="0" i="0">
-                          <a:solidFill>
-                            <a:srgbClr val="2A2929"/>
-                          </a:solidFill>
-                          <a:latin typeface="Roboto"/>
-                        </a:rPr>
-                        <a:t>enables Multi-AZ</a:t>
-                      </a:r>
-                    </a:p>
-                  </a:txBody>
-                  <a:tcPr marL="76200" marR="76200" marT="50800" marB="50800">
-                    <a:solidFill>
-                      <a:srgbClr val="FFFFFF"/>
-                    </a:solidFill>
-                  </a:tcPr>
-                </a:tc>
-                <a:tc>
-                  <a:txBody>
-                    <a:bodyPr/>
-                    <a:lstStyle/>
-                    <a:p>
-                      <a:r>
-                        <a:rPr sz="1300" b="0" i="0">
-                          <a:solidFill>
-                            <a:srgbClr val="2A2929"/>
-                          </a:solidFill>
-                          <a:latin typeface="Roboto"/>
-                        </a:rPr>
-                        <a:t>licence + data migration + change mgmt + risk</a:t>
-                      </a:r>
-                    </a:p>
-                  </a:txBody>
-                  <a:tcPr marL="76200" marR="76200" marT="50800" marB="50800">
-                    <a:solidFill>
-                      <a:srgbClr val="FFFFFF"/>
-                    </a:solidFill>
-                  </a:tcPr>
-                </a:tc>
-                <a:tc>
-                  <a:txBody>
-                    <a:bodyPr/>
-                    <a:lstStyle/>
-                    <a:p>
-                      <a:r>
-                        <a:rPr sz="1300" b="0" i="0">
-                          <a:solidFill>
-                            <a:srgbClr val="2A2929"/>
-                          </a:solidFill>
-                          <a:latin typeface="Roboto"/>
-                        </a:rPr>
-                        <a:t>disproportionate — rejected</a:t>
-                      </a:r>
-                    </a:p>
-                  </a:txBody>
-                  <a:tcPr marL="76200" marR="76200" marT="50800" marB="50800">
-                    <a:solidFill>
-                      <a:srgbClr val="FFFFFF"/>
-                    </a:solidFill>
-                  </a:tcPr>
-                </a:tc>
-              </a:tr>
-            </a:tbl>
-          </a:graphicData>
-        </a:graphic>
-      </p:graphicFrame>
-      <p:sp>
-        <p:nvSpPr>
-          <p:cNvPr id="5" name="TextBox 4"/>
+      <p:sp>
+        <p:nvSpPr>
+          <p:cNvPr id="3" name="TextBox 2"/>
           <p:cNvSpPr txBox="1"/>
           <p:nvPr/>
         </p:nvSpPr>
         <p:spPr>
           <a:xfrm>
-            <a:off x="658368" y="5943600"/>
-            <a:ext cx="10881360" cy="457200"/>
+            <a:off x="365760" y="2103120"/>
+            <a:ext cx="3291840" cy="2194560"/>
           </a:xfrm>
           <a:prstGeom prst="rect">
             <a:avLst/>
@@ -10260,20 +10056,86 @@
           <a:lstStyle/>
           <a:p>
             <a:r>
-              <a:rPr sz="1500" b="0" i="1">
+              <a:rPr sz="13000" b="1" i="0">
+                <a:solidFill>
+                  <a:srgbClr val="FFFFFF"/>
+                </a:solidFill>
+                <a:latin typeface="Roboto"/>
+              </a:rPr>
+              <a:t>02</a:t>
+            </a:r>
+          </a:p>
+        </p:txBody>
+      </p:sp>
+      <p:sp>
+        <p:nvSpPr>
+          <p:cNvPr id="4" name="TextBox 3"/>
+          <p:cNvSpPr txBox="1"/>
+          <p:nvPr/>
+        </p:nvSpPr>
+        <p:spPr>
+          <a:xfrm>
+            <a:off x="4480560" y="2468880"/>
+            <a:ext cx="7132320" cy="2194560"/>
+          </a:xfrm>
+          <a:prstGeom prst="rect">
+            <a:avLst/>
+          </a:prstGeom>
+          <a:noFill/>
+        </p:spPr>
+        <p:txBody>
+          <a:bodyPr wrap="square" anchor="t" lIns="0" rIns="0" tIns="0" bIns="0">
+            <a:spAutoFit/>
+          </a:bodyPr>
+          <a:lstStyle/>
+          <a:p>
+            <a:r>
+              <a:rPr sz="1600" b="1" i="0">
+                <a:solidFill>
+                  <a:srgbClr val="27B5CE"/>
+                </a:solidFill>
+                <a:latin typeface="Roboto"/>
+              </a:rPr>
+              <a:t>SECTION</a:t>
+            </a:r>
+          </a:p>
+          <a:p>
+            <a:pPr>
+              <a:spcBef>
+                <a:spcPts val="600"/>
+              </a:spcBef>
+            </a:pPr>
+            <a:r>
+              <a:rPr sz="3800" b="1" i="0">
+                <a:solidFill>
+                  <a:srgbClr val="2A2929"/>
+                </a:solidFill>
+                <a:latin typeface="Roboto"/>
+              </a:rPr>
+              <a:t>Design the four resource tiers</a:t>
+            </a:r>
+          </a:p>
+          <a:p>
+            <a:pPr>
+              <a:spcBef>
+                <a:spcPts val="1000"/>
+              </a:spcBef>
+            </a:pPr>
+            <a:r>
+              <a:rPr sz="2000" b="0" i="1">
                 <a:solidFill>
                   <a:srgbClr val="484848"/>
                 </a:solidFill>
                 <a:latin typeface="Roboto Light"/>
               </a:rPr>
-              <a:t>The chosen row is the AT1 cost-benefit centrepiece — the design must argue it, not just state it.</a:t>
-            </a:r>
-          </a:p>
-        </p:txBody>
-      </p:sp>
-      <p:sp>
-        <p:nvSpPr>
-          <p:cNvPr id="6" name="Rectangle 5"/>
+              <a:t>select and improve each tier to the business needs</a:t>
+            </a:r>
+          </a:p>
+        </p:txBody>
+      </p:sp>
+      <p:sp>
+        <p:nvSpPr>
+          <p:cNvPr id="5" name="Rectangle 4"/>
           <p:cNvSpPr/>
           <p:nvPr/>
         </p:nvSpPr>
@@ -10286,7 +10148,7 @@
             <a:avLst/>
           </a:prstGeom>
           <a:solidFill>
-            <a:srgbClr val="92268F"/>
+            <a:srgbClr val="27B5CE"/>
           </a:solidFill>
           <a:ln>
             <a:noFill/>
@@ -10317,7 +10179,7 @@
       </p:sp>
       <p:sp>
         <p:nvSpPr>
-          <p:cNvPr id="7" name="TextBox 6"/>
+          <p:cNvPr id="6" name="TextBox 5"/>
           <p:cNvSpPr txBox="1"/>
           <p:nvPr/>
         </p:nvSpPr>
@@ -10360,7 +10222,7 @@
       </p:sp>
       <p:sp>
         <p:nvSpPr>
-          <p:cNvPr id="8" name="TextBox 7"/>
+          <p:cNvPr id="7" name="TextBox 6"/>
           <p:cNvSpPr txBox="1"/>
           <p:nvPr/>
         </p:nvSpPr>
@@ -10388,7 +10250,7 @@
                 </a:solidFill>
                 <a:latin typeface="Roboto"/>
               </a:rPr>
-              <a:t>5</a:t>
+              <a:t/>
             </a:r>
           </a:p>
         </p:txBody>
@@ -10448,7 +10310,7 @@
                 </a:solidFill>
                 <a:latin typeface="Roboto"/>
               </a:rPr>
-              <a:t>Cloud-service features that deliver reliability</a:t>
+              <a:t>Scalability is elastic capacity-on-demand</a:t>
             </a:r>
           </a:p>
         </p:txBody>
@@ -10468,7 +10330,7 @@
             <a:avLst/>
           </a:prstGeom>
           <a:solidFill>
-            <a:srgbClr val="92268F"/>
+            <a:srgbClr val="27B5CE"/>
           </a:solidFill>
           <a:ln>
             <a:noFill/>
@@ -10546,7 +10408,7 @@
                 </a:solidFill>
                 <a:latin typeface="Roboto"/>
               </a:rPr>
-              <a:t>The techniques the design leans on: Multi-AZ deployment, load-balancer health checks, automated database backups and snapshots, and cross-Region snapshot/DR copy (KE 9).</a:t>
+              <a:t>Elastic capacity: add resources as load rises, release them as load falls — pay for what you use.</a:t>
             </a:r>
           </a:p>
           <a:p>
@@ -10577,7 +10439,7 @@
                 </a:solidFill>
                 <a:latin typeface="Roboto"/>
               </a:rPr>
-              <a:t>Express the design as a parameterised CloudFormation template — Region and environment as parameters — so the same design deploys repeatably (and to Melbourne for DR).</a:t>
+              <a:t>The test of a scalable design is a demonstration — it scales on demand, proven later by test — not a load forecast on paper.</a:t>
             </a:r>
           </a:p>
           <a:p>
@@ -10608,7 +10470,7 @@
                 </a:solidFill>
                 <a:latin typeface="Roboto"/>
               </a:rPr>
-              <a:t>Choose the feature that meets the goal at least cost; each choice cites the goal it serves.</a:t>
+              <a:t>Over-provisioning fixed spare capacity is not scalability; right-size instead.</a:t>
             </a:r>
           </a:p>
         </p:txBody>
@@ -10628,7 +10490,7 @@
             <a:avLst/>
           </a:prstGeom>
           <a:solidFill>
-            <a:srgbClr val="92268F"/>
+            <a:srgbClr val="27B5CE"/>
           </a:solidFill>
           <a:ln>
             <a:noFill/>
@@ -10730,7 +10592,7 @@
                 </a:solidFill>
                 <a:latin typeface="Roboto"/>
               </a:rPr>
-              <a:t>6</a:t>
+              <a:t>5</a:t>
             </a:r>
           </a:p>
         </p:txBody>
@@ -10790,7 +10652,7 @@
                 </a:solidFill>
                 <a:latin typeface="Roboto"/>
               </a:rPr>
-              <a:t>The India residency slice</a:t>
+              <a:t>The four resource components</a:t>
             </a:r>
           </a:p>
         </p:txBody>
@@ -10810,7 +10672,7 @@
             <a:avLst/>
           </a:prstGeom>
           <a:solidFill>
-            <a:srgbClr val="92268F"/>
+            <a:srgbClr val="27B5CE"/>
           </a:solidFill>
           <a:ln>
             <a:noFill/>
@@ -10847,8 +10709,8 @@
         </p:nvSpPr>
         <p:spPr>
           <a:xfrm>
-            <a:off x="658368" y="1691640"/>
-            <a:ext cx="10881360" cy="4480560"/>
+            <a:off x="658368" y="1737360"/>
+            <a:ext cx="5486400" cy="4297680"/>
           </a:xfrm>
           <a:prstGeom prst="rect">
             <a:avLst/>
@@ -10856,7 +10718,7 @@
           <a:noFill/>
         </p:spPr>
         <p:txBody>
-          <a:bodyPr wrap="square" anchor="ctr" lIns="0" rIns="0" tIns="0" bIns="0">
+          <a:bodyPr wrap="square" anchor="t" lIns="0" rIns="0" tIns="0" bIns="0">
             <a:spAutoFit/>
           </a:bodyPr>
           <a:lstStyle/>
@@ -10873,7 +10735,7 @@
               </a:spcAft>
             </a:pPr>
             <a:r>
-              <a:rPr sz="2400" b="1" i="0">
+              <a:rPr sz="1700" b="1" i="0">
                 <a:solidFill>
                   <a:srgbClr val="EDAB0C"/>
                 </a:solidFill>
@@ -10882,13 +10744,13 @@
               <a:t>■  </a:t>
             </a:r>
             <a:r>
-              <a:rPr sz="2400" b="0" i="0">
+              <a:rPr sz="1700" b="0" i="0">
                 <a:solidFill>
                   <a:srgbClr val="2A2929"/>
                 </a:solidFill>
                 <a:latin typeface="Roboto"/>
               </a:rPr>
-              <a:t>A light residency constraint: CERT-In-mandated logs and Companies-Act books-of-account must reside in Mumbai (ap-south-1); the main system stays in Sydney.</a:t>
+              <a:t>Split the design across four tiers: network, compute, database, storage.</a:t>
             </a:r>
           </a:p>
           <a:p>
@@ -10904,7 +10766,7 @@
               </a:spcAft>
             </a:pPr>
             <a:r>
-              <a:rPr sz="2400" b="1" i="0">
+              <a:rPr sz="1700" b="1" i="0">
                 <a:solidFill>
                   <a:srgbClr val="EDAB0C"/>
                 </a:solidFill>
@@ -10913,13 +10775,13 @@
               <a:t>■  </a:t>
             </a:r>
             <a:r>
-              <a:rPr sz="2400" b="0" i="0">
+              <a:rPr sz="1700" b="0" i="0">
                 <a:solidFill>
                   <a:srgbClr val="2A2929"/>
                 </a:solidFill>
                 <a:latin typeface="Roboto"/>
               </a:rPr>
-              <a:t>Design keeps the regulated data in-Region — the residency requirement is an input constraint on the design, not a bolt-on.</a:t>
+              <a:t>Compute and storage scale elastically on demand; network and database are selected and configured to support that scale.</a:t>
             </a:r>
           </a:p>
           <a:p>
@@ -10935,7 +10797,7 @@
               </a:spcAft>
             </a:pPr>
             <a:r>
-              <a:rPr sz="2400" b="1" i="0">
+              <a:rPr sz="1700" b="1" i="0">
                 <a:solidFill>
                   <a:srgbClr val="EDAB0C"/>
                 </a:solidFill>
@@ -10944,20 +10806,44 @@
               <a:t>■  </a:t>
             </a:r>
             <a:r>
-              <a:rPr sz="2400" b="0" i="0">
+              <a:rPr sz="1700" b="0" i="0">
                 <a:solidFill>
                   <a:srgbClr val="2A2929"/>
                 </a:solidFill>
                 <a:latin typeface="Roboto"/>
               </a:rPr>
-              <a:t>Note it as a scoped slice of the reliability/DR design, not a second architecture.</a:t>
-            </a:r>
-          </a:p>
-        </p:txBody>
-      </p:sp>
-      <p:sp>
-        <p:nvSpPr>
-          <p:cNvPr id="5" name="Rectangle 4"/>
+              <a:t>These are the same four units the build team later divides the IaC work by — a clean seam from design to build.</a:t>
+            </a:r>
+          </a:p>
+        </p:txBody>
+      </p:sp>
+      <p:pic>
+        <p:nvPicPr>
+          <p:cNvPr id="5" name="Picture 4" descr="four-components.png"/>
+          <p:cNvPicPr>
+            <a:picLocks noChangeAspect="1"/>
+          </p:cNvPicPr>
+          <p:nvPr/>
+        </p:nvPicPr>
+        <p:blipFill>
+          <a:blip r:embed="rId2"/>
+          <a:stretch>
+            <a:fillRect/>
+          </a:stretch>
+        </p:blipFill>
+        <p:spPr>
+          <a:xfrm>
+            <a:off x="6400800" y="3131820"/>
+            <a:ext cx="5120640" cy="1325880"/>
+          </a:xfrm>
+          <a:prstGeom prst="rect">
+            <a:avLst/>
+          </a:prstGeom>
+        </p:spPr>
+      </p:pic>
+      <p:sp>
+        <p:nvSpPr>
+          <p:cNvPr id="6" name="Rectangle 5"/>
           <p:cNvSpPr/>
           <p:nvPr/>
         </p:nvSpPr>
@@ -10970,7 +10856,7 @@
             <a:avLst/>
           </a:prstGeom>
           <a:solidFill>
-            <a:srgbClr val="92268F"/>
+            <a:srgbClr val="27B5CE"/>
           </a:solidFill>
           <a:ln>
             <a:noFill/>
@@ -11001,7 +10887,7 @@
       </p:sp>
       <p:sp>
         <p:nvSpPr>
-          <p:cNvPr id="6" name="TextBox 5"/>
+          <p:cNvPr id="7" name="TextBox 6"/>
           <p:cNvSpPr txBox="1"/>
           <p:nvPr/>
         </p:nvSpPr>
@@ -11044,7 +10930,7 @@
       </p:sp>
       <p:sp>
         <p:nvSpPr>
-          <p:cNvPr id="7" name="TextBox 6"/>
+          <p:cNvPr id="8" name="TextBox 7"/>
           <p:cNvSpPr txBox="1"/>
           <p:nvPr/>
         </p:nvSpPr>
@@ -11072,7 +10958,7 @@
                 </a:solidFill>
                 <a:latin typeface="Roboto"/>
               </a:rPr>
-              <a:t>7</a:t>
+              <a:t>6</a:t>
             </a:r>
           </a:p>
         </p:txBody>
